--- a/AdCraft_AI_Marketplace_Pitch_Deck.pptx
+++ b/AdCraft_AI_Marketplace_Pitch_Deck.pptx
@@ -15,9 +15,10 @@
     <p:sldId id="263" r:id="rId9"/>
     <p:sldId id="264" r:id="rId10"/>
     <p:sldId id="265" r:id="rId11"/>
+    <p:sldId id="266" r:id="rId12"/>
   </p:sldIdLst>
   <p:notesMasterIdLst>
-    <p:notesMasterId r:id="rId12"/>
+    <p:notesMasterId r:id="rId13"/>
   </p:notesMasterIdLst>
   <p:sldSz cx="12191695" cy="6858000"/>
   <p:notesSz cx="6858000" cy="12191695"/>
@@ -623,6 +624,94 @@
             <a:fld id="{F7021451-1387-4CA6-816F-3879F97B5CBC}" type="slidenum">
               <a:rPr lang="en-US"/>
               <a:t>10</a:t>
+            </a:fld>
+            <a:endParaRPr lang="en-US"/>
+          </a:p>
+        </p:txBody>
+      </p:sp>
+    </p:spTree>
+    <p:extLst>
+      <p:ext uri="{BB962C8B-B14F-4D97-AF65-F5344CB8AC3E}">
+        <p14:creationId xmlns:p14="http://schemas.microsoft.com/office/powerpoint/2010/main" val="1024086991"/>
+      </p:ext>
+    </p:extLst>
+  </p:cSld>
+  <p:clrMapOvr>
+    <a:masterClrMapping/>
+  </p:clrMapOvr>
+</p:notes>
+</file>
+
+<file path=ppt/notesSlides/notesSlide11.xml><?xml version="1.0" encoding="utf-8"?>
+<p:notes xmlns:a="http://schemas.openxmlformats.org/drawingml/2006/main" xmlns:r="http://schemas.openxmlformats.org/officeDocument/2006/relationships" xmlns:p="http://schemas.openxmlformats.org/presentationml/2006/main">
+  <p:cSld>
+    <p:spTree>
+      <p:nvGrpSpPr>
+        <p:cNvPr id="1" name=""/>
+        <p:cNvGrpSpPr/>
+        <p:nvPr/>
+      </p:nvGrpSpPr>
+      <p:grpSpPr>
+        <a:xfrm>
+          <a:off x="0" y="0"/>
+          <a:ext cx="0" cy="0"/>
+          <a:chOff x="0" y="0"/>
+          <a:chExt cx="0" cy="0"/>
+        </a:xfrm>
+      </p:grpSpPr>
+      <p:sp>
+        <p:nvSpPr>
+          <p:cNvPr id="2" name="Slide Image Placeholder 1"/>
+          <p:cNvSpPr>
+            <a:spLocks noGrp="1" noRot="1" noChangeAspect="1"/>
+          </p:cNvSpPr>
+          <p:nvPr>
+            <p:ph type="sldImg"/>
+          </p:nvPr>
+        </p:nvSpPr>
+        <p:spPr/>
+      </p:sp>
+      <p:sp>
+        <p:nvSpPr>
+          <p:cNvPr id="3" name="Notes Placeholder 2"/>
+          <p:cNvSpPr>
+            <a:spLocks noGrp="1"/>
+          </p:cNvSpPr>
+          <p:nvPr>
+            <p:ph type="body" idx="1"/>
+          </p:nvPr>
+        </p:nvSpPr>
+        <p:spPr/>
+        <p:txBody>
+          <a:bodyPr/>
+          <a:lstStyle/>
+          <a:p>
+            <a:r>
+              <a:rPr lang="en-US" dirty="0"/>
+              <a:t/>
+            </a:r>
+            <a:endParaRPr lang="en-US" dirty="0"/>
+          </a:p>
+        </p:txBody>
+      </p:sp>
+      <p:sp>
+        <p:nvSpPr>
+          <p:cNvPr id="4" name="Slide Number Placeholder 3"/>
+          <p:cNvSpPr>
+            <a:spLocks noGrp="1"/>
+          </p:cNvSpPr>
+          <p:nvPr>
+            <p:ph type="sldNum" sz="quarter" idx="10"/>
+          </p:nvPr>
+        </p:nvSpPr>
+        <p:spPr/>
+        <p:txBody>
+          <a:bodyPr/>
+          <a:lstStyle/>
+          <a:p>
+            <a:fld id="{F7021451-1387-4CA6-816F-3879F97B5CBC}" type="slidenum">
+              <a:rPr lang="en-US"/>
+              <a:t>11</a:t>
             </a:fld>
             <a:endParaRPr lang="en-US"/>
           </a:p>
@@ -1980,6 +2069,629 @@
       </p:grpSpPr>
       <p:sp>
         <p:nvSpPr>
+          <p:cNvPr id="2" name="Text 0"/>
+          <p:cNvSpPr/>
+          <p:nvPr/>
+        </p:nvSpPr>
+        <p:spPr>
+          <a:xfrm>
+            <a:off x="640080" y="457200"/>
+            <a:ext cx="9144000" cy="365760"/>
+          </a:xfrm>
+          <a:prstGeom prst="rect">
+            <a:avLst/>
+          </a:prstGeom>
+          <a:noFill/>
+          <a:ln/>
+        </p:spPr>
+        <p:txBody>
+          <a:bodyPr wrap="square" rtlCol="0" anchor="ctr"/>
+          <a:lstStyle/>
+          <a:p>
+            <a:pPr algn="r" indent="0" marL="0">
+              <a:buNone/>
+            </a:pPr>
+            <a:r>
+              <a:rPr lang="en-US" sz="1400" b="1" spc="100" kern="0" dirty="0">
+                <a:solidFill>
+                  <a:srgbClr val="F9E795"/>
+                </a:solidFill>
+                <a:latin typeface="Calibri" pitchFamily="34" charset="0"/>
+                <a:ea typeface="Calibri" pitchFamily="34" charset="-122"/>
+                <a:cs typeface="Calibri" pitchFamily="34" charset="-120"/>
+              </a:rPr>
+              <a:t>لماذا ننجح</a:t>
+            </a:r>
+            <a:endParaRPr lang="en-US" sz="1400" dirty="0"/>
+          </a:p>
+        </p:txBody>
+      </p:sp>
+      <p:sp>
+        <p:nvSpPr>
+          <p:cNvPr id="3" name="Text 1"/>
+          <p:cNvSpPr/>
+          <p:nvPr/>
+        </p:nvSpPr>
+        <p:spPr>
+          <a:xfrm>
+            <a:off x="640080" y="777240"/>
+            <a:ext cx="10908792" cy="822960"/>
+          </a:xfrm>
+          <a:prstGeom prst="rect">
+            <a:avLst/>
+          </a:prstGeom>
+          <a:noFill/>
+          <a:ln/>
+        </p:spPr>
+        <p:txBody>
+          <a:bodyPr wrap="square" rtlCol="0" anchor="ctr"/>
+          <a:lstStyle/>
+          <a:p>
+            <a:pPr algn="r" indent="0" marL="0">
+              <a:buNone/>
+            </a:pPr>
+            <a:r>
+              <a:rPr lang="en-US" sz="3200" b="1" dirty="0">
+                <a:solidFill>
+                  <a:srgbClr val="FFFFFF"/>
+                </a:solidFill>
+                <a:latin typeface="Calibri" pitchFamily="34" charset="0"/>
+                <a:ea typeface="Calibri" pitchFamily="34" charset="-122"/>
+                <a:cs typeface="Calibri" pitchFamily="34" charset="-120"/>
+              </a:rPr>
+              <a:t>القيمة الاستثمارية</a:t>
+            </a:r>
+            <a:endParaRPr lang="en-US" sz="3200" dirty="0"/>
+          </a:p>
+        </p:txBody>
+      </p:sp>
+      <p:sp>
+        <p:nvSpPr>
+          <p:cNvPr id="4" name="Shape 2"/>
+          <p:cNvSpPr/>
+          <p:nvPr/>
+        </p:nvSpPr>
+        <p:spPr>
+          <a:xfrm>
+            <a:off x="640080" y="2286000"/>
+            <a:ext cx="3383280" cy="3383280"/>
+          </a:xfrm>
+          <a:prstGeom prst="roundRect">
+            <a:avLst>
+              <a:gd name="adj" fmla="val 3243"/>
+            </a:avLst>
+          </a:prstGeom>
+          <a:solidFill>
+            <a:srgbClr val="161E48"/>
+          </a:solidFill>
+          <a:ln/>
+          <a:effectLst>
+            <a:outerShdw sx="100000" sy="100000" kx="0" ky="0" algn="bl" rotWithShape="0" blurRad="101600" dist="25400" dir="5400000">
+              <a:srgbClr val="000000">
+                <a:alpha val="12000"/>
+              </a:srgbClr>
+            </a:outerShdw>
+          </a:effectLst>
+        </p:spPr>
+      </p:sp>
+      <p:sp>
+        <p:nvSpPr>
+          <p:cNvPr id="5" name="Shape 3"/>
+          <p:cNvSpPr/>
+          <p:nvPr/>
+        </p:nvSpPr>
+        <p:spPr>
+          <a:xfrm>
+            <a:off x="1851660" y="2606040"/>
+            <a:ext cx="960120" cy="960120"/>
+          </a:xfrm>
+          <a:prstGeom prst="ellipse">
+            <a:avLst/>
+          </a:prstGeom>
+          <a:solidFill>
+            <a:srgbClr val="F96167"/>
+          </a:solidFill>
+          <a:ln/>
+          <a:effectLst>
+            <a:outerShdw sx="100000" sy="100000" kx="0" ky="0" algn="bl" rotWithShape="0" blurRad="76200" dist="25400" dir="5400000">
+              <a:srgbClr val="000000">
+                <a:alpha val="25000"/>
+              </a:srgbClr>
+            </a:outerShdw>
+          </a:effectLst>
+        </p:spPr>
+      </p:sp>
+      <p:pic>
+        <p:nvPicPr>
+          <p:cNvPr id="6" name="Image 0" descr="preencoded.png">    </p:cNvPr>
+          <p:cNvPicPr>
+            <a:picLocks noChangeAspect="1"/>
+          </p:cNvPicPr>
+          <p:nvPr/>
+        </p:nvPicPr>
+        <p:blipFill>
+          <a:blip r:embed="rId1"/>
+          <a:stretch>
+            <a:fillRect/>
+          </a:stretch>
+        </p:blipFill>
+        <p:spPr>
+          <a:xfrm>
+            <a:off x="2091690" y="2846070"/>
+            <a:ext cx="480060" cy="480060"/>
+          </a:xfrm>
+          <a:prstGeom prst="rect">
+            <a:avLst/>
+          </a:prstGeom>
+        </p:spPr>
+      </p:pic>
+      <p:sp>
+        <p:nvSpPr>
+          <p:cNvPr id="7" name="Text 4"/>
+          <p:cNvSpPr/>
+          <p:nvPr/>
+        </p:nvSpPr>
+        <p:spPr>
+          <a:xfrm>
+            <a:off x="822960" y="3794760"/>
+            <a:ext cx="3017520" cy="457200"/>
+          </a:xfrm>
+          <a:prstGeom prst="rect">
+            <a:avLst/>
+          </a:prstGeom>
+          <a:noFill/>
+          <a:ln/>
+        </p:spPr>
+        <p:txBody>
+          <a:bodyPr wrap="square" rtlCol="0" anchor="ctr"/>
+          <a:lstStyle/>
+          <a:p>
+            <a:pPr algn="ctr" indent="0" marL="0">
+              <a:buNone/>
+            </a:pPr>
+            <a:r>
+              <a:rPr lang="en-US" sz="1650" b="1" dirty="0">
+                <a:solidFill>
+                  <a:srgbClr val="FFFFFF"/>
+                </a:solidFill>
+                <a:latin typeface="Calibri" pitchFamily="34" charset="0"/>
+                <a:ea typeface="Calibri" pitchFamily="34" charset="-122"/>
+                <a:cs typeface="Calibri" pitchFamily="34" charset="-120"/>
+              </a:rPr>
+              <a:t>3 مصادر دخل</a:t>
+            </a:r>
+            <a:endParaRPr lang="en-US" sz="1650" dirty="0"/>
+          </a:p>
+        </p:txBody>
+      </p:sp>
+      <p:sp>
+        <p:nvSpPr>
+          <p:cNvPr id="8" name="Text 5"/>
+          <p:cNvSpPr/>
+          <p:nvPr/>
+        </p:nvSpPr>
+        <p:spPr>
+          <a:xfrm>
+            <a:off x="914400" y="4315968"/>
+            <a:ext cx="2834640" cy="1188720"/>
+          </a:xfrm>
+          <a:prstGeom prst="rect">
+            <a:avLst/>
+          </a:prstGeom>
+          <a:noFill/>
+          <a:ln/>
+        </p:spPr>
+        <p:txBody>
+          <a:bodyPr wrap="square" rtlCol="0" anchor="ctr"/>
+          <a:lstStyle/>
+          <a:p>
+            <a:pPr algn="ctr" indent="0" marL="0">
+              <a:buNone/>
+            </a:pPr>
+            <a:r>
+              <a:rPr lang="en-US" sz="1200" dirty="0">
+                <a:solidFill>
+                  <a:srgbClr val="CADCFC"/>
+                </a:solidFill>
+                <a:latin typeface="Calibri" pitchFamily="34" charset="0"/>
+                <a:ea typeface="Calibri" pitchFamily="34" charset="-122"/>
+                <a:cs typeface="Calibri" pitchFamily="34" charset="-120"/>
+              </a:rPr>
+              <a:t>متكررة من عملية واحدة: توليد الإعلان، عمولة الطباعة، وخدمة التوصيل</a:t>
+            </a:r>
+            <a:endParaRPr lang="en-US" sz="1200" dirty="0"/>
+          </a:p>
+        </p:txBody>
+      </p:sp>
+      <p:sp>
+        <p:nvSpPr>
+          <p:cNvPr id="9" name="Shape 6"/>
+          <p:cNvSpPr/>
+          <p:nvPr/>
+        </p:nvSpPr>
+        <p:spPr>
+          <a:xfrm>
+            <a:off x="4352544" y="2286000"/>
+            <a:ext cx="3383280" cy="3383280"/>
+          </a:xfrm>
+          <a:prstGeom prst="roundRect">
+            <a:avLst>
+              <a:gd name="adj" fmla="val 3243"/>
+            </a:avLst>
+          </a:prstGeom>
+          <a:solidFill>
+            <a:srgbClr val="161E48"/>
+          </a:solidFill>
+          <a:ln/>
+          <a:effectLst>
+            <a:outerShdw sx="100000" sy="100000" kx="0" ky="0" algn="bl" rotWithShape="0" blurRad="101600" dist="25400" dir="5400000">
+              <a:srgbClr val="000000">
+                <a:alpha val="12000"/>
+              </a:srgbClr>
+            </a:outerShdw>
+          </a:effectLst>
+        </p:spPr>
+      </p:sp>
+      <p:sp>
+        <p:nvSpPr>
+          <p:cNvPr id="10" name="Shape 7"/>
+          <p:cNvSpPr/>
+          <p:nvPr/>
+        </p:nvSpPr>
+        <p:spPr>
+          <a:xfrm>
+            <a:off x="5564124" y="2606040"/>
+            <a:ext cx="960120" cy="960120"/>
+          </a:xfrm>
+          <a:prstGeom prst="ellipse">
+            <a:avLst/>
+          </a:prstGeom>
+          <a:solidFill>
+            <a:srgbClr val="F96167"/>
+          </a:solidFill>
+          <a:ln/>
+          <a:effectLst>
+            <a:outerShdw sx="100000" sy="100000" kx="0" ky="0" algn="bl" rotWithShape="0" blurRad="76200" dist="25400" dir="5400000">
+              <a:srgbClr val="000000">
+                <a:alpha val="25000"/>
+              </a:srgbClr>
+            </a:outerShdw>
+          </a:effectLst>
+        </p:spPr>
+      </p:sp>
+      <p:pic>
+        <p:nvPicPr>
+          <p:cNvPr id="11" name="Image 1" descr="preencoded.png">    </p:cNvPr>
+          <p:cNvPicPr>
+            <a:picLocks noChangeAspect="1"/>
+          </p:cNvPicPr>
+          <p:nvPr/>
+        </p:nvPicPr>
+        <p:blipFill>
+          <a:blip r:embed="rId2"/>
+          <a:stretch>
+            <a:fillRect/>
+          </a:stretch>
+        </p:blipFill>
+        <p:spPr>
+          <a:xfrm>
+            <a:off x="5804154" y="2846070"/>
+            <a:ext cx="480060" cy="480060"/>
+          </a:xfrm>
+          <a:prstGeom prst="rect">
+            <a:avLst/>
+          </a:prstGeom>
+        </p:spPr>
+      </p:pic>
+      <p:sp>
+        <p:nvSpPr>
+          <p:cNvPr id="12" name="Text 8"/>
+          <p:cNvSpPr/>
+          <p:nvPr/>
+        </p:nvSpPr>
+        <p:spPr>
+          <a:xfrm>
+            <a:off x="4535424" y="3794760"/>
+            <a:ext cx="3017520" cy="457200"/>
+          </a:xfrm>
+          <a:prstGeom prst="rect">
+            <a:avLst/>
+          </a:prstGeom>
+          <a:noFill/>
+          <a:ln/>
+        </p:spPr>
+        <p:txBody>
+          <a:bodyPr wrap="square" rtlCol="0" anchor="ctr"/>
+          <a:lstStyle/>
+          <a:p>
+            <a:pPr algn="ctr" indent="0" marL="0">
+              <a:buNone/>
+            </a:pPr>
+            <a:r>
+              <a:rPr lang="en-US" sz="1650" b="1" dirty="0">
+                <a:solidFill>
+                  <a:srgbClr val="FFFFFF"/>
+                </a:solidFill>
+                <a:latin typeface="Calibri" pitchFamily="34" charset="0"/>
+                <a:ea typeface="Calibri" pitchFamily="34" charset="-122"/>
+                <a:cs typeface="Calibri" pitchFamily="34" charset="-120"/>
+              </a:rPr>
+              <a:t>نموذج وسيط</a:t>
+            </a:r>
+            <a:endParaRPr lang="en-US" sz="1650" dirty="0"/>
+          </a:p>
+        </p:txBody>
+      </p:sp>
+      <p:sp>
+        <p:nvSpPr>
+          <p:cNvPr id="13" name="Text 9"/>
+          <p:cNvSpPr/>
+          <p:nvPr/>
+        </p:nvSpPr>
+        <p:spPr>
+          <a:xfrm>
+            <a:off x="4626864" y="4315968"/>
+            <a:ext cx="2834640" cy="1188720"/>
+          </a:xfrm>
+          <a:prstGeom prst="rect">
+            <a:avLst/>
+          </a:prstGeom>
+          <a:noFill/>
+          <a:ln/>
+        </p:spPr>
+        <p:txBody>
+          <a:bodyPr wrap="square" rtlCol="0" anchor="ctr"/>
+          <a:lstStyle/>
+          <a:p>
+            <a:pPr algn="ctr" indent="0" marL="0">
+              <a:buNone/>
+            </a:pPr>
+            <a:r>
+              <a:rPr lang="en-US" sz="1200" dirty="0">
+                <a:solidFill>
+                  <a:srgbClr val="CADCFC"/>
+                </a:solidFill>
+                <a:latin typeface="Calibri" pitchFamily="34" charset="0"/>
+                <a:ea typeface="Calibri" pitchFamily="34" charset="-122"/>
+                <a:cs typeface="Calibri" pitchFamily="34" charset="-120"/>
+              </a:rPr>
+              <a:t>بلا مخزون ولا مصانع مملوكة — المنصة تُشغّل شبكة شركاء قائمة</a:t>
+            </a:r>
+            <a:endParaRPr lang="en-US" sz="1200" dirty="0"/>
+          </a:p>
+        </p:txBody>
+      </p:sp>
+      <p:sp>
+        <p:nvSpPr>
+          <p:cNvPr id="14" name="Shape 10"/>
+          <p:cNvSpPr/>
+          <p:nvPr/>
+        </p:nvSpPr>
+        <p:spPr>
+          <a:xfrm>
+            <a:off x="8065008" y="2286000"/>
+            <a:ext cx="3383280" cy="3383280"/>
+          </a:xfrm>
+          <a:prstGeom prst="roundRect">
+            <a:avLst>
+              <a:gd name="adj" fmla="val 3243"/>
+            </a:avLst>
+          </a:prstGeom>
+          <a:solidFill>
+            <a:srgbClr val="161E48"/>
+          </a:solidFill>
+          <a:ln/>
+          <a:effectLst>
+            <a:outerShdw sx="100000" sy="100000" kx="0" ky="0" algn="bl" rotWithShape="0" blurRad="101600" dist="25400" dir="5400000">
+              <a:srgbClr val="000000">
+                <a:alpha val="12000"/>
+              </a:srgbClr>
+            </a:outerShdw>
+          </a:effectLst>
+        </p:spPr>
+      </p:sp>
+      <p:sp>
+        <p:nvSpPr>
+          <p:cNvPr id="15" name="Shape 11"/>
+          <p:cNvSpPr/>
+          <p:nvPr/>
+        </p:nvSpPr>
+        <p:spPr>
+          <a:xfrm>
+            <a:off x="9276588" y="2606040"/>
+            <a:ext cx="960120" cy="960120"/>
+          </a:xfrm>
+          <a:prstGeom prst="ellipse">
+            <a:avLst/>
+          </a:prstGeom>
+          <a:solidFill>
+            <a:srgbClr val="F96167"/>
+          </a:solidFill>
+          <a:ln/>
+          <a:effectLst>
+            <a:outerShdw sx="100000" sy="100000" kx="0" ky="0" algn="bl" rotWithShape="0" blurRad="76200" dist="25400" dir="5400000">
+              <a:srgbClr val="000000">
+                <a:alpha val="25000"/>
+              </a:srgbClr>
+            </a:outerShdw>
+          </a:effectLst>
+        </p:spPr>
+      </p:sp>
+      <p:pic>
+        <p:nvPicPr>
+          <p:cNvPr id="16" name="Image 2" descr="preencoded.png">    </p:cNvPr>
+          <p:cNvPicPr>
+            <a:picLocks noChangeAspect="1"/>
+          </p:cNvPicPr>
+          <p:nvPr/>
+        </p:nvPicPr>
+        <p:blipFill>
+          <a:blip r:embed="rId3"/>
+          <a:stretch>
+            <a:fillRect/>
+          </a:stretch>
+        </p:blipFill>
+        <p:spPr>
+          <a:xfrm>
+            <a:off x="9516618" y="2846070"/>
+            <a:ext cx="480060" cy="480060"/>
+          </a:xfrm>
+          <a:prstGeom prst="rect">
+            <a:avLst/>
+          </a:prstGeom>
+        </p:spPr>
+      </p:pic>
+      <p:sp>
+        <p:nvSpPr>
+          <p:cNvPr id="17" name="Text 12"/>
+          <p:cNvSpPr/>
+          <p:nvPr/>
+        </p:nvSpPr>
+        <p:spPr>
+          <a:xfrm>
+            <a:off x="8247888" y="3794760"/>
+            <a:ext cx="3017520" cy="457200"/>
+          </a:xfrm>
+          <a:prstGeom prst="rect">
+            <a:avLst/>
+          </a:prstGeom>
+          <a:noFill/>
+          <a:ln/>
+        </p:spPr>
+        <p:txBody>
+          <a:bodyPr wrap="square" rtlCol="0" anchor="ctr"/>
+          <a:lstStyle/>
+          <a:p>
+            <a:pPr algn="ctr" indent="0" marL="0">
+              <a:buNone/>
+            </a:pPr>
+            <a:r>
+              <a:rPr lang="en-US" sz="1650" b="1" dirty="0">
+                <a:solidFill>
+                  <a:srgbClr val="FFFFFF"/>
+                </a:solidFill>
+                <a:latin typeface="Calibri" pitchFamily="34" charset="0"/>
+                <a:ea typeface="Calibri" pitchFamily="34" charset="-122"/>
+                <a:cs typeface="Calibri" pitchFamily="34" charset="-120"/>
+              </a:rPr>
+              <a:t>حل متكامل</a:t>
+            </a:r>
+            <a:endParaRPr lang="en-US" sz="1650" dirty="0"/>
+          </a:p>
+        </p:txBody>
+      </p:sp>
+      <p:sp>
+        <p:nvSpPr>
+          <p:cNvPr id="18" name="Text 13"/>
+          <p:cNvSpPr/>
+          <p:nvPr/>
+        </p:nvSpPr>
+        <p:spPr>
+          <a:xfrm>
+            <a:off x="8339328" y="4315968"/>
+            <a:ext cx="2834640" cy="1188720"/>
+          </a:xfrm>
+          <a:prstGeom prst="rect">
+            <a:avLst/>
+          </a:prstGeom>
+          <a:noFill/>
+          <a:ln/>
+        </p:spPr>
+        <p:txBody>
+          <a:bodyPr wrap="square" rtlCol="0" anchor="ctr"/>
+          <a:lstStyle/>
+          <a:p>
+            <a:pPr algn="ctr" indent="0" marL="0">
+              <a:buNone/>
+            </a:pPr>
+            <a:r>
+              <a:rPr lang="en-US" sz="1200" dirty="0">
+                <a:solidFill>
+                  <a:srgbClr val="CADCFC"/>
+                </a:solidFill>
+                <a:latin typeface="Calibri" pitchFamily="34" charset="0"/>
+                <a:ea typeface="Calibri" pitchFamily="34" charset="-122"/>
+                <a:cs typeface="Calibri" pitchFamily="34" charset="-120"/>
+              </a:rPr>
+              <a:t>لأصحاب الأعمال الصغيرة: من الفكرة إلى الإعلان المطبوع والمُوصَّل</a:t>
+            </a:r>
+            <a:endParaRPr lang="en-US" sz="1200" dirty="0"/>
+          </a:p>
+        </p:txBody>
+      </p:sp>
+      <p:sp>
+        <p:nvSpPr>
+          <p:cNvPr id="19" name="Text 14"/>
+          <p:cNvSpPr/>
+          <p:nvPr/>
+        </p:nvSpPr>
+        <p:spPr>
+          <a:xfrm>
+            <a:off x="11475720" y="6473952"/>
+            <a:ext cx="457200" cy="274320"/>
+          </a:xfrm>
+          <a:prstGeom prst="rect">
+            <a:avLst/>
+          </a:prstGeom>
+          <a:noFill/>
+          <a:ln/>
+        </p:spPr>
+        <p:txBody>
+          <a:bodyPr wrap="square" rtlCol="0" anchor="ctr"/>
+          <a:lstStyle/>
+          <a:p>
+            <a:pPr algn="r" indent="0" marL="0">
+              <a:buNone/>
+            </a:pPr>
+            <a:r>
+              <a:rPr lang="en-US" sz="1000" dirty="0">
+                <a:solidFill>
+                  <a:srgbClr val="6B7280"/>
+                </a:solidFill>
+                <a:latin typeface="Calibri" pitchFamily="34" charset="0"/>
+                <a:ea typeface="Calibri" pitchFamily="34" charset="-122"/>
+                <a:cs typeface="Calibri" pitchFamily="34" charset="-120"/>
+              </a:rPr>
+              <a:t>10</a:t>
+            </a:r>
+            <a:endParaRPr lang="en-US" sz="1000" dirty="0"/>
+          </a:p>
+        </p:txBody>
+      </p:sp>
+    </p:spTree>
+  </p:cSld>
+  <p:clrMapOvr>
+    <a:masterClrMapping/>
+  </p:clrMapOvr>
+</p:sld>
+</file>
+
+<file path=ppt/slides/slide11.xml><?xml version="1.0" encoding="utf-8"?>
+<p:sld xmlns:a="http://schemas.openxmlformats.org/drawingml/2006/main" xmlns:r="http://schemas.openxmlformats.org/officeDocument/2006/relationships" xmlns:p="http://schemas.openxmlformats.org/presentationml/2006/main">
+  <p:cSld name="Slide 11">
+    <p:bg>
+      <p:bgPr>
+        <a:solidFill>
+          <a:srgbClr val="1F2A5E"/>
+        </a:solidFill>
+      </p:bgPr>
+    </p:bg>
+    <p:spTree>
+      <p:nvGrpSpPr>
+        <p:cNvPr id="1" name=""/>
+        <p:cNvGrpSpPr/>
+        <p:nvPr/>
+      </p:nvGrpSpPr>
+      <p:grpSpPr>
+        <a:xfrm>
+          <a:off x="0" y="0"/>
+          <a:ext cx="0" cy="0"/>
+          <a:chOff x="0" y="0"/>
+          <a:chExt cx="0" cy="0"/>
+        </a:xfrm>
+      </p:grpSpPr>
+      <p:sp>
+        <p:nvSpPr>
           <p:cNvPr id="2" name="Shape 0"/>
           <p:cNvSpPr/>
           <p:nvPr/>
@@ -3893,7 +4605,7 @@
                 <a:ea typeface="Calibri" pitchFamily="34" charset="-122"/>
                 <a:cs typeface="Calibri" pitchFamily="34" charset="-120"/>
               </a:rPr>
-              <a:t>تجربة المستخدم</a:t>
+              <a:t>المشهد التنافسي</a:t>
             </a:r>
             <a:endParaRPr lang="en-US" sz="1400" dirty="0"/>
           </a:p>
@@ -3932,7 +4644,7 @@
                 <a:ea typeface="Calibri" pitchFamily="34" charset="-122"/>
                 <a:cs typeface="Calibri" pitchFamily="34" charset="-120"/>
               </a:rPr>
-              <a:t>رحلة العميل: من الفكرة إلى المعاينة</a:t>
+              <a:t>أين تقف AdCraft بين الحلول القائمة؟</a:t>
             </a:r>
             <a:endParaRPr lang="en-US" sz="3400" dirty="0"/>
           </a:p>
@@ -3946,12 +4658,12 @@
         </p:nvSpPr>
         <p:spPr>
           <a:xfrm>
-            <a:off x="8842248" y="2011680"/>
-            <a:ext cx="2514600" cy="2880360"/>
+            <a:off x="8065008" y="1874520"/>
+            <a:ext cx="3383280" cy="2788920"/>
           </a:xfrm>
           <a:prstGeom prst="roundRect">
             <a:avLst>
-              <a:gd name="adj" fmla="val 4364"/>
+              <a:gd name="adj" fmla="val 3934"/>
             </a:avLst>
           </a:prstGeom>
           <a:solidFill>
@@ -3975,8 +4687,8 @@
         </p:nvSpPr>
         <p:spPr>
           <a:xfrm>
-            <a:off x="9642348" y="2331720"/>
-            <a:ext cx="914400" cy="914400"/>
+            <a:off x="9368028" y="2103120"/>
+            <a:ext cx="777240" cy="777240"/>
           </a:xfrm>
           <a:prstGeom prst="ellipse">
             <a:avLst/>
@@ -4010,8 +4722,8 @@
         </p:blipFill>
         <p:spPr>
           <a:xfrm>
-            <a:off x="9861804" y="2551176"/>
-            <a:ext cx="475488" cy="475488"/>
+            <a:off x="9554566" y="2289658"/>
+            <a:ext cx="404165" cy="404165"/>
           </a:xfrm>
           <a:prstGeom prst="rect">
             <a:avLst/>
@@ -4026,8 +4738,8 @@
         </p:nvSpPr>
         <p:spPr>
           <a:xfrm>
-            <a:off x="10789920" y="2194560"/>
-            <a:ext cx="457200" cy="457200"/>
+            <a:off x="8247888" y="3017520"/>
+            <a:ext cx="3017520" cy="548640"/>
           </a:xfrm>
           <a:prstGeom prst="rect">
             <a:avLst/>
@@ -4043,7 +4755,46 @@
               <a:buNone/>
             </a:pPr>
             <a:r>
-              <a:rPr lang="en-US" sz="1600" b="1" dirty="0">
+              <a:rPr lang="en-US" sz="1350" b="1" dirty="0">
+                <a:solidFill>
+                  <a:srgbClr val="1A1A2E"/>
+                </a:solidFill>
+                <a:latin typeface="Calibri" pitchFamily="34" charset="0"/>
+                <a:ea typeface="Calibri" pitchFamily="34" charset="-122"/>
+                <a:cs typeface="Calibri" pitchFamily="34" charset="-120"/>
+              </a:rPr>
+              <a:t>أدوات الذكاء الاصطناعي للإعلانات</a:t>
+            </a:r>
+            <a:endParaRPr lang="en-US" sz="1350" dirty="0"/>
+          </a:p>
+        </p:txBody>
+      </p:sp>
+      <p:sp>
+        <p:nvSpPr>
+          <p:cNvPr id="8" name="Text 5"/>
+          <p:cNvSpPr/>
+          <p:nvPr/>
+        </p:nvSpPr>
+        <p:spPr>
+          <a:xfrm>
+            <a:off x="8247888" y="3584448"/>
+            <a:ext cx="3017520" cy="320040"/>
+          </a:xfrm>
+          <a:prstGeom prst="rect">
+            <a:avLst/>
+          </a:prstGeom>
+          <a:noFill/>
+          <a:ln/>
+        </p:spPr>
+        <p:txBody>
+          <a:bodyPr wrap="square" rtlCol="0" anchor="ctr"/>
+          <a:lstStyle/>
+          <a:p>
+            <a:pPr algn="ctr" indent="0" marL="0">
+              <a:buNone/>
+            </a:pPr>
+            <a:r>
+              <a:rPr lang="en-US" sz="1000" i="1" dirty="0">
                 <a:solidFill>
                   <a:srgbClr val="F96167"/>
                 </a:solidFill>
@@ -4051,22 +4802,22 @@
                 <a:ea typeface="Calibri" pitchFamily="34" charset="-122"/>
                 <a:cs typeface="Calibri" pitchFamily="34" charset="-120"/>
               </a:rPr>
-              <a:t>١</a:t>
-            </a:r>
-            <a:endParaRPr lang="en-US" sz="1600" dirty="0"/>
-          </a:p>
-        </p:txBody>
-      </p:sp>
-      <p:sp>
-        <p:nvSpPr>
-          <p:cNvPr id="8" name="Text 5"/>
-          <p:cNvSpPr/>
-          <p:nvPr/>
-        </p:nvSpPr>
-        <p:spPr>
-          <a:xfrm>
-            <a:off x="8979408" y="3429000"/>
-            <a:ext cx="2240280" cy="365760"/>
+              <a:t>Canva • AdCreative.ai • HeyGen • Predis.ai</a:t>
+            </a:r>
+            <a:endParaRPr lang="en-US" sz="1000" dirty="0"/>
+          </a:p>
+        </p:txBody>
+      </p:sp>
+      <p:sp>
+        <p:nvSpPr>
+          <p:cNvPr id="9" name="Text 6"/>
+          <p:cNvSpPr/>
+          <p:nvPr/>
+        </p:nvSpPr>
+        <p:spPr>
+          <a:xfrm>
+            <a:off x="8293608" y="3950208"/>
+            <a:ext cx="2926080" cy="640080"/>
           </a:xfrm>
           <a:prstGeom prst="rect">
             <a:avLst/>
@@ -4082,46 +4833,7 @@
               <a:buNone/>
             </a:pPr>
             <a:r>
-              <a:rPr lang="en-US" sz="1500" b="1" dirty="0">
-                <a:solidFill>
-                  <a:srgbClr val="1A1A2E"/>
-                </a:solidFill>
-                <a:latin typeface="Calibri" pitchFamily="34" charset="0"/>
-                <a:ea typeface="Calibri" pitchFamily="34" charset="-122"/>
-                <a:cs typeface="Calibri" pitchFamily="34" charset="-120"/>
-              </a:rPr>
-              <a:t>ابدأ</a:t>
-            </a:r>
-            <a:endParaRPr lang="en-US" sz="1500" dirty="0"/>
-          </a:p>
-        </p:txBody>
-      </p:sp>
-      <p:sp>
-        <p:nvSpPr>
-          <p:cNvPr id="9" name="Text 6"/>
-          <p:cNvSpPr/>
-          <p:nvPr/>
-        </p:nvSpPr>
-        <p:spPr>
-          <a:xfrm>
-            <a:off x="9025128" y="3840480"/>
-            <a:ext cx="2148840" cy="914400"/>
-          </a:xfrm>
-          <a:prstGeom prst="rect">
-            <a:avLst/>
-          </a:prstGeom>
-          <a:noFill/>
-          <a:ln/>
-        </p:spPr>
-        <p:txBody>
-          <a:bodyPr wrap="square" rtlCol="0" anchor="ctr"/>
-          <a:lstStyle/>
-          <a:p>
-            <a:pPr algn="ctr" indent="0" marL="0">
-              <a:buNone/>
-            </a:pPr>
-            <a:r>
-              <a:rPr lang="en-US" sz="1150" dirty="0">
+              <a:rPr lang="en-US" sz="1050" dirty="0">
                 <a:solidFill>
                   <a:srgbClr val="6B7280"/>
                 </a:solidFill>
@@ -4129,65 +4841,26 @@
                 <a:ea typeface="Calibri" pitchFamily="34" charset="-122"/>
                 <a:cs typeface="Calibri" pitchFamily="34" charset="-120"/>
               </a:rPr>
-              <a:t>زر واحد: «أنشئ إعلانك الآن»</a:t>
-            </a:r>
-            <a:endParaRPr lang="en-US" sz="1150" dirty="0"/>
-          </a:p>
-        </p:txBody>
-      </p:sp>
-      <p:sp>
-        <p:nvSpPr>
-          <p:cNvPr id="10" name="Text 7"/>
-          <p:cNvSpPr/>
-          <p:nvPr/>
-        </p:nvSpPr>
-        <p:spPr>
-          <a:xfrm>
-            <a:off x="8631936" y="2606040"/>
-            <a:ext cx="201168" cy="457200"/>
-          </a:xfrm>
-          <a:prstGeom prst="rect">
-            <a:avLst/>
-          </a:prstGeom>
-          <a:noFill/>
-          <a:ln/>
-        </p:spPr>
-        <p:txBody>
-          <a:bodyPr wrap="square" rtlCol="0" anchor="ctr"/>
-          <a:lstStyle/>
-          <a:p>
-            <a:pPr algn="ctr" indent="0" marL="0">
-              <a:buNone/>
-            </a:pPr>
-            <a:r>
-              <a:rPr lang="en-US" sz="2200" b="1" dirty="0">
-                <a:solidFill>
-                  <a:srgbClr val="C7CCE0"/>
-                </a:solidFill>
-                <a:latin typeface="Calibri" pitchFamily="34" charset="0"/>
-                <a:ea typeface="Calibri" pitchFamily="34" charset="-122"/>
-                <a:cs typeface="Calibri" pitchFamily="34" charset="-120"/>
-              </a:rPr>
-              <a:t>‹</a:t>
-            </a:r>
-            <a:endParaRPr lang="en-US" sz="2200" dirty="0"/>
-          </a:p>
-        </p:txBody>
-      </p:sp>
-      <p:sp>
-        <p:nvSpPr>
-          <p:cNvPr id="11" name="Shape 8"/>
-          <p:cNvSpPr/>
-          <p:nvPr/>
-        </p:nvSpPr>
-        <p:spPr>
-          <a:xfrm>
-            <a:off x="6108192" y="2011680"/>
-            <a:ext cx="2514600" cy="2880360"/>
+              <a:t>تصميم وفيديو فقط — بلا طباعة ولا شبكة توصيل ميدانية</a:t>
+            </a:r>
+            <a:endParaRPr lang="en-US" sz="1050" dirty="0"/>
+          </a:p>
+        </p:txBody>
+      </p:sp>
+      <p:sp>
+        <p:nvSpPr>
+          <p:cNvPr id="10" name="Shape 7"/>
+          <p:cNvSpPr/>
+          <p:nvPr/>
+        </p:nvSpPr>
+        <p:spPr>
+          <a:xfrm>
+            <a:off x="4352544" y="1874520"/>
+            <a:ext cx="3383280" cy="2788920"/>
           </a:xfrm>
           <a:prstGeom prst="roundRect">
             <a:avLst>
-              <a:gd name="adj" fmla="val 4364"/>
+              <a:gd name="adj" fmla="val 3934"/>
             </a:avLst>
           </a:prstGeom>
           <a:solidFill>
@@ -4205,14 +4878,14 @@
       </p:sp>
       <p:sp>
         <p:nvSpPr>
-          <p:cNvPr id="12" name="Shape 9"/>
-          <p:cNvSpPr/>
-          <p:nvPr/>
-        </p:nvSpPr>
-        <p:spPr>
-          <a:xfrm>
-            <a:off x="6908292" y="2331720"/>
-            <a:ext cx="914400" cy="914400"/>
+          <p:cNvPr id="11" name="Shape 8"/>
+          <p:cNvSpPr/>
+          <p:nvPr/>
+        </p:nvSpPr>
+        <p:spPr>
+          <a:xfrm>
+            <a:off x="5655564" y="2103120"/>
+            <a:ext cx="777240" cy="777240"/>
           </a:xfrm>
           <a:prstGeom prst="ellipse">
             <a:avLst/>
@@ -4232,7 +4905,7 @@
       </p:sp>
       <p:pic>
         <p:nvPicPr>
-          <p:cNvPr id="13" name="Image 1" descr="preencoded.png">    </p:cNvPr>
+          <p:cNvPr id="12" name="Image 1" descr="preencoded.png">    </p:cNvPr>
           <p:cNvPicPr>
             <a:picLocks noChangeAspect="1"/>
           </p:cNvPicPr>
@@ -4246,8 +4919,8 @@
         </p:blipFill>
         <p:spPr>
           <a:xfrm>
-            <a:off x="7127748" y="2551176"/>
-            <a:ext cx="475488" cy="475488"/>
+            <a:off x="5842102" y="2289658"/>
+            <a:ext cx="404165" cy="404165"/>
           </a:xfrm>
           <a:prstGeom prst="rect">
             <a:avLst/>
@@ -4256,14 +4929,53 @@
       </p:pic>
       <p:sp>
         <p:nvSpPr>
+          <p:cNvPr id="13" name="Text 9"/>
+          <p:cNvSpPr/>
+          <p:nvPr/>
+        </p:nvSpPr>
+        <p:spPr>
+          <a:xfrm>
+            <a:off x="4535424" y="3017520"/>
+            <a:ext cx="3017520" cy="548640"/>
+          </a:xfrm>
+          <a:prstGeom prst="rect">
+            <a:avLst/>
+          </a:prstGeom>
+          <a:noFill/>
+          <a:ln/>
+        </p:spPr>
+        <p:txBody>
+          <a:bodyPr wrap="square" rtlCol="0" anchor="ctr"/>
+          <a:lstStyle/>
+          <a:p>
+            <a:pPr algn="ctr" indent="0" marL="0">
+              <a:buNone/>
+            </a:pPr>
+            <a:r>
+              <a:rPr lang="en-US" sz="1350" b="1" dirty="0">
+                <a:solidFill>
+                  <a:srgbClr val="1A1A2E"/>
+                </a:solidFill>
+                <a:latin typeface="Calibri" pitchFamily="34" charset="0"/>
+                <a:ea typeface="Calibri" pitchFamily="34" charset="-122"/>
+                <a:cs typeface="Calibri" pitchFamily="34" charset="-120"/>
+              </a:rPr>
+              <a:t>شبكات الطباعة عند الطلب</a:t>
+            </a:r>
+            <a:endParaRPr lang="en-US" sz="1350" dirty="0"/>
+          </a:p>
+        </p:txBody>
+      </p:sp>
+      <p:sp>
+        <p:nvSpPr>
           <p:cNvPr id="14" name="Text 10"/>
           <p:cNvSpPr/>
           <p:nvPr/>
         </p:nvSpPr>
         <p:spPr>
           <a:xfrm>
-            <a:off x="8055864" y="2194560"/>
-            <a:ext cx="457200" cy="457200"/>
+            <a:off x="4535424" y="3584448"/>
+            <a:ext cx="3017520" cy="320040"/>
           </a:xfrm>
           <a:prstGeom prst="rect">
             <a:avLst/>
@@ -4279,7 +4991,7 @@
               <a:buNone/>
             </a:pPr>
             <a:r>
-              <a:rPr lang="en-US" sz="1600" b="1" dirty="0">
+              <a:rPr lang="en-US" sz="1000" i="1" dirty="0">
                 <a:solidFill>
                   <a:srgbClr val="F96167"/>
                 </a:solidFill>
@@ -4287,9 +4999,9 @@
                 <a:ea typeface="Calibri" pitchFamily="34" charset="-122"/>
                 <a:cs typeface="Calibri" pitchFamily="34" charset="-120"/>
               </a:rPr>
-              <a:t>٢</a:t>
-            </a:r>
-            <a:endParaRPr lang="en-US" sz="1600" dirty="0"/>
+              <a:t>Printful • Gelato • Printify • Vistaprint</a:t>
+            </a:r>
+            <a:endParaRPr lang="en-US" sz="1000" dirty="0"/>
           </a:p>
         </p:txBody>
       </p:sp>
@@ -4301,8 +5013,8 @@
         </p:nvSpPr>
         <p:spPr>
           <a:xfrm>
-            <a:off x="6245352" y="3429000"/>
-            <a:ext cx="2240280" cy="365760"/>
+            <a:off x="4581144" y="3950208"/>
+            <a:ext cx="2926080" cy="640080"/>
           </a:xfrm>
           <a:prstGeom prst="rect">
             <a:avLst/>
@@ -4318,46 +5030,7 @@
               <a:buNone/>
             </a:pPr>
             <a:r>
-              <a:rPr lang="en-US" sz="1500" b="1" dirty="0">
-                <a:solidFill>
-                  <a:srgbClr val="1A1A2E"/>
-                </a:solidFill>
-                <a:latin typeface="Calibri" pitchFamily="34" charset="0"/>
-                <a:ea typeface="Calibri" pitchFamily="34" charset="-122"/>
-                <a:cs typeface="Calibri" pitchFamily="34" charset="-120"/>
-              </a:rPr>
-              <a:t>أدخل التفاصيل</a:t>
-            </a:r>
-            <a:endParaRPr lang="en-US" sz="1500" dirty="0"/>
-          </a:p>
-        </p:txBody>
-      </p:sp>
-      <p:sp>
-        <p:nvSpPr>
-          <p:cNvPr id="16" name="Text 12"/>
-          <p:cNvSpPr/>
-          <p:nvPr/>
-        </p:nvSpPr>
-        <p:spPr>
-          <a:xfrm>
-            <a:off x="6291072" y="3840480"/>
-            <a:ext cx="2148840" cy="914400"/>
-          </a:xfrm>
-          <a:prstGeom prst="rect">
-            <a:avLst/>
-          </a:prstGeom>
-          <a:noFill/>
-          <a:ln/>
-        </p:spPr>
-        <p:txBody>
-          <a:bodyPr wrap="square" rtlCol="0" anchor="ctr"/>
-          <a:lstStyle/>
-          <a:p>
-            <a:pPr algn="ctr" indent="0" marL="0">
-              <a:buNone/>
-            </a:pPr>
-            <a:r>
-              <a:rPr lang="en-US" sz="1150" dirty="0">
+              <a:rPr lang="en-US" sz="1050" dirty="0">
                 <a:solidFill>
                   <a:srgbClr val="6B7280"/>
                 </a:solidFill>
@@ -4365,65 +5038,26 @@
                 <a:ea typeface="Calibri" pitchFamily="34" charset="-122"/>
                 <a:cs typeface="Calibri" pitchFamily="34" charset="-120"/>
               </a:rPr>
-              <a:t>صورة المنتج + نبرة الإعلان + المنصة المستهدفة</a:t>
-            </a:r>
-            <a:endParaRPr lang="en-US" sz="1150" dirty="0"/>
-          </a:p>
-        </p:txBody>
-      </p:sp>
-      <p:sp>
-        <p:nvSpPr>
-          <p:cNvPr id="17" name="Text 13"/>
-          <p:cNvSpPr/>
-          <p:nvPr/>
-        </p:nvSpPr>
-        <p:spPr>
-          <a:xfrm>
-            <a:off x="5897880" y="2606040"/>
-            <a:ext cx="201168" cy="457200"/>
-          </a:xfrm>
-          <a:prstGeom prst="rect">
-            <a:avLst/>
-          </a:prstGeom>
-          <a:noFill/>
-          <a:ln/>
-        </p:spPr>
-        <p:txBody>
-          <a:bodyPr wrap="square" rtlCol="0" anchor="ctr"/>
-          <a:lstStyle/>
-          <a:p>
-            <a:pPr algn="ctr" indent="0" marL="0">
-              <a:buNone/>
-            </a:pPr>
-            <a:r>
-              <a:rPr lang="en-US" sz="2200" b="1" dirty="0">
-                <a:solidFill>
-                  <a:srgbClr val="C7CCE0"/>
-                </a:solidFill>
-                <a:latin typeface="Calibri" pitchFamily="34" charset="0"/>
-                <a:ea typeface="Calibri" pitchFamily="34" charset="-122"/>
-                <a:cs typeface="Calibri" pitchFamily="34" charset="-120"/>
-              </a:rPr>
-              <a:t>‹</a:t>
-            </a:r>
-            <a:endParaRPr lang="en-US" sz="2200" dirty="0"/>
-          </a:p>
-        </p:txBody>
-      </p:sp>
-      <p:sp>
-        <p:nvSpPr>
-          <p:cNvPr id="18" name="Shape 14"/>
-          <p:cNvSpPr/>
-          <p:nvPr/>
-        </p:nvSpPr>
-        <p:spPr>
-          <a:xfrm>
-            <a:off x="3374136" y="2011680"/>
-            <a:ext cx="2514600" cy="2880360"/>
+              <a:t>طباعة وشحن عالمي — بلا توليد إعلانات ذكي مخصص للنبرة والمنصة</a:t>
+            </a:r>
+            <a:endParaRPr lang="en-US" sz="1050" dirty="0"/>
+          </a:p>
+        </p:txBody>
+      </p:sp>
+      <p:sp>
+        <p:nvSpPr>
+          <p:cNvPr id="16" name="Shape 12"/>
+          <p:cNvSpPr/>
+          <p:nvPr/>
+        </p:nvSpPr>
+        <p:spPr>
+          <a:xfrm>
+            <a:off x="640080" y="1874520"/>
+            <a:ext cx="3383280" cy="2788920"/>
           </a:xfrm>
           <a:prstGeom prst="roundRect">
             <a:avLst>
-              <a:gd name="adj" fmla="val 4364"/>
+              <a:gd name="adj" fmla="val 3934"/>
             </a:avLst>
           </a:prstGeom>
           <a:solidFill>
@@ -4441,20 +5075,20 @@
       </p:sp>
       <p:sp>
         <p:nvSpPr>
-          <p:cNvPr id="19" name="Shape 15"/>
-          <p:cNvSpPr/>
-          <p:nvPr/>
-        </p:nvSpPr>
-        <p:spPr>
-          <a:xfrm>
-            <a:off x="4174236" y="2331720"/>
-            <a:ext cx="914400" cy="914400"/>
+          <p:cNvPr id="17" name="Shape 13"/>
+          <p:cNvSpPr/>
+          <p:nvPr/>
+        </p:nvSpPr>
+        <p:spPr>
+          <a:xfrm>
+            <a:off x="1943100" y="2103120"/>
+            <a:ext cx="777240" cy="777240"/>
           </a:xfrm>
           <a:prstGeom prst="ellipse">
             <a:avLst/>
           </a:prstGeom>
           <a:solidFill>
-            <a:srgbClr val="F96167"/>
+            <a:srgbClr val="1F2A5E"/>
           </a:solidFill>
           <a:ln/>
           <a:effectLst>
@@ -4468,7 +5102,7 @@
       </p:sp>
       <p:pic>
         <p:nvPicPr>
-          <p:cNvPr id="20" name="Image 2" descr="preencoded.png">    </p:cNvPr>
+          <p:cNvPr id="18" name="Image 2" descr="preencoded.png">    </p:cNvPr>
           <p:cNvPicPr>
             <a:picLocks noChangeAspect="1"/>
           </p:cNvPicPr>
@@ -4482,8 +5116,8 @@
         </p:blipFill>
         <p:spPr>
           <a:xfrm>
-            <a:off x="4393692" y="2551176"/>
-            <a:ext cx="475488" cy="475488"/>
+            <a:off x="2129638" y="2289658"/>
+            <a:ext cx="404165" cy="404165"/>
           </a:xfrm>
           <a:prstGeom prst="rect">
             <a:avLst/>
@@ -4492,14 +5126,92 @@
       </p:pic>
       <p:sp>
         <p:nvSpPr>
+          <p:cNvPr id="19" name="Text 14"/>
+          <p:cNvSpPr/>
+          <p:nvPr/>
+        </p:nvSpPr>
+        <p:spPr>
+          <a:xfrm>
+            <a:off x="822960" y="3017520"/>
+            <a:ext cx="3017520" cy="548640"/>
+          </a:xfrm>
+          <a:prstGeom prst="rect">
+            <a:avLst/>
+          </a:prstGeom>
+          <a:noFill/>
+          <a:ln/>
+        </p:spPr>
+        <p:txBody>
+          <a:bodyPr wrap="square" rtlCol="0" anchor="ctr"/>
+          <a:lstStyle/>
+          <a:p>
+            <a:pPr algn="ctr" indent="0" marL="0">
+              <a:buNone/>
+            </a:pPr>
+            <a:r>
+              <a:rPr lang="en-US" sz="1350" b="1" dirty="0">
+                <a:solidFill>
+                  <a:srgbClr val="1A1A2E"/>
+                </a:solidFill>
+                <a:latin typeface="Calibri" pitchFamily="34" charset="0"/>
+                <a:ea typeface="Calibri" pitchFamily="34" charset="-122"/>
+                <a:cs typeface="Calibri" pitchFamily="34" charset="-120"/>
+              </a:rPr>
+              <a:t>تطبيقات التوصيل المحلية</a:t>
+            </a:r>
+            <a:endParaRPr lang="en-US" sz="1350" dirty="0"/>
+          </a:p>
+        </p:txBody>
+      </p:sp>
+      <p:sp>
+        <p:nvSpPr>
+          <p:cNvPr id="20" name="Text 15"/>
+          <p:cNvSpPr/>
+          <p:nvPr/>
+        </p:nvSpPr>
+        <p:spPr>
+          <a:xfrm>
+            <a:off x="822960" y="3584448"/>
+            <a:ext cx="3017520" cy="320040"/>
+          </a:xfrm>
+          <a:prstGeom prst="rect">
+            <a:avLst/>
+          </a:prstGeom>
+          <a:noFill/>
+          <a:ln/>
+        </p:spPr>
+        <p:txBody>
+          <a:bodyPr wrap="square" rtlCol="0" anchor="ctr"/>
+          <a:lstStyle/>
+          <a:p>
+            <a:pPr algn="ctr" indent="0" marL="0">
+              <a:buNone/>
+            </a:pPr>
+            <a:r>
+              <a:rPr lang="en-US" sz="1000" i="1" dirty="0">
+                <a:solidFill>
+                  <a:srgbClr val="F96167"/>
+                </a:solidFill>
+                <a:latin typeface="Calibri" pitchFamily="34" charset="0"/>
+                <a:ea typeface="Calibri" pitchFamily="34" charset="-122"/>
+                <a:cs typeface="Calibri" pitchFamily="34" charset="-120"/>
+              </a:rPr>
+              <a:t>شركات شحن ومندوبون مستقلون</a:t>
+            </a:r>
+            <a:endParaRPr lang="en-US" sz="1000" dirty="0"/>
+          </a:p>
+        </p:txBody>
+      </p:sp>
+      <p:sp>
+        <p:nvSpPr>
           <p:cNvPr id="21" name="Text 16"/>
           <p:cNvSpPr/>
           <p:nvPr/>
         </p:nvSpPr>
         <p:spPr>
           <a:xfrm>
-            <a:off x="5321808" y="2194560"/>
-            <a:ext cx="457200" cy="457200"/>
+            <a:off x="868680" y="3950208"/>
+            <a:ext cx="2926080" cy="640080"/>
           </a:xfrm>
           <a:prstGeom prst="rect">
             <a:avLst/>
@@ -4515,85 +5227,7 @@
               <a:buNone/>
             </a:pPr>
             <a:r>
-              <a:rPr lang="en-US" sz="1600" b="1" dirty="0">
-                <a:solidFill>
-                  <a:srgbClr val="F96167"/>
-                </a:solidFill>
-                <a:latin typeface="Calibri" pitchFamily="34" charset="0"/>
-                <a:ea typeface="Calibri" pitchFamily="34" charset="-122"/>
-                <a:cs typeface="Calibri" pitchFamily="34" charset="-120"/>
-              </a:rPr>
-              <a:t>٣</a:t>
-            </a:r>
-            <a:endParaRPr lang="en-US" sz="1600" dirty="0"/>
-          </a:p>
-        </p:txBody>
-      </p:sp>
-      <p:sp>
-        <p:nvSpPr>
-          <p:cNvPr id="22" name="Text 17"/>
-          <p:cNvSpPr/>
-          <p:nvPr/>
-        </p:nvSpPr>
-        <p:spPr>
-          <a:xfrm>
-            <a:off x="3511296" y="3429000"/>
-            <a:ext cx="2240280" cy="365760"/>
-          </a:xfrm>
-          <a:prstGeom prst="rect">
-            <a:avLst/>
-          </a:prstGeom>
-          <a:noFill/>
-          <a:ln/>
-        </p:spPr>
-        <p:txBody>
-          <a:bodyPr wrap="square" rtlCol="0" anchor="ctr"/>
-          <a:lstStyle/>
-          <a:p>
-            <a:pPr algn="ctr" indent="0" marL="0">
-              <a:buNone/>
-            </a:pPr>
-            <a:r>
-              <a:rPr lang="en-US" sz="1500" b="1" dirty="0">
-                <a:solidFill>
-                  <a:srgbClr val="1A1A2E"/>
-                </a:solidFill>
-                <a:latin typeface="Calibri" pitchFamily="34" charset="0"/>
-                <a:ea typeface="Calibri" pitchFamily="34" charset="-122"/>
-                <a:cs typeface="Calibri" pitchFamily="34" charset="-120"/>
-              </a:rPr>
-              <a:t>شاشة السحر</a:t>
-            </a:r>
-            <a:endParaRPr lang="en-US" sz="1500" dirty="0"/>
-          </a:p>
-        </p:txBody>
-      </p:sp>
-      <p:sp>
-        <p:nvSpPr>
-          <p:cNvPr id="23" name="Text 18"/>
-          <p:cNvSpPr/>
-          <p:nvPr/>
-        </p:nvSpPr>
-        <p:spPr>
-          <a:xfrm>
-            <a:off x="3557016" y="3840480"/>
-            <a:ext cx="2148840" cy="914400"/>
-          </a:xfrm>
-          <a:prstGeom prst="rect">
-            <a:avLst/>
-          </a:prstGeom>
-          <a:noFill/>
-          <a:ln/>
-        </p:spPr>
-        <p:txBody>
-          <a:bodyPr wrap="square" rtlCol="0" anchor="ctr"/>
-          <a:lstStyle/>
-          <a:p>
-            <a:pPr algn="ctr" indent="0" marL="0">
-              <a:buNone/>
-            </a:pPr>
-            <a:r>
-              <a:rPr lang="en-US" sz="1150" dirty="0">
+              <a:rPr lang="en-US" sz="1050" dirty="0">
                 <a:solidFill>
                   <a:srgbClr val="6B7280"/>
                 </a:solidFill>
@@ -4601,69 +5235,30 @@
                 <a:ea typeface="Calibri" pitchFamily="34" charset="-122"/>
                 <a:cs typeface="Calibri" pitchFamily="34" charset="-120"/>
               </a:rPr>
-              <a:t>معاينة فورية: فيديو، صورة، نص، هاشتاقات</a:t>
-            </a:r>
-            <a:endParaRPr lang="en-US" sz="1150" dirty="0"/>
-          </a:p>
-        </p:txBody>
-      </p:sp>
-      <p:sp>
-        <p:nvSpPr>
-          <p:cNvPr id="24" name="Text 19"/>
-          <p:cNvSpPr/>
-          <p:nvPr/>
-        </p:nvSpPr>
-        <p:spPr>
-          <a:xfrm>
-            <a:off x="3163824" y="2606040"/>
-            <a:ext cx="201168" cy="457200"/>
-          </a:xfrm>
-          <a:prstGeom prst="rect">
-            <a:avLst/>
-          </a:prstGeom>
-          <a:noFill/>
-          <a:ln/>
-        </p:spPr>
-        <p:txBody>
-          <a:bodyPr wrap="square" rtlCol="0" anchor="ctr"/>
-          <a:lstStyle/>
-          <a:p>
-            <a:pPr algn="ctr" indent="0" marL="0">
-              <a:buNone/>
-            </a:pPr>
-            <a:r>
-              <a:rPr lang="en-US" sz="2200" b="1" dirty="0">
-                <a:solidFill>
-                  <a:srgbClr val="C7CCE0"/>
-                </a:solidFill>
-                <a:latin typeface="Calibri" pitchFamily="34" charset="0"/>
-                <a:ea typeface="Calibri" pitchFamily="34" charset="-122"/>
-                <a:cs typeface="Calibri" pitchFamily="34" charset="-120"/>
-              </a:rPr>
-              <a:t>‹</a:t>
-            </a:r>
-            <a:endParaRPr lang="en-US" sz="2200" dirty="0"/>
-          </a:p>
-        </p:txBody>
-      </p:sp>
-      <p:sp>
-        <p:nvSpPr>
-          <p:cNvPr id="25" name="Shape 20"/>
-          <p:cNvSpPr/>
-          <p:nvPr/>
-        </p:nvSpPr>
-        <p:spPr>
-          <a:xfrm>
-            <a:off x="640080" y="2011680"/>
-            <a:ext cx="2514600" cy="2880360"/>
+              <a:t>توصيل فقط — بلا تصميم ولا طباعة</a:t>
+            </a:r>
+            <a:endParaRPr lang="en-US" sz="1050" dirty="0"/>
+          </a:p>
+        </p:txBody>
+      </p:sp>
+      <p:sp>
+        <p:nvSpPr>
+          <p:cNvPr id="22" name="Shape 17"/>
+          <p:cNvSpPr/>
+          <p:nvPr/>
+        </p:nvSpPr>
+        <p:spPr>
+          <a:xfrm>
+            <a:off x="640080" y="4892040"/>
+            <a:ext cx="10908792" cy="1143000"/>
           </a:xfrm>
           <a:prstGeom prst="roundRect">
             <a:avLst>
-              <a:gd name="adj" fmla="val 4364"/>
+              <a:gd name="adj" fmla="val 9600"/>
             </a:avLst>
           </a:prstGeom>
           <a:solidFill>
-            <a:srgbClr val="F5F6FA"/>
+            <a:srgbClr val="1F2A5E"/>
           </a:solidFill>
           <a:ln/>
           <a:effectLst>
@@ -4677,20 +5272,20 @@
       </p:sp>
       <p:sp>
         <p:nvSpPr>
-          <p:cNvPr id="26" name="Shape 21"/>
-          <p:cNvSpPr/>
-          <p:nvPr/>
-        </p:nvSpPr>
-        <p:spPr>
-          <a:xfrm>
-            <a:off x="1440180" y="2331720"/>
-            <a:ext cx="914400" cy="914400"/>
+          <p:cNvPr id="23" name="Shape 18"/>
+          <p:cNvSpPr/>
+          <p:nvPr/>
+        </p:nvSpPr>
+        <p:spPr>
+          <a:xfrm>
+            <a:off x="960120" y="5166360"/>
+            <a:ext cx="594360" cy="594360"/>
           </a:xfrm>
           <a:prstGeom prst="ellipse">
             <a:avLst/>
           </a:prstGeom>
           <a:solidFill>
-            <a:srgbClr val="1F2A5E"/>
+            <a:srgbClr val="F96167"/>
           </a:solidFill>
           <a:ln/>
           <a:effectLst>
@@ -4704,7 +5299,7 @@
       </p:sp>
       <p:pic>
         <p:nvPicPr>
-          <p:cNvPr id="27" name="Image 3" descr="preencoded.png">    </p:cNvPr>
+          <p:cNvPr id="24" name="Image 3" descr="preencoded.png">    </p:cNvPr>
           <p:cNvPicPr>
             <a:picLocks noChangeAspect="1"/>
           </p:cNvPicPr>
@@ -4718,8 +5313,8 @@
         </p:blipFill>
         <p:spPr>
           <a:xfrm>
-            <a:off x="1659636" y="2551176"/>
-            <a:ext cx="475488" cy="475488"/>
+            <a:off x="1102766" y="5309006"/>
+            <a:ext cx="309067" cy="309067"/>
           </a:xfrm>
           <a:prstGeom prst="rect">
             <a:avLst/>
@@ -4728,77 +5323,38 @@
       </p:pic>
       <p:sp>
         <p:nvSpPr>
-          <p:cNvPr id="28" name="Text 22"/>
-          <p:cNvSpPr/>
-          <p:nvPr/>
-        </p:nvSpPr>
-        <p:spPr>
-          <a:xfrm>
-            <a:off x="2587752" y="2194560"/>
-            <a:ext cx="457200" cy="457200"/>
-          </a:xfrm>
-          <a:prstGeom prst="rect">
-            <a:avLst/>
-          </a:prstGeom>
-          <a:noFill/>
-          <a:ln/>
-        </p:spPr>
-        <p:txBody>
-          <a:bodyPr wrap="square" rtlCol="0" anchor="ctr"/>
-          <a:lstStyle/>
-          <a:p>
-            <a:pPr algn="ctr" indent="0" marL="0">
-              <a:buNone/>
-            </a:pPr>
-            <a:r>
-              <a:rPr lang="en-US" sz="1600" b="1" dirty="0">
-                <a:solidFill>
-                  <a:srgbClr val="F96167"/>
-                </a:solidFill>
-                <a:latin typeface="Calibri" pitchFamily="34" charset="0"/>
-                <a:ea typeface="Calibri" pitchFamily="34" charset="-122"/>
-                <a:cs typeface="Calibri" pitchFamily="34" charset="-120"/>
-              </a:rPr>
-              <a:t>٤</a:t>
-            </a:r>
-            <a:endParaRPr lang="en-US" sz="1600" dirty="0"/>
-          </a:p>
-        </p:txBody>
-      </p:sp>
-      <p:sp>
-        <p:nvSpPr>
-          <p:cNvPr id="29" name="Text 23"/>
-          <p:cNvSpPr/>
-          <p:nvPr/>
-        </p:nvSpPr>
-        <p:spPr>
-          <a:xfrm>
-            <a:off x="777240" y="3429000"/>
-            <a:ext cx="2240280" cy="365760"/>
-          </a:xfrm>
-          <a:prstGeom prst="rect">
-            <a:avLst/>
-          </a:prstGeom>
-          <a:noFill/>
-          <a:ln/>
-        </p:spPr>
-        <p:txBody>
-          <a:bodyPr wrap="square" rtlCol="0" anchor="ctr"/>
-          <a:lstStyle/>
-          <a:p>
-            <a:pPr algn="ctr" indent="0" marL="0">
+          <p:cNvPr id="25" name="Text 19"/>
+          <p:cNvSpPr/>
+          <p:nvPr/>
+        </p:nvSpPr>
+        <p:spPr>
+          <a:xfrm>
+            <a:off x="1737360" y="5029200"/>
+            <a:ext cx="9509760" cy="365760"/>
+          </a:xfrm>
+          <a:prstGeom prst="rect">
+            <a:avLst/>
+          </a:prstGeom>
+          <a:noFill/>
+          <a:ln/>
+        </p:spPr>
+        <p:txBody>
+          <a:bodyPr wrap="square" rtlCol="0" anchor="ctr"/>
+          <a:lstStyle/>
+          <a:p>
+            <a:pPr algn="r" indent="0" marL="0">
               <a:buNone/>
             </a:pPr>
             <a:r>
               <a:rPr lang="en-US" sz="1500" b="1" dirty="0">
                 <a:solidFill>
-                  <a:srgbClr val="1A1A2E"/>
-                </a:solidFill>
-                <a:latin typeface="Calibri" pitchFamily="34" charset="0"/>
-                <a:ea typeface="Calibri" pitchFamily="34" charset="-122"/>
-                <a:cs typeface="Calibri" pitchFamily="34" charset="-120"/>
-              </a:rPr>
-              <a:t>نفّذ</a:t>
+                  <a:srgbClr val="FFFFFF"/>
+                </a:solidFill>
+                <a:latin typeface="Calibri" pitchFamily="34" charset="0"/>
+                <a:ea typeface="Calibri" pitchFamily="34" charset="-122"/>
+                <a:cs typeface="Calibri" pitchFamily="34" charset="-120"/>
+              </a:rPr>
+              <a:t>AdCraft AI Marketplace: نقطة التقاطع الوحيدة</a:t>
             </a:r>
             <a:endParaRPr lang="en-US" sz="1500" dirty="0"/>
           </a:p>
@@ -4806,38 +5362,38 @@
       </p:sp>
       <p:sp>
         <p:nvSpPr>
-          <p:cNvPr id="30" name="Text 24"/>
-          <p:cNvSpPr/>
-          <p:nvPr/>
-        </p:nvSpPr>
-        <p:spPr>
-          <a:xfrm>
-            <a:off x="822960" y="3840480"/>
-            <a:ext cx="2148840" cy="914400"/>
-          </a:xfrm>
-          <a:prstGeom prst="rect">
-            <a:avLst/>
-          </a:prstGeom>
-          <a:noFill/>
-          <a:ln/>
-        </p:spPr>
-        <p:txBody>
-          <a:bodyPr wrap="square" rtlCol="0" anchor="ctr"/>
-          <a:lstStyle/>
-          <a:p>
-            <a:pPr algn="ctr" indent="0" marL="0">
+          <p:cNvPr id="26" name="Text 20"/>
+          <p:cNvSpPr/>
+          <p:nvPr/>
+        </p:nvSpPr>
+        <p:spPr>
+          <a:xfrm>
+            <a:off x="1737360" y="5440680"/>
+            <a:ext cx="9509760" cy="457200"/>
+          </a:xfrm>
+          <a:prstGeom prst="rect">
+            <a:avLst/>
+          </a:prstGeom>
+          <a:noFill/>
+          <a:ln/>
+        </p:spPr>
+        <p:txBody>
+          <a:bodyPr wrap="square" rtlCol="0" anchor="ctr"/>
+          <a:lstStyle/>
+          <a:p>
+            <a:pPr algn="r" indent="0" marL="0">
               <a:buNone/>
             </a:pPr>
             <a:r>
               <a:rPr lang="en-US" sz="1150" dirty="0">
                 <a:solidFill>
-                  <a:srgbClr val="6B7280"/>
-                </a:solidFill>
-                <a:latin typeface="Calibri" pitchFamily="34" charset="0"/>
-                <a:ea typeface="Calibri" pitchFamily="34" charset="-122"/>
-                <a:cs typeface="Calibri" pitchFamily="34" charset="-120"/>
-              </a:rPr>
-              <a:t>حفظ ونشر — أو اطبعه وصلّه</a:t>
+                  <a:srgbClr val="CADCFC"/>
+                </a:solidFill>
+                <a:latin typeface="Calibri" pitchFamily="34" charset="0"/>
+                <a:ea typeface="Calibri" pitchFamily="34" charset="-122"/>
+                <a:cs typeface="Calibri" pitchFamily="34" charset="-120"/>
+              </a:rPr>
+              <a:t>توليد بالذكاء الاصطناعي + شبكة مطابع محلية + توصيل، في تجربة عربية واحدة مصمَّمة لأصحاب الأعمال الصغيرة</a:t>
             </a:r>
             <a:endParaRPr lang="en-US" sz="1150" dirty="0"/>
           </a:p>
@@ -4845,126 +5401,7 @@
       </p:sp>
       <p:sp>
         <p:nvSpPr>
-          <p:cNvPr id="31" name="Shape 25"/>
-          <p:cNvSpPr/>
-          <p:nvPr/>
-        </p:nvSpPr>
-        <p:spPr>
-          <a:xfrm>
-            <a:off x="640080" y="5166360"/>
-            <a:ext cx="10908792" cy="868680"/>
-          </a:xfrm>
-          <a:prstGeom prst="roundRect">
-            <a:avLst>
-              <a:gd name="adj" fmla="val 12632"/>
-            </a:avLst>
-          </a:prstGeom>
-          <a:solidFill>
-            <a:srgbClr val="1F2A5E"/>
-          </a:solidFill>
-          <a:ln/>
-          <a:effectLst>
-            <a:outerShdw sx="100000" sy="100000" kx="0" ky="0" algn="bl" rotWithShape="0" blurRad="101600" dist="25400" dir="5400000">
-              <a:srgbClr val="000000">
-                <a:alpha val="12000"/>
-              </a:srgbClr>
-            </a:outerShdw>
-          </a:effectLst>
-        </p:spPr>
-      </p:sp>
-      <p:sp>
-        <p:nvSpPr>
-          <p:cNvPr id="32" name="Shape 26"/>
-          <p:cNvSpPr/>
-          <p:nvPr/>
-        </p:nvSpPr>
-        <p:spPr>
-          <a:xfrm>
-            <a:off x="960120" y="5394960"/>
-            <a:ext cx="457200" cy="457200"/>
-          </a:xfrm>
-          <a:prstGeom prst="ellipse">
-            <a:avLst/>
-          </a:prstGeom>
-          <a:solidFill>
-            <a:srgbClr val="F96167"/>
-          </a:solidFill>
-          <a:ln/>
-          <a:effectLst>
-            <a:outerShdw sx="100000" sy="100000" kx="0" ky="0" algn="bl" rotWithShape="0" blurRad="76200" dist="25400" dir="5400000">
-              <a:srgbClr val="000000">
-                <a:alpha val="25000"/>
-              </a:srgbClr>
-            </a:outerShdw>
-          </a:effectLst>
-        </p:spPr>
-      </p:sp>
-      <p:pic>
-        <p:nvPicPr>
-          <p:cNvPr id="33" name="Image 4" descr="preencoded.png">    </p:cNvPr>
-          <p:cNvPicPr>
-            <a:picLocks noChangeAspect="1"/>
-          </p:cNvPicPr>
-          <p:nvPr/>
-        </p:nvPicPr>
-        <p:blipFill>
-          <a:blip r:embed="rId5"/>
-          <a:stretch>
-            <a:fillRect/>
-          </a:stretch>
-        </p:blipFill>
-        <p:spPr>
-          <a:xfrm>
-            <a:off x="1062990" y="5497830"/>
-            <a:ext cx="251460" cy="251460"/>
-          </a:xfrm>
-          <a:prstGeom prst="rect">
-            <a:avLst/>
-          </a:prstGeom>
-        </p:spPr>
-      </p:pic>
-      <p:sp>
-        <p:nvSpPr>
-          <p:cNvPr id="34" name="Text 27"/>
-          <p:cNvSpPr/>
-          <p:nvPr/>
-        </p:nvSpPr>
-        <p:spPr>
-          <a:xfrm>
-            <a:off x="1600200" y="5349240"/>
-            <a:ext cx="9692640" cy="457200"/>
-          </a:xfrm>
-          <a:prstGeom prst="rect">
-            <a:avLst/>
-          </a:prstGeom>
-          <a:noFill/>
-          <a:ln/>
-        </p:spPr>
-        <p:txBody>
-          <a:bodyPr wrap="square" rtlCol="0" anchor="ctr"/>
-          <a:lstStyle/>
-          <a:p>
-            <a:pPr algn="r" indent="0" marL="0">
-              <a:buNone/>
-            </a:pPr>
-            <a:r>
-              <a:rPr lang="en-US" sz="1500" b="1" dirty="0">
-                <a:solidFill>
-                  <a:srgbClr val="FFFFFF"/>
-                </a:solidFill>
-                <a:latin typeface="Calibri" pitchFamily="34" charset="0"/>
-                <a:ea typeface="Calibri" pitchFamily="34" charset="-122"/>
-                <a:cs typeface="Calibri" pitchFamily="34" charset="-120"/>
-              </a:rPr>
-              <a:t>الهدف: معاينة فورية في أقل من 90 ثانية من رفع الصورة إلى الإعلان الجاهز</a:t>
-            </a:r>
-            <a:endParaRPr lang="en-US" sz="1500" dirty="0"/>
-          </a:p>
-        </p:txBody>
-      </p:sp>
-      <p:sp>
-        <p:nvSpPr>
-          <p:cNvPr id="35" name="Text 28"/>
+          <p:cNvPr id="27" name="Text 21"/>
           <p:cNvSpPr/>
           <p:nvPr/>
         </p:nvSpPr>
@@ -5066,7 +5503,7 @@
                 <a:ea typeface="Calibri" pitchFamily="34" charset="-122"/>
                 <a:cs typeface="Calibri" pitchFamily="34" charset="-120"/>
               </a:rPr>
-              <a:t>المُخرجات الذكية</a:t>
+              <a:t>تجربة المستخدم</a:t>
             </a:r>
             <a:endParaRPr lang="en-US" sz="1400" dirty="0"/>
           </a:p>
@@ -5105,7 +5542,7 @@
                 <a:ea typeface="Calibri" pitchFamily="34" charset="-122"/>
                 <a:cs typeface="Calibri" pitchFamily="34" charset="-120"/>
               </a:rPr>
-              <a:t>شاشة السحر: ماذا يحصل عليه العميل؟</a:t>
+              <a:t>رحلة العميل: من الفكرة إلى المعاينة</a:t>
             </a:r>
             <a:endParaRPr lang="en-US" sz="3400" dirty="0"/>
           </a:p>
@@ -5119,8 +5556,8 @@
         </p:nvSpPr>
         <p:spPr>
           <a:xfrm>
-            <a:off x="640080" y="2103120"/>
-            <a:ext cx="2514600" cy="3291840"/>
+            <a:off x="8842248" y="2011680"/>
+            <a:ext cx="2514600" cy="2880360"/>
           </a:xfrm>
           <a:prstGeom prst="roundRect">
             <a:avLst>
@@ -5148,14 +5585,14 @@
         </p:nvSpPr>
         <p:spPr>
           <a:xfrm>
-            <a:off x="1417320" y="2423160"/>
-            <a:ext cx="960120" cy="960120"/>
+            <a:off x="9642348" y="2331720"/>
+            <a:ext cx="914400" cy="914400"/>
           </a:xfrm>
           <a:prstGeom prst="ellipse">
             <a:avLst/>
           </a:prstGeom>
           <a:solidFill>
-            <a:srgbClr val="F96167"/>
+            <a:srgbClr val="1F2A5E"/>
           </a:solidFill>
           <a:ln/>
           <a:effectLst>
@@ -5183,8 +5620,8 @@
         </p:blipFill>
         <p:spPr>
           <a:xfrm>
-            <a:off x="1657350" y="2663190"/>
-            <a:ext cx="480060" cy="480060"/>
+            <a:off x="9861804" y="2551176"/>
+            <a:ext cx="475488" cy="475488"/>
           </a:xfrm>
           <a:prstGeom prst="rect">
             <a:avLst/>
@@ -5199,8 +5636,8 @@
         </p:nvSpPr>
         <p:spPr>
           <a:xfrm>
-            <a:off x="777240" y="3611880"/>
-            <a:ext cx="2240280" cy="457200"/>
+            <a:off x="10789920" y="2194560"/>
+            <a:ext cx="457200" cy="457200"/>
           </a:xfrm>
           <a:prstGeom prst="rect">
             <a:avLst/>
@@ -5216,7 +5653,46 @@
               <a:buNone/>
             </a:pPr>
             <a:r>
-              <a:rPr lang="en-US" sz="1450" b="1" dirty="0">
+              <a:rPr lang="en-US" sz="1600" b="1" dirty="0">
+                <a:solidFill>
+                  <a:srgbClr val="F96167"/>
+                </a:solidFill>
+                <a:latin typeface="Calibri" pitchFamily="34" charset="0"/>
+                <a:ea typeface="Calibri" pitchFamily="34" charset="-122"/>
+                <a:cs typeface="Calibri" pitchFamily="34" charset="-120"/>
+              </a:rPr>
+              <a:t>١</a:t>
+            </a:r>
+            <a:endParaRPr lang="en-US" sz="1600" dirty="0"/>
+          </a:p>
+        </p:txBody>
+      </p:sp>
+      <p:sp>
+        <p:nvSpPr>
+          <p:cNvPr id="8" name="Text 5"/>
+          <p:cNvSpPr/>
+          <p:nvPr/>
+        </p:nvSpPr>
+        <p:spPr>
+          <a:xfrm>
+            <a:off x="8979408" y="3429000"/>
+            <a:ext cx="2240280" cy="365760"/>
+          </a:xfrm>
+          <a:prstGeom prst="rect">
+            <a:avLst/>
+          </a:prstGeom>
+          <a:noFill/>
+          <a:ln/>
+        </p:spPr>
+        <p:txBody>
+          <a:bodyPr wrap="square" rtlCol="0" anchor="ctr"/>
+          <a:lstStyle/>
+          <a:p>
+            <a:pPr algn="ctr" indent="0" marL="0">
+              <a:buNone/>
+            </a:pPr>
+            <a:r>
+              <a:rPr lang="en-US" sz="1500" b="1" dirty="0">
                 <a:solidFill>
                   <a:srgbClr val="1A1A2E"/>
                 </a:solidFill>
@@ -5224,22 +5700,22 @@
                 <a:ea typeface="Calibri" pitchFamily="34" charset="-122"/>
                 <a:cs typeface="Calibri" pitchFamily="34" charset="-120"/>
               </a:rPr>
-              <a:t>فيديو قصير</a:t>
-            </a:r>
-            <a:endParaRPr lang="en-US" sz="1450" dirty="0"/>
-          </a:p>
-        </p:txBody>
-      </p:sp>
-      <p:sp>
-        <p:nvSpPr>
-          <p:cNvPr id="8" name="Text 5"/>
-          <p:cNvSpPr/>
-          <p:nvPr/>
-        </p:nvSpPr>
-        <p:spPr>
-          <a:xfrm>
-            <a:off x="822960" y="4114800"/>
-            <a:ext cx="2148840" cy="1097280"/>
+              <a:t>ابدأ</a:t>
+            </a:r>
+            <a:endParaRPr lang="en-US" sz="1500" dirty="0"/>
+          </a:p>
+        </p:txBody>
+      </p:sp>
+      <p:sp>
+        <p:nvSpPr>
+          <p:cNvPr id="9" name="Text 6"/>
+          <p:cNvSpPr/>
+          <p:nvPr/>
+        </p:nvSpPr>
+        <p:spPr>
+          <a:xfrm>
+            <a:off x="9025128" y="3840480"/>
+            <a:ext cx="2148840" cy="914400"/>
           </a:xfrm>
           <a:prstGeom prst="rect">
             <a:avLst/>
@@ -5263,7 +5739,7 @@
                 <a:ea typeface="Calibri" pitchFamily="34" charset="-122"/>
                 <a:cs typeface="Calibri" pitchFamily="34" charset="-120"/>
               </a:rPr>
-              <a:t>بصيغة Reels/Shorts مع تعليق صوتي وموسيقى</a:t>
+              <a:t>زر واحد: «أنشئ إعلانك الآن»</a:t>
             </a:r>
             <a:endParaRPr lang="en-US" sz="1150" dirty="0"/>
           </a:p>
@@ -5271,14 +5747,53 @@
       </p:sp>
       <p:sp>
         <p:nvSpPr>
-          <p:cNvPr id="9" name="Shape 6"/>
-          <p:cNvSpPr/>
-          <p:nvPr/>
-        </p:nvSpPr>
-        <p:spPr>
-          <a:xfrm>
-            <a:off x="3374136" y="2103120"/>
-            <a:ext cx="2514600" cy="3291840"/>
+          <p:cNvPr id="10" name="Text 7"/>
+          <p:cNvSpPr/>
+          <p:nvPr/>
+        </p:nvSpPr>
+        <p:spPr>
+          <a:xfrm>
+            <a:off x="8631936" y="2606040"/>
+            <a:ext cx="201168" cy="457200"/>
+          </a:xfrm>
+          <a:prstGeom prst="rect">
+            <a:avLst/>
+          </a:prstGeom>
+          <a:noFill/>
+          <a:ln/>
+        </p:spPr>
+        <p:txBody>
+          <a:bodyPr wrap="square" rtlCol="0" anchor="ctr"/>
+          <a:lstStyle/>
+          <a:p>
+            <a:pPr algn="ctr" indent="0" marL="0">
+              <a:buNone/>
+            </a:pPr>
+            <a:r>
+              <a:rPr lang="en-US" sz="2200" b="1" dirty="0">
+                <a:solidFill>
+                  <a:srgbClr val="C7CCE0"/>
+                </a:solidFill>
+                <a:latin typeface="Calibri" pitchFamily="34" charset="0"/>
+                <a:ea typeface="Calibri" pitchFamily="34" charset="-122"/>
+                <a:cs typeface="Calibri" pitchFamily="34" charset="-120"/>
+              </a:rPr>
+              <a:t>‹</a:t>
+            </a:r>
+            <a:endParaRPr lang="en-US" sz="2200" dirty="0"/>
+          </a:p>
+        </p:txBody>
+      </p:sp>
+      <p:sp>
+        <p:nvSpPr>
+          <p:cNvPr id="11" name="Shape 8"/>
+          <p:cNvSpPr/>
+          <p:nvPr/>
+        </p:nvSpPr>
+        <p:spPr>
+          <a:xfrm>
+            <a:off x="6108192" y="2011680"/>
+            <a:ext cx="2514600" cy="2880360"/>
           </a:xfrm>
           <a:prstGeom prst="roundRect">
             <a:avLst>
@@ -5286,7 +5801,7 @@
             </a:avLst>
           </a:prstGeom>
           <a:solidFill>
-            <a:srgbClr val="EDEFFA"/>
+            <a:srgbClr val="F5F6FA"/>
           </a:solidFill>
           <a:ln/>
           <a:effectLst>
@@ -5300,20 +5815,20 @@
       </p:sp>
       <p:sp>
         <p:nvSpPr>
-          <p:cNvPr id="10" name="Shape 7"/>
-          <p:cNvSpPr/>
-          <p:nvPr/>
-        </p:nvSpPr>
-        <p:spPr>
-          <a:xfrm>
-            <a:off x="4151376" y="2423160"/>
-            <a:ext cx="960120" cy="960120"/>
+          <p:cNvPr id="12" name="Shape 9"/>
+          <p:cNvSpPr/>
+          <p:nvPr/>
+        </p:nvSpPr>
+        <p:spPr>
+          <a:xfrm>
+            <a:off x="6908292" y="2331720"/>
+            <a:ext cx="914400" cy="914400"/>
           </a:xfrm>
           <a:prstGeom prst="ellipse">
             <a:avLst/>
           </a:prstGeom>
           <a:solidFill>
-            <a:srgbClr val="F96167"/>
+            <a:srgbClr val="1F2A5E"/>
           </a:solidFill>
           <a:ln/>
           <a:effectLst>
@@ -5327,7 +5842,7 @@
       </p:sp>
       <p:pic>
         <p:nvPicPr>
-          <p:cNvPr id="11" name="Image 1" descr="preencoded.png">    </p:cNvPr>
+          <p:cNvPr id="13" name="Image 1" descr="preencoded.png">    </p:cNvPr>
           <p:cNvPicPr>
             <a:picLocks noChangeAspect="1"/>
           </p:cNvPicPr>
@@ -5341,8 +5856,8 @@
         </p:blipFill>
         <p:spPr>
           <a:xfrm>
-            <a:off x="4391406" y="2663190"/>
-            <a:ext cx="480060" cy="480060"/>
+            <a:off x="7127748" y="2551176"/>
+            <a:ext cx="475488" cy="475488"/>
           </a:xfrm>
           <a:prstGeom prst="rect">
             <a:avLst/>
@@ -5351,14 +5866,14 @@
       </p:pic>
       <p:sp>
         <p:nvSpPr>
-          <p:cNvPr id="12" name="Text 8"/>
-          <p:cNvSpPr/>
-          <p:nvPr/>
-        </p:nvSpPr>
-        <p:spPr>
-          <a:xfrm>
-            <a:off x="3511296" y="3611880"/>
-            <a:ext cx="2240280" cy="457200"/>
+          <p:cNvPr id="14" name="Text 10"/>
+          <p:cNvSpPr/>
+          <p:nvPr/>
+        </p:nvSpPr>
+        <p:spPr>
+          <a:xfrm>
+            <a:off x="8055864" y="2194560"/>
+            <a:ext cx="457200" cy="457200"/>
           </a:xfrm>
           <a:prstGeom prst="rect">
             <a:avLst/>
@@ -5374,7 +5889,46 @@
               <a:buNone/>
             </a:pPr>
             <a:r>
-              <a:rPr lang="en-US" sz="1450" b="1" dirty="0">
+              <a:rPr lang="en-US" sz="1600" b="1" dirty="0">
+                <a:solidFill>
+                  <a:srgbClr val="F96167"/>
+                </a:solidFill>
+                <a:latin typeface="Calibri" pitchFamily="34" charset="0"/>
+                <a:ea typeface="Calibri" pitchFamily="34" charset="-122"/>
+                <a:cs typeface="Calibri" pitchFamily="34" charset="-120"/>
+              </a:rPr>
+              <a:t>٢</a:t>
+            </a:r>
+            <a:endParaRPr lang="en-US" sz="1600" dirty="0"/>
+          </a:p>
+        </p:txBody>
+      </p:sp>
+      <p:sp>
+        <p:nvSpPr>
+          <p:cNvPr id="15" name="Text 11"/>
+          <p:cNvSpPr/>
+          <p:nvPr/>
+        </p:nvSpPr>
+        <p:spPr>
+          <a:xfrm>
+            <a:off x="6245352" y="3429000"/>
+            <a:ext cx="2240280" cy="365760"/>
+          </a:xfrm>
+          <a:prstGeom prst="rect">
+            <a:avLst/>
+          </a:prstGeom>
+          <a:noFill/>
+          <a:ln/>
+        </p:spPr>
+        <p:txBody>
+          <a:bodyPr wrap="square" rtlCol="0" anchor="ctr"/>
+          <a:lstStyle/>
+          <a:p>
+            <a:pPr algn="ctr" indent="0" marL="0">
+              <a:buNone/>
+            </a:pPr>
+            <a:r>
+              <a:rPr lang="en-US" sz="1500" b="1" dirty="0">
                 <a:solidFill>
                   <a:srgbClr val="1A1A2E"/>
                 </a:solidFill>
@@ -5382,22 +5936,22 @@
                 <a:ea typeface="Calibri" pitchFamily="34" charset="-122"/>
                 <a:cs typeface="Calibri" pitchFamily="34" charset="-120"/>
               </a:rPr>
-              <a:t>صورة تسويقية</a:t>
-            </a:r>
-            <a:endParaRPr lang="en-US" sz="1450" dirty="0"/>
-          </a:p>
-        </p:txBody>
-      </p:sp>
-      <p:sp>
-        <p:nvSpPr>
-          <p:cNvPr id="13" name="Text 9"/>
-          <p:cNvSpPr/>
-          <p:nvPr/>
-        </p:nvSpPr>
-        <p:spPr>
-          <a:xfrm>
-            <a:off x="3557016" y="4114800"/>
-            <a:ext cx="2148840" cy="1097280"/>
+              <a:t>أدخل التفاصيل</a:t>
+            </a:r>
+            <a:endParaRPr lang="en-US" sz="1500" dirty="0"/>
+          </a:p>
+        </p:txBody>
+      </p:sp>
+      <p:sp>
+        <p:nvSpPr>
+          <p:cNvPr id="16" name="Text 12"/>
+          <p:cNvSpPr/>
+          <p:nvPr/>
+        </p:nvSpPr>
+        <p:spPr>
+          <a:xfrm>
+            <a:off x="6291072" y="3840480"/>
+            <a:ext cx="2148840" cy="914400"/>
           </a:xfrm>
           <a:prstGeom prst="rect">
             <a:avLst/>
@@ -5421,7 +5975,7 @@
                 <a:ea typeface="Calibri" pitchFamily="34" charset="-122"/>
                 <a:cs typeface="Calibri" pitchFamily="34" charset="-120"/>
               </a:rPr>
-              <a:t>بخلفية احترافية مصممة بالذكاء الاصطناعي</a:t>
+              <a:t>صورة المنتج + نبرة الإعلان + المنصة المستهدفة</a:t>
             </a:r>
             <a:endParaRPr lang="en-US" sz="1150" dirty="0"/>
           </a:p>
@@ -5429,14 +5983,53 @@
       </p:sp>
       <p:sp>
         <p:nvSpPr>
-          <p:cNvPr id="14" name="Shape 10"/>
-          <p:cNvSpPr/>
-          <p:nvPr/>
-        </p:nvSpPr>
-        <p:spPr>
-          <a:xfrm>
-            <a:off x="6108192" y="2103120"/>
-            <a:ext cx="2514600" cy="3291840"/>
+          <p:cNvPr id="17" name="Text 13"/>
+          <p:cNvSpPr/>
+          <p:nvPr/>
+        </p:nvSpPr>
+        <p:spPr>
+          <a:xfrm>
+            <a:off x="5897880" y="2606040"/>
+            <a:ext cx="201168" cy="457200"/>
+          </a:xfrm>
+          <a:prstGeom prst="rect">
+            <a:avLst/>
+          </a:prstGeom>
+          <a:noFill/>
+          <a:ln/>
+        </p:spPr>
+        <p:txBody>
+          <a:bodyPr wrap="square" rtlCol="0" anchor="ctr"/>
+          <a:lstStyle/>
+          <a:p>
+            <a:pPr algn="ctr" indent="0" marL="0">
+              <a:buNone/>
+            </a:pPr>
+            <a:r>
+              <a:rPr lang="en-US" sz="2200" b="1" dirty="0">
+                <a:solidFill>
+                  <a:srgbClr val="C7CCE0"/>
+                </a:solidFill>
+                <a:latin typeface="Calibri" pitchFamily="34" charset="0"/>
+                <a:ea typeface="Calibri" pitchFamily="34" charset="-122"/>
+                <a:cs typeface="Calibri" pitchFamily="34" charset="-120"/>
+              </a:rPr>
+              <a:t>‹</a:t>
+            </a:r>
+            <a:endParaRPr lang="en-US" sz="2200" dirty="0"/>
+          </a:p>
+        </p:txBody>
+      </p:sp>
+      <p:sp>
+        <p:nvSpPr>
+          <p:cNvPr id="18" name="Shape 14"/>
+          <p:cNvSpPr/>
+          <p:nvPr/>
+        </p:nvSpPr>
+        <p:spPr>
+          <a:xfrm>
+            <a:off x="3374136" y="2011680"/>
+            <a:ext cx="2514600" cy="2880360"/>
           </a:xfrm>
           <a:prstGeom prst="roundRect">
             <a:avLst>
@@ -5458,14 +6051,14 @@
       </p:sp>
       <p:sp>
         <p:nvSpPr>
-          <p:cNvPr id="15" name="Shape 11"/>
-          <p:cNvSpPr/>
-          <p:nvPr/>
-        </p:nvSpPr>
-        <p:spPr>
-          <a:xfrm>
-            <a:off x="6885432" y="2423160"/>
-            <a:ext cx="960120" cy="960120"/>
+          <p:cNvPr id="19" name="Shape 15"/>
+          <p:cNvSpPr/>
+          <p:nvPr/>
+        </p:nvSpPr>
+        <p:spPr>
+          <a:xfrm>
+            <a:off x="4174236" y="2331720"/>
+            <a:ext cx="914400" cy="914400"/>
           </a:xfrm>
           <a:prstGeom prst="ellipse">
             <a:avLst/>
@@ -5485,7 +6078,7 @@
       </p:sp>
       <p:pic>
         <p:nvPicPr>
-          <p:cNvPr id="16" name="Image 2" descr="preencoded.png">    </p:cNvPr>
+          <p:cNvPr id="20" name="Image 2" descr="preencoded.png">    </p:cNvPr>
           <p:cNvPicPr>
             <a:picLocks noChangeAspect="1"/>
           </p:cNvPicPr>
@@ -5499,8 +6092,8 @@
         </p:blipFill>
         <p:spPr>
           <a:xfrm>
-            <a:off x="7125462" y="2663190"/>
-            <a:ext cx="480060" cy="480060"/>
+            <a:off x="4393692" y="2551176"/>
+            <a:ext cx="475488" cy="475488"/>
           </a:xfrm>
           <a:prstGeom prst="rect">
             <a:avLst/>
@@ -5509,14 +6102,14 @@
       </p:pic>
       <p:sp>
         <p:nvSpPr>
-          <p:cNvPr id="17" name="Text 12"/>
-          <p:cNvSpPr/>
-          <p:nvPr/>
-        </p:nvSpPr>
-        <p:spPr>
-          <a:xfrm>
-            <a:off x="6245352" y="3611880"/>
-            <a:ext cx="2240280" cy="457200"/>
+          <p:cNvPr id="21" name="Text 16"/>
+          <p:cNvSpPr/>
+          <p:nvPr/>
+        </p:nvSpPr>
+        <p:spPr>
+          <a:xfrm>
+            <a:off x="5321808" y="2194560"/>
+            <a:ext cx="457200" cy="457200"/>
           </a:xfrm>
           <a:prstGeom prst="rect">
             <a:avLst/>
@@ -5532,7 +6125,46 @@
               <a:buNone/>
             </a:pPr>
             <a:r>
-              <a:rPr lang="en-US" sz="1450" b="1" dirty="0">
+              <a:rPr lang="en-US" sz="1600" b="1" dirty="0">
+                <a:solidFill>
+                  <a:srgbClr val="F96167"/>
+                </a:solidFill>
+                <a:latin typeface="Calibri" pitchFamily="34" charset="0"/>
+                <a:ea typeface="Calibri" pitchFamily="34" charset="-122"/>
+                <a:cs typeface="Calibri" pitchFamily="34" charset="-120"/>
+              </a:rPr>
+              <a:t>٣</a:t>
+            </a:r>
+            <a:endParaRPr lang="en-US" sz="1600" dirty="0"/>
+          </a:p>
+        </p:txBody>
+      </p:sp>
+      <p:sp>
+        <p:nvSpPr>
+          <p:cNvPr id="22" name="Text 17"/>
+          <p:cNvSpPr/>
+          <p:nvPr/>
+        </p:nvSpPr>
+        <p:spPr>
+          <a:xfrm>
+            <a:off x="3511296" y="3429000"/>
+            <a:ext cx="2240280" cy="365760"/>
+          </a:xfrm>
+          <a:prstGeom prst="rect">
+            <a:avLst/>
+          </a:prstGeom>
+          <a:noFill/>
+          <a:ln/>
+        </p:spPr>
+        <p:txBody>
+          <a:bodyPr wrap="square" rtlCol="0" anchor="ctr"/>
+          <a:lstStyle/>
+          <a:p>
+            <a:pPr algn="ctr" indent="0" marL="0">
+              <a:buNone/>
+            </a:pPr>
+            <a:r>
+              <a:rPr lang="en-US" sz="1500" b="1" dirty="0">
                 <a:solidFill>
                   <a:srgbClr val="1A1A2E"/>
                 </a:solidFill>
@@ -5540,22 +6172,22 @@
                 <a:ea typeface="Calibri" pitchFamily="34" charset="-122"/>
                 <a:cs typeface="Calibri" pitchFamily="34" charset="-120"/>
               </a:rPr>
-              <a:t>نص إعلاني جذاب</a:t>
-            </a:r>
-            <a:endParaRPr lang="en-US" sz="1450" dirty="0"/>
-          </a:p>
-        </p:txBody>
-      </p:sp>
-      <p:sp>
-        <p:nvSpPr>
-          <p:cNvPr id="18" name="Text 13"/>
-          <p:cNvSpPr/>
-          <p:nvPr/>
-        </p:nvSpPr>
-        <p:spPr>
-          <a:xfrm>
-            <a:off x="6291072" y="4114800"/>
-            <a:ext cx="2148840" cy="1097280"/>
+              <a:t>شاشة السحر</a:t>
+            </a:r>
+            <a:endParaRPr lang="en-US" sz="1500" dirty="0"/>
+          </a:p>
+        </p:txBody>
+      </p:sp>
+      <p:sp>
+        <p:nvSpPr>
+          <p:cNvPr id="23" name="Text 18"/>
+          <p:cNvSpPr/>
+          <p:nvPr/>
+        </p:nvSpPr>
+        <p:spPr>
+          <a:xfrm>
+            <a:off x="3557016" y="3840480"/>
+            <a:ext cx="2148840" cy="914400"/>
           </a:xfrm>
           <a:prstGeom prst="rect">
             <a:avLst/>
@@ -5579,7 +6211,7 @@
                 <a:ea typeface="Calibri" pitchFamily="34" charset="-122"/>
                 <a:cs typeface="Calibri" pitchFamily="34" charset="-120"/>
               </a:rPr>
-              <a:t>مكتوب بالنبرة التي يختارها العميل</a:t>
+              <a:t>معاينة فورية: فيديو، صورة، نص، هاشتاقات</a:t>
             </a:r>
             <a:endParaRPr lang="en-US" sz="1150" dirty="0"/>
           </a:p>
@@ -5587,14 +6219,53 @@
       </p:sp>
       <p:sp>
         <p:nvSpPr>
-          <p:cNvPr id="19" name="Shape 14"/>
-          <p:cNvSpPr/>
-          <p:nvPr/>
-        </p:nvSpPr>
-        <p:spPr>
-          <a:xfrm>
-            <a:off x="8842248" y="2103120"/>
-            <a:ext cx="2514600" cy="3291840"/>
+          <p:cNvPr id="24" name="Text 19"/>
+          <p:cNvSpPr/>
+          <p:nvPr/>
+        </p:nvSpPr>
+        <p:spPr>
+          <a:xfrm>
+            <a:off x="3163824" y="2606040"/>
+            <a:ext cx="201168" cy="457200"/>
+          </a:xfrm>
+          <a:prstGeom prst="rect">
+            <a:avLst/>
+          </a:prstGeom>
+          <a:noFill/>
+          <a:ln/>
+        </p:spPr>
+        <p:txBody>
+          <a:bodyPr wrap="square" rtlCol="0" anchor="ctr"/>
+          <a:lstStyle/>
+          <a:p>
+            <a:pPr algn="ctr" indent="0" marL="0">
+              <a:buNone/>
+            </a:pPr>
+            <a:r>
+              <a:rPr lang="en-US" sz="2200" b="1" dirty="0">
+                <a:solidFill>
+                  <a:srgbClr val="C7CCE0"/>
+                </a:solidFill>
+                <a:latin typeface="Calibri" pitchFamily="34" charset="0"/>
+                <a:ea typeface="Calibri" pitchFamily="34" charset="-122"/>
+                <a:cs typeface="Calibri" pitchFamily="34" charset="-120"/>
+              </a:rPr>
+              <a:t>‹</a:t>
+            </a:r>
+            <a:endParaRPr lang="en-US" sz="2200" dirty="0"/>
+          </a:p>
+        </p:txBody>
+      </p:sp>
+      <p:sp>
+        <p:nvSpPr>
+          <p:cNvPr id="25" name="Shape 20"/>
+          <p:cNvSpPr/>
+          <p:nvPr/>
+        </p:nvSpPr>
+        <p:spPr>
+          <a:xfrm>
+            <a:off x="640080" y="2011680"/>
+            <a:ext cx="2514600" cy="2880360"/>
           </a:xfrm>
           <a:prstGeom prst="roundRect">
             <a:avLst>
@@ -5602,7 +6273,7 @@
             </a:avLst>
           </a:prstGeom>
           <a:solidFill>
-            <a:srgbClr val="EDEFFA"/>
+            <a:srgbClr val="F5F6FA"/>
           </a:solidFill>
           <a:ln/>
           <a:effectLst>
@@ -5616,20 +6287,20 @@
       </p:sp>
       <p:sp>
         <p:nvSpPr>
-          <p:cNvPr id="20" name="Shape 15"/>
-          <p:cNvSpPr/>
-          <p:nvPr/>
-        </p:nvSpPr>
-        <p:spPr>
-          <a:xfrm>
-            <a:off x="9619488" y="2423160"/>
-            <a:ext cx="960120" cy="960120"/>
+          <p:cNvPr id="26" name="Shape 21"/>
+          <p:cNvSpPr/>
+          <p:nvPr/>
+        </p:nvSpPr>
+        <p:spPr>
+          <a:xfrm>
+            <a:off x="1440180" y="2331720"/>
+            <a:ext cx="914400" cy="914400"/>
           </a:xfrm>
           <a:prstGeom prst="ellipse">
             <a:avLst/>
           </a:prstGeom>
           <a:solidFill>
-            <a:srgbClr val="F96167"/>
+            <a:srgbClr val="1F2A5E"/>
           </a:solidFill>
           <a:ln/>
           <a:effectLst>
@@ -5643,7 +6314,7 @@
       </p:sp>
       <p:pic>
         <p:nvPicPr>
-          <p:cNvPr id="21" name="Image 3" descr="preencoded.png">    </p:cNvPr>
+          <p:cNvPr id="27" name="Image 3" descr="preencoded.png">    </p:cNvPr>
           <p:cNvPicPr>
             <a:picLocks noChangeAspect="1"/>
           </p:cNvPicPr>
@@ -5657,8 +6328,8 @@
         </p:blipFill>
         <p:spPr>
           <a:xfrm>
-            <a:off x="9859518" y="2663190"/>
-            <a:ext cx="480060" cy="480060"/>
+            <a:off x="1659636" y="2551176"/>
+            <a:ext cx="475488" cy="475488"/>
           </a:xfrm>
           <a:prstGeom prst="rect">
             <a:avLst/>
@@ -5667,14 +6338,14 @@
       </p:pic>
       <p:sp>
         <p:nvSpPr>
-          <p:cNvPr id="22" name="Text 16"/>
-          <p:cNvSpPr/>
-          <p:nvPr/>
-        </p:nvSpPr>
-        <p:spPr>
-          <a:xfrm>
-            <a:off x="8979408" y="3611880"/>
-            <a:ext cx="2240280" cy="457200"/>
+          <p:cNvPr id="28" name="Text 22"/>
+          <p:cNvSpPr/>
+          <p:nvPr/>
+        </p:nvSpPr>
+        <p:spPr>
+          <a:xfrm>
+            <a:off x="2587752" y="2194560"/>
+            <a:ext cx="457200" cy="457200"/>
           </a:xfrm>
           <a:prstGeom prst="rect">
             <a:avLst/>
@@ -5690,7 +6361,46 @@
               <a:buNone/>
             </a:pPr>
             <a:r>
-              <a:rPr lang="en-US" sz="1450" b="1" dirty="0">
+              <a:rPr lang="en-US" sz="1600" b="1" dirty="0">
+                <a:solidFill>
+                  <a:srgbClr val="F96167"/>
+                </a:solidFill>
+                <a:latin typeface="Calibri" pitchFamily="34" charset="0"/>
+                <a:ea typeface="Calibri" pitchFamily="34" charset="-122"/>
+                <a:cs typeface="Calibri" pitchFamily="34" charset="-120"/>
+              </a:rPr>
+              <a:t>٤</a:t>
+            </a:r>
+            <a:endParaRPr lang="en-US" sz="1600" dirty="0"/>
+          </a:p>
+        </p:txBody>
+      </p:sp>
+      <p:sp>
+        <p:nvSpPr>
+          <p:cNvPr id="29" name="Text 23"/>
+          <p:cNvSpPr/>
+          <p:nvPr/>
+        </p:nvSpPr>
+        <p:spPr>
+          <a:xfrm>
+            <a:off x="777240" y="3429000"/>
+            <a:ext cx="2240280" cy="365760"/>
+          </a:xfrm>
+          <a:prstGeom prst="rect">
+            <a:avLst/>
+          </a:prstGeom>
+          <a:noFill/>
+          <a:ln/>
+        </p:spPr>
+        <p:txBody>
+          <a:bodyPr wrap="square" rtlCol="0" anchor="ctr"/>
+          <a:lstStyle/>
+          <a:p>
+            <a:pPr algn="ctr" indent="0" marL="0">
+              <a:buNone/>
+            </a:pPr>
+            <a:r>
+              <a:rPr lang="en-US" sz="1500" b="1" dirty="0">
                 <a:solidFill>
                   <a:srgbClr val="1A1A2E"/>
                 </a:solidFill>
@@ -5698,22 +6408,22 @@
                 <a:ea typeface="Calibri" pitchFamily="34" charset="-122"/>
                 <a:cs typeface="Calibri" pitchFamily="34" charset="-120"/>
               </a:rPr>
-              <a:t>هاشتاقات مقترحة</a:t>
-            </a:r>
-            <a:endParaRPr lang="en-US" sz="1450" dirty="0"/>
-          </a:p>
-        </p:txBody>
-      </p:sp>
-      <p:sp>
-        <p:nvSpPr>
-          <p:cNvPr id="23" name="Text 17"/>
-          <p:cNvSpPr/>
-          <p:nvPr/>
-        </p:nvSpPr>
-        <p:spPr>
-          <a:xfrm>
-            <a:off x="9025128" y="4114800"/>
-            <a:ext cx="2148840" cy="1097280"/>
+              <a:t>نفّذ</a:t>
+            </a:r>
+            <a:endParaRPr lang="en-US" sz="1500" dirty="0"/>
+          </a:p>
+        </p:txBody>
+      </p:sp>
+      <p:sp>
+        <p:nvSpPr>
+          <p:cNvPr id="30" name="Text 24"/>
+          <p:cNvSpPr/>
+          <p:nvPr/>
+        </p:nvSpPr>
+        <p:spPr>
+          <a:xfrm>
+            <a:off x="822960" y="3840480"/>
+            <a:ext cx="2148840" cy="914400"/>
           </a:xfrm>
           <a:prstGeom prst="rect">
             <a:avLst/>
@@ -5737,7 +6447,7 @@
                 <a:ea typeface="Calibri" pitchFamily="34" charset="-122"/>
                 <a:cs typeface="Calibri" pitchFamily="34" charset="-120"/>
               </a:rPr>
-              <a:t>مهيأة لأداء أفضل على كل منصة</a:t>
+              <a:t>حفظ ونشر — أو اطبعه وصلّه</a:t>
             </a:r>
             <a:endParaRPr lang="en-US" sz="1150" dirty="0"/>
           </a:p>
@@ -5745,46 +6455,126 @@
       </p:sp>
       <p:sp>
         <p:nvSpPr>
-          <p:cNvPr id="24" name="Text 18"/>
-          <p:cNvSpPr/>
-          <p:nvPr/>
-        </p:nvSpPr>
-        <p:spPr>
-          <a:xfrm>
-            <a:off x="640080" y="5623560"/>
-            <a:ext cx="10908792" cy="457200"/>
-          </a:xfrm>
-          <a:prstGeom prst="rect">
-            <a:avLst/>
-          </a:prstGeom>
-          <a:noFill/>
-          <a:ln/>
-        </p:spPr>
-        <p:txBody>
-          <a:bodyPr wrap="square" rtlCol="0" anchor="ctr"/>
-          <a:lstStyle/>
-          <a:p>
-            <a:pPr algn="ctr" indent="0" marL="0">
-              <a:buNone/>
-            </a:pPr>
-            <a:r>
-              <a:rPr lang="en-US" sz="1300" i="1" dirty="0">
-                <a:solidFill>
-                  <a:srgbClr val="6B7280"/>
-                </a:solidFill>
-                <a:latin typeface="Calibri" pitchFamily="34" charset="0"/>
-                <a:ea typeface="Calibri" pitchFamily="34" charset="-122"/>
-                <a:cs typeface="Calibri" pitchFamily="34" charset="-120"/>
-              </a:rPr>
-              <a:t>3 بطاقات مقترحة تُعرض فوراً للمقارنة والاختيار قبل النشر أو الطباعة</a:t>
-            </a:r>
-            <a:endParaRPr lang="en-US" sz="1300" dirty="0"/>
-          </a:p>
-        </p:txBody>
-      </p:sp>
-      <p:sp>
-        <p:nvSpPr>
-          <p:cNvPr id="25" name="Text 19"/>
+          <p:cNvPr id="31" name="Shape 25"/>
+          <p:cNvSpPr/>
+          <p:nvPr/>
+        </p:nvSpPr>
+        <p:spPr>
+          <a:xfrm>
+            <a:off x="640080" y="5166360"/>
+            <a:ext cx="10908792" cy="868680"/>
+          </a:xfrm>
+          <a:prstGeom prst="roundRect">
+            <a:avLst>
+              <a:gd name="adj" fmla="val 12632"/>
+            </a:avLst>
+          </a:prstGeom>
+          <a:solidFill>
+            <a:srgbClr val="1F2A5E"/>
+          </a:solidFill>
+          <a:ln/>
+          <a:effectLst>
+            <a:outerShdw sx="100000" sy="100000" kx="0" ky="0" algn="bl" rotWithShape="0" blurRad="101600" dist="25400" dir="5400000">
+              <a:srgbClr val="000000">
+                <a:alpha val="12000"/>
+              </a:srgbClr>
+            </a:outerShdw>
+          </a:effectLst>
+        </p:spPr>
+      </p:sp>
+      <p:sp>
+        <p:nvSpPr>
+          <p:cNvPr id="32" name="Shape 26"/>
+          <p:cNvSpPr/>
+          <p:nvPr/>
+        </p:nvSpPr>
+        <p:spPr>
+          <a:xfrm>
+            <a:off x="960120" y="5394960"/>
+            <a:ext cx="457200" cy="457200"/>
+          </a:xfrm>
+          <a:prstGeom prst="ellipse">
+            <a:avLst/>
+          </a:prstGeom>
+          <a:solidFill>
+            <a:srgbClr val="F96167"/>
+          </a:solidFill>
+          <a:ln/>
+          <a:effectLst>
+            <a:outerShdw sx="100000" sy="100000" kx="0" ky="0" algn="bl" rotWithShape="0" blurRad="76200" dist="25400" dir="5400000">
+              <a:srgbClr val="000000">
+                <a:alpha val="25000"/>
+              </a:srgbClr>
+            </a:outerShdw>
+          </a:effectLst>
+        </p:spPr>
+      </p:sp>
+      <p:pic>
+        <p:nvPicPr>
+          <p:cNvPr id="33" name="Image 4" descr="preencoded.png">    </p:cNvPr>
+          <p:cNvPicPr>
+            <a:picLocks noChangeAspect="1"/>
+          </p:cNvPicPr>
+          <p:nvPr/>
+        </p:nvPicPr>
+        <p:blipFill>
+          <a:blip r:embed="rId5"/>
+          <a:stretch>
+            <a:fillRect/>
+          </a:stretch>
+        </p:blipFill>
+        <p:spPr>
+          <a:xfrm>
+            <a:off x="1062990" y="5497830"/>
+            <a:ext cx="251460" cy="251460"/>
+          </a:xfrm>
+          <a:prstGeom prst="rect">
+            <a:avLst/>
+          </a:prstGeom>
+        </p:spPr>
+      </p:pic>
+      <p:sp>
+        <p:nvSpPr>
+          <p:cNvPr id="34" name="Text 27"/>
+          <p:cNvSpPr/>
+          <p:nvPr/>
+        </p:nvSpPr>
+        <p:spPr>
+          <a:xfrm>
+            <a:off x="1600200" y="5349240"/>
+            <a:ext cx="9692640" cy="457200"/>
+          </a:xfrm>
+          <a:prstGeom prst="rect">
+            <a:avLst/>
+          </a:prstGeom>
+          <a:noFill/>
+          <a:ln/>
+        </p:spPr>
+        <p:txBody>
+          <a:bodyPr wrap="square" rtlCol="0" anchor="ctr"/>
+          <a:lstStyle/>
+          <a:p>
+            <a:pPr algn="r" indent="0" marL="0">
+              <a:buNone/>
+            </a:pPr>
+            <a:r>
+              <a:rPr lang="en-US" sz="1500" b="1" dirty="0">
+                <a:solidFill>
+                  <a:srgbClr val="FFFFFF"/>
+                </a:solidFill>
+                <a:latin typeface="Calibri" pitchFamily="34" charset="0"/>
+                <a:ea typeface="Calibri" pitchFamily="34" charset="-122"/>
+                <a:cs typeface="Calibri" pitchFamily="34" charset="-120"/>
+              </a:rPr>
+              <a:t>الهدف: معاينة فورية في أقل من 90 ثانية من رفع الصورة إلى الإعلان الجاهز</a:t>
+            </a:r>
+            <a:endParaRPr lang="en-US" sz="1500" dirty="0"/>
+          </a:p>
+        </p:txBody>
+      </p:sp>
+      <p:sp>
+        <p:nvSpPr>
+          <p:cNvPr id="35" name="Text 28"/>
           <p:cNvSpPr/>
           <p:nvPr/>
         </p:nvSpPr>
@@ -5886,7 +6676,7 @@
                 <a:ea typeface="Calibri" pitchFamily="34" charset="-122"/>
                 <a:cs typeface="Calibri" pitchFamily="34" charset="-120"/>
               </a:rPr>
-              <a:t>خيارات التنفيذ</a:t>
+              <a:t>المُخرجات الذكية</a:t>
             </a:r>
             <a:endParaRPr lang="en-US" sz="1400" dirty="0"/>
           </a:p>
@@ -5925,7 +6715,7 @@
                 <a:ea typeface="Calibri" pitchFamily="34" charset="-122"/>
                 <a:cs typeface="Calibri" pitchFamily="34" charset="-120"/>
               </a:rPr>
-              <a:t>من المعاينة إلى التسليم: مساران</a:t>
+              <a:t>شاشة السحر: ماذا يحصل عليه العميل؟</a:t>
             </a:r>
             <a:endParaRPr lang="en-US" sz="3400" dirty="0"/>
           </a:p>
@@ -5939,12 +6729,12 @@
         </p:nvSpPr>
         <p:spPr>
           <a:xfrm>
-            <a:off x="6263640" y="2057400"/>
-            <a:ext cx="5257800" cy="3931920"/>
+            <a:off x="640080" y="2103120"/>
+            <a:ext cx="2514600" cy="3291840"/>
           </a:xfrm>
           <a:prstGeom prst="roundRect">
             <a:avLst>
-              <a:gd name="adj" fmla="val 2791"/>
+              <a:gd name="adj" fmla="val 4364"/>
             </a:avLst>
           </a:prstGeom>
           <a:solidFill>
@@ -5968,14 +6758,14 @@
         </p:nvSpPr>
         <p:spPr>
           <a:xfrm>
-            <a:off x="8343900" y="2423160"/>
-            <a:ext cx="1097280" cy="1097280"/>
+            <a:off x="1417320" y="2423160"/>
+            <a:ext cx="960120" cy="960120"/>
           </a:xfrm>
           <a:prstGeom prst="ellipse">
             <a:avLst/>
           </a:prstGeom>
           <a:solidFill>
-            <a:srgbClr val="1F2A5E"/>
+            <a:srgbClr val="F96167"/>
           </a:solidFill>
           <a:ln/>
           <a:effectLst>
@@ -6003,8 +6793,8 @@
         </p:blipFill>
         <p:spPr>
           <a:xfrm>
-            <a:off x="8618220" y="2697480"/>
-            <a:ext cx="548640" cy="548640"/>
+            <a:off x="1657350" y="2663190"/>
+            <a:ext cx="480060" cy="480060"/>
           </a:xfrm>
           <a:prstGeom prst="rect">
             <a:avLst/>
@@ -6019,8 +6809,8 @@
         </p:nvSpPr>
         <p:spPr>
           <a:xfrm>
-            <a:off x="6537960" y="3703320"/>
-            <a:ext cx="4709160" cy="457200"/>
+            <a:off x="777240" y="3611880"/>
+            <a:ext cx="2240280" cy="457200"/>
           </a:xfrm>
           <a:prstGeom prst="rect">
             <a:avLst/>
@@ -6036,7 +6826,7 @@
               <a:buNone/>
             </a:pPr>
             <a:r>
-              <a:rPr lang="en-US" sz="1900" b="1" dirty="0">
+              <a:rPr lang="en-US" sz="1450" b="1" dirty="0">
                 <a:solidFill>
                   <a:srgbClr val="1A1A2E"/>
                 </a:solidFill>
@@ -6044,9 +6834,9 @@
                 <a:ea typeface="Calibri" pitchFamily="34" charset="-122"/>
                 <a:cs typeface="Calibri" pitchFamily="34" charset="-120"/>
               </a:rPr>
-              <a:t>حفظ ونشر</a:t>
-            </a:r>
-            <a:endParaRPr lang="en-US" sz="1900" dirty="0"/>
+              <a:t>فيديو قصير</a:t>
+            </a:r>
+            <a:endParaRPr lang="en-US" sz="1450" dirty="0"/>
           </a:p>
         </p:txBody>
       </p:sp>
@@ -6058,8 +6848,8 @@
         </p:nvSpPr>
         <p:spPr>
           <a:xfrm>
-            <a:off x="6720840" y="4251960"/>
-            <a:ext cx="4343400" cy="731520"/>
+            <a:off x="822960" y="4114800"/>
+            <a:ext cx="2148840" cy="1097280"/>
           </a:xfrm>
           <a:prstGeom prst="rect">
             <a:avLst/>
@@ -6075,7 +6865,7 @@
               <a:buNone/>
             </a:pPr>
             <a:r>
-              <a:rPr lang="en-US" sz="1300" dirty="0">
+              <a:rPr lang="en-US" sz="1150" dirty="0">
                 <a:solidFill>
                   <a:srgbClr val="6B7280"/>
                 </a:solidFill>
@@ -6083,69 +6873,30 @@
                 <a:ea typeface="Calibri" pitchFamily="34" charset="-122"/>
                 <a:cs typeface="Calibri" pitchFamily="34" charset="-120"/>
               </a:rPr>
-              <a:t>تحميل المواد الرقمية فوراً لاستخدامها على أي منصة تواصل اجتماعي — بلا انتظار.</a:t>
-            </a:r>
-            <a:endParaRPr lang="en-US" sz="1300" dirty="0"/>
-          </a:p>
-        </p:txBody>
-      </p:sp>
-      <p:sp>
-        <p:nvSpPr>
-          <p:cNvPr id="9" name="Text 6"/>
-          <p:cNvSpPr/>
-          <p:nvPr/>
-        </p:nvSpPr>
-        <p:spPr>
-          <a:xfrm>
-            <a:off x="6720840" y="5212080"/>
-            <a:ext cx="4343400" cy="365760"/>
-          </a:xfrm>
-          <a:prstGeom prst="rect">
-            <a:avLst/>
-          </a:prstGeom>
-          <a:noFill/>
-          <a:ln/>
-        </p:spPr>
-        <p:txBody>
-          <a:bodyPr wrap="square" rtlCol="0" anchor="ctr"/>
-          <a:lstStyle/>
-          <a:p>
-            <a:pPr algn="ctr" indent="0" marL="0">
-              <a:buNone/>
-            </a:pPr>
-            <a:r>
-              <a:rPr lang="en-US" sz="1200" b="1" dirty="0">
-                <a:solidFill>
-                  <a:srgbClr val="1F2A5E"/>
-                </a:solidFill>
-                <a:latin typeface="Calibri" pitchFamily="34" charset="0"/>
-                <a:ea typeface="Calibri" pitchFamily="34" charset="-122"/>
-                <a:cs typeface="Calibri" pitchFamily="34" charset="-120"/>
-              </a:rPr>
-              <a:t>مسار رقمي بالكامل  •  فوري</a:t>
-            </a:r>
-            <a:endParaRPr lang="en-US" sz="1200" dirty="0"/>
-          </a:p>
-        </p:txBody>
-      </p:sp>
-      <p:sp>
-        <p:nvSpPr>
-          <p:cNvPr id="10" name="Shape 7"/>
-          <p:cNvSpPr/>
-          <p:nvPr/>
-        </p:nvSpPr>
-        <p:spPr>
-          <a:xfrm>
-            <a:off x="640080" y="2057400"/>
-            <a:ext cx="5257800" cy="3931920"/>
+              <a:t>بصيغة Reels/Shorts مع تعليق صوتي وموسيقى</a:t>
+            </a:r>
+            <a:endParaRPr lang="en-US" sz="1150" dirty="0"/>
+          </a:p>
+        </p:txBody>
+      </p:sp>
+      <p:sp>
+        <p:nvSpPr>
+          <p:cNvPr id="9" name="Shape 6"/>
+          <p:cNvSpPr/>
+          <p:nvPr/>
+        </p:nvSpPr>
+        <p:spPr>
+          <a:xfrm>
+            <a:off x="3374136" y="2103120"/>
+            <a:ext cx="2514600" cy="3291840"/>
           </a:xfrm>
           <a:prstGeom prst="roundRect">
             <a:avLst>
-              <a:gd name="adj" fmla="val 2791"/>
+              <a:gd name="adj" fmla="val 4364"/>
             </a:avLst>
           </a:prstGeom>
           <a:solidFill>
-            <a:srgbClr val="1F2A5E"/>
+            <a:srgbClr val="EDEFFA"/>
           </a:solidFill>
           <a:ln/>
           <a:effectLst>
@@ -6159,14 +6910,14 @@
       </p:sp>
       <p:sp>
         <p:nvSpPr>
-          <p:cNvPr id="11" name="Shape 8"/>
-          <p:cNvSpPr/>
-          <p:nvPr/>
-        </p:nvSpPr>
-        <p:spPr>
-          <a:xfrm>
-            <a:off x="2720340" y="2423160"/>
-            <a:ext cx="1097280" cy="1097280"/>
+          <p:cNvPr id="10" name="Shape 7"/>
+          <p:cNvSpPr/>
+          <p:nvPr/>
+        </p:nvSpPr>
+        <p:spPr>
+          <a:xfrm>
+            <a:off x="4151376" y="2423160"/>
+            <a:ext cx="960120" cy="960120"/>
           </a:xfrm>
           <a:prstGeom prst="ellipse">
             <a:avLst/>
@@ -6186,7 +6937,7 @@
       </p:sp>
       <p:pic>
         <p:nvPicPr>
-          <p:cNvPr id="12" name="Image 1" descr="preencoded.png">    </p:cNvPr>
+          <p:cNvPr id="11" name="Image 1" descr="preencoded.png">    </p:cNvPr>
           <p:cNvPicPr>
             <a:picLocks noChangeAspect="1"/>
           </p:cNvPicPr>
@@ -6200,8 +6951,8 @@
         </p:blipFill>
         <p:spPr>
           <a:xfrm>
-            <a:off x="2994660" y="2697480"/>
-            <a:ext cx="548640" cy="548640"/>
+            <a:off x="4391406" y="2663190"/>
+            <a:ext cx="480060" cy="480060"/>
           </a:xfrm>
           <a:prstGeom prst="rect">
             <a:avLst/>
@@ -6210,14 +6961,53 @@
       </p:pic>
       <p:sp>
         <p:nvSpPr>
+          <p:cNvPr id="12" name="Text 8"/>
+          <p:cNvSpPr/>
+          <p:nvPr/>
+        </p:nvSpPr>
+        <p:spPr>
+          <a:xfrm>
+            <a:off x="3511296" y="3611880"/>
+            <a:ext cx="2240280" cy="457200"/>
+          </a:xfrm>
+          <a:prstGeom prst="rect">
+            <a:avLst/>
+          </a:prstGeom>
+          <a:noFill/>
+          <a:ln/>
+        </p:spPr>
+        <p:txBody>
+          <a:bodyPr wrap="square" rtlCol="0" anchor="ctr"/>
+          <a:lstStyle/>
+          <a:p>
+            <a:pPr algn="ctr" indent="0" marL="0">
+              <a:buNone/>
+            </a:pPr>
+            <a:r>
+              <a:rPr lang="en-US" sz="1450" b="1" dirty="0">
+                <a:solidFill>
+                  <a:srgbClr val="1A1A2E"/>
+                </a:solidFill>
+                <a:latin typeface="Calibri" pitchFamily="34" charset="0"/>
+                <a:ea typeface="Calibri" pitchFamily="34" charset="-122"/>
+                <a:cs typeface="Calibri" pitchFamily="34" charset="-120"/>
+              </a:rPr>
+              <a:t>صورة تسويقية</a:t>
+            </a:r>
+            <a:endParaRPr lang="en-US" sz="1450" dirty="0"/>
+          </a:p>
+        </p:txBody>
+      </p:sp>
+      <p:sp>
+        <p:nvSpPr>
           <p:cNvPr id="13" name="Text 9"/>
           <p:cNvSpPr/>
           <p:nvPr/>
         </p:nvSpPr>
         <p:spPr>
           <a:xfrm>
-            <a:off x="914400" y="3703320"/>
-            <a:ext cx="4709160" cy="457200"/>
+            <a:off x="3557016" y="4114800"/>
+            <a:ext cx="2148840" cy="1097280"/>
           </a:xfrm>
           <a:prstGeom prst="rect">
             <a:avLst/>
@@ -6233,30 +7023,110 @@
               <a:buNone/>
             </a:pPr>
             <a:r>
-              <a:rPr lang="en-US" sz="1900" b="1" dirty="0">
-                <a:solidFill>
-                  <a:srgbClr val="FFFFFF"/>
-                </a:solidFill>
-                <a:latin typeface="Calibri" pitchFamily="34" charset="0"/>
-                <a:ea typeface="Calibri" pitchFamily="34" charset="-122"/>
-                <a:cs typeface="Calibri" pitchFamily="34" charset="-120"/>
-              </a:rPr>
-              <a:t>اطبعه وصلّه</a:t>
-            </a:r>
-            <a:endParaRPr lang="en-US" sz="1900" dirty="0"/>
-          </a:p>
-        </p:txBody>
-      </p:sp>
-      <p:sp>
-        <p:nvSpPr>
-          <p:cNvPr id="14" name="Text 10"/>
-          <p:cNvSpPr/>
-          <p:nvPr/>
-        </p:nvSpPr>
-        <p:spPr>
-          <a:xfrm>
-            <a:off x="1097280" y="4251960"/>
-            <a:ext cx="4343400" cy="731520"/>
+              <a:rPr lang="en-US" sz="1150" dirty="0">
+                <a:solidFill>
+                  <a:srgbClr val="6B7280"/>
+                </a:solidFill>
+                <a:latin typeface="Calibri" pitchFamily="34" charset="0"/>
+                <a:ea typeface="Calibri" pitchFamily="34" charset="-122"/>
+                <a:cs typeface="Calibri" pitchFamily="34" charset="-120"/>
+              </a:rPr>
+              <a:t>بخلفية احترافية مصممة بالذكاء الاصطناعي</a:t>
+            </a:r>
+            <a:endParaRPr lang="en-US" sz="1150" dirty="0"/>
+          </a:p>
+        </p:txBody>
+      </p:sp>
+      <p:sp>
+        <p:nvSpPr>
+          <p:cNvPr id="14" name="Shape 10"/>
+          <p:cNvSpPr/>
+          <p:nvPr/>
+        </p:nvSpPr>
+        <p:spPr>
+          <a:xfrm>
+            <a:off x="6108192" y="2103120"/>
+            <a:ext cx="2514600" cy="3291840"/>
+          </a:xfrm>
+          <a:prstGeom prst="roundRect">
+            <a:avLst>
+              <a:gd name="adj" fmla="val 4364"/>
+            </a:avLst>
+          </a:prstGeom>
+          <a:solidFill>
+            <a:srgbClr val="F5F6FA"/>
+          </a:solidFill>
+          <a:ln/>
+          <a:effectLst>
+            <a:outerShdw sx="100000" sy="100000" kx="0" ky="0" algn="bl" rotWithShape="0" blurRad="101600" dist="25400" dir="5400000">
+              <a:srgbClr val="000000">
+                <a:alpha val="12000"/>
+              </a:srgbClr>
+            </a:outerShdw>
+          </a:effectLst>
+        </p:spPr>
+      </p:sp>
+      <p:sp>
+        <p:nvSpPr>
+          <p:cNvPr id="15" name="Shape 11"/>
+          <p:cNvSpPr/>
+          <p:nvPr/>
+        </p:nvSpPr>
+        <p:spPr>
+          <a:xfrm>
+            <a:off x="6885432" y="2423160"/>
+            <a:ext cx="960120" cy="960120"/>
+          </a:xfrm>
+          <a:prstGeom prst="ellipse">
+            <a:avLst/>
+          </a:prstGeom>
+          <a:solidFill>
+            <a:srgbClr val="F96167"/>
+          </a:solidFill>
+          <a:ln/>
+          <a:effectLst>
+            <a:outerShdw sx="100000" sy="100000" kx="0" ky="0" algn="bl" rotWithShape="0" blurRad="76200" dist="25400" dir="5400000">
+              <a:srgbClr val="000000">
+                <a:alpha val="25000"/>
+              </a:srgbClr>
+            </a:outerShdw>
+          </a:effectLst>
+        </p:spPr>
+      </p:sp>
+      <p:pic>
+        <p:nvPicPr>
+          <p:cNvPr id="16" name="Image 2" descr="preencoded.png">    </p:cNvPr>
+          <p:cNvPicPr>
+            <a:picLocks noChangeAspect="1"/>
+          </p:cNvPicPr>
+          <p:nvPr/>
+        </p:nvPicPr>
+        <p:blipFill>
+          <a:blip r:embed="rId3"/>
+          <a:stretch>
+            <a:fillRect/>
+          </a:stretch>
+        </p:blipFill>
+        <p:spPr>
+          <a:xfrm>
+            <a:off x="7125462" y="2663190"/>
+            <a:ext cx="480060" cy="480060"/>
+          </a:xfrm>
+          <a:prstGeom prst="rect">
+            <a:avLst/>
+          </a:prstGeom>
+        </p:spPr>
+      </p:pic>
+      <p:sp>
+        <p:nvSpPr>
+          <p:cNvPr id="17" name="Text 12"/>
+          <p:cNvSpPr/>
+          <p:nvPr/>
+        </p:nvSpPr>
+        <p:spPr>
+          <a:xfrm>
+            <a:off x="6245352" y="3611880"/>
+            <a:ext cx="2240280" cy="457200"/>
           </a:xfrm>
           <a:prstGeom prst="rect">
             <a:avLst/>
@@ -6272,15 +7142,251 @@
               <a:buNone/>
             </a:pPr>
             <a:r>
-              <a:rPr lang="en-US" sz="1300" dirty="0">
-                <a:solidFill>
-                  <a:srgbClr val="CADCFC"/>
-                </a:solidFill>
-                <a:latin typeface="Calibri" pitchFamily="34" charset="0"/>
-                <a:ea typeface="Calibri" pitchFamily="34" charset="-122"/>
-                <a:cs typeface="Calibri" pitchFamily="34" charset="-120"/>
-              </a:rPr>
-              <a:t>طلب طباعة (بنرات، استيكرات، كروت) عبر شبكة المطابع الشريكة، مع توصيل مباشر لباب العميل.</a:t>
+              <a:rPr lang="en-US" sz="1450" b="1" dirty="0">
+                <a:solidFill>
+                  <a:srgbClr val="1A1A2E"/>
+                </a:solidFill>
+                <a:latin typeface="Calibri" pitchFamily="34" charset="0"/>
+                <a:ea typeface="Calibri" pitchFamily="34" charset="-122"/>
+                <a:cs typeface="Calibri" pitchFamily="34" charset="-120"/>
+              </a:rPr>
+              <a:t>نص إعلاني جذاب</a:t>
+            </a:r>
+            <a:endParaRPr lang="en-US" sz="1450" dirty="0"/>
+          </a:p>
+        </p:txBody>
+      </p:sp>
+      <p:sp>
+        <p:nvSpPr>
+          <p:cNvPr id="18" name="Text 13"/>
+          <p:cNvSpPr/>
+          <p:nvPr/>
+        </p:nvSpPr>
+        <p:spPr>
+          <a:xfrm>
+            <a:off x="6291072" y="4114800"/>
+            <a:ext cx="2148840" cy="1097280"/>
+          </a:xfrm>
+          <a:prstGeom prst="rect">
+            <a:avLst/>
+          </a:prstGeom>
+          <a:noFill/>
+          <a:ln/>
+        </p:spPr>
+        <p:txBody>
+          <a:bodyPr wrap="square" rtlCol="0" anchor="ctr"/>
+          <a:lstStyle/>
+          <a:p>
+            <a:pPr algn="ctr" indent="0" marL="0">
+              <a:buNone/>
+            </a:pPr>
+            <a:r>
+              <a:rPr lang="en-US" sz="1150" dirty="0">
+                <a:solidFill>
+                  <a:srgbClr val="6B7280"/>
+                </a:solidFill>
+                <a:latin typeface="Calibri" pitchFamily="34" charset="0"/>
+                <a:ea typeface="Calibri" pitchFamily="34" charset="-122"/>
+                <a:cs typeface="Calibri" pitchFamily="34" charset="-120"/>
+              </a:rPr>
+              <a:t>مكتوب بالنبرة التي يختارها العميل</a:t>
+            </a:r>
+            <a:endParaRPr lang="en-US" sz="1150" dirty="0"/>
+          </a:p>
+        </p:txBody>
+      </p:sp>
+      <p:sp>
+        <p:nvSpPr>
+          <p:cNvPr id="19" name="Shape 14"/>
+          <p:cNvSpPr/>
+          <p:nvPr/>
+        </p:nvSpPr>
+        <p:spPr>
+          <a:xfrm>
+            <a:off x="8842248" y="2103120"/>
+            <a:ext cx="2514600" cy="3291840"/>
+          </a:xfrm>
+          <a:prstGeom prst="roundRect">
+            <a:avLst>
+              <a:gd name="adj" fmla="val 4364"/>
+            </a:avLst>
+          </a:prstGeom>
+          <a:solidFill>
+            <a:srgbClr val="EDEFFA"/>
+          </a:solidFill>
+          <a:ln/>
+          <a:effectLst>
+            <a:outerShdw sx="100000" sy="100000" kx="0" ky="0" algn="bl" rotWithShape="0" blurRad="101600" dist="25400" dir="5400000">
+              <a:srgbClr val="000000">
+                <a:alpha val="12000"/>
+              </a:srgbClr>
+            </a:outerShdw>
+          </a:effectLst>
+        </p:spPr>
+      </p:sp>
+      <p:sp>
+        <p:nvSpPr>
+          <p:cNvPr id="20" name="Shape 15"/>
+          <p:cNvSpPr/>
+          <p:nvPr/>
+        </p:nvSpPr>
+        <p:spPr>
+          <a:xfrm>
+            <a:off x="9619488" y="2423160"/>
+            <a:ext cx="960120" cy="960120"/>
+          </a:xfrm>
+          <a:prstGeom prst="ellipse">
+            <a:avLst/>
+          </a:prstGeom>
+          <a:solidFill>
+            <a:srgbClr val="F96167"/>
+          </a:solidFill>
+          <a:ln/>
+          <a:effectLst>
+            <a:outerShdw sx="100000" sy="100000" kx="0" ky="0" algn="bl" rotWithShape="0" blurRad="76200" dist="25400" dir="5400000">
+              <a:srgbClr val="000000">
+                <a:alpha val="25000"/>
+              </a:srgbClr>
+            </a:outerShdw>
+          </a:effectLst>
+        </p:spPr>
+      </p:sp>
+      <p:pic>
+        <p:nvPicPr>
+          <p:cNvPr id="21" name="Image 3" descr="preencoded.png">    </p:cNvPr>
+          <p:cNvPicPr>
+            <a:picLocks noChangeAspect="1"/>
+          </p:cNvPicPr>
+          <p:nvPr/>
+        </p:nvPicPr>
+        <p:blipFill>
+          <a:blip r:embed="rId4"/>
+          <a:stretch>
+            <a:fillRect/>
+          </a:stretch>
+        </p:blipFill>
+        <p:spPr>
+          <a:xfrm>
+            <a:off x="9859518" y="2663190"/>
+            <a:ext cx="480060" cy="480060"/>
+          </a:xfrm>
+          <a:prstGeom prst="rect">
+            <a:avLst/>
+          </a:prstGeom>
+        </p:spPr>
+      </p:pic>
+      <p:sp>
+        <p:nvSpPr>
+          <p:cNvPr id="22" name="Text 16"/>
+          <p:cNvSpPr/>
+          <p:nvPr/>
+        </p:nvSpPr>
+        <p:spPr>
+          <a:xfrm>
+            <a:off x="8979408" y="3611880"/>
+            <a:ext cx="2240280" cy="457200"/>
+          </a:xfrm>
+          <a:prstGeom prst="rect">
+            <a:avLst/>
+          </a:prstGeom>
+          <a:noFill/>
+          <a:ln/>
+        </p:spPr>
+        <p:txBody>
+          <a:bodyPr wrap="square" rtlCol="0" anchor="ctr"/>
+          <a:lstStyle/>
+          <a:p>
+            <a:pPr algn="ctr" indent="0" marL="0">
+              <a:buNone/>
+            </a:pPr>
+            <a:r>
+              <a:rPr lang="en-US" sz="1450" b="1" dirty="0">
+                <a:solidFill>
+                  <a:srgbClr val="1A1A2E"/>
+                </a:solidFill>
+                <a:latin typeface="Calibri" pitchFamily="34" charset="0"/>
+                <a:ea typeface="Calibri" pitchFamily="34" charset="-122"/>
+                <a:cs typeface="Calibri" pitchFamily="34" charset="-120"/>
+              </a:rPr>
+              <a:t>هاشتاقات مقترحة</a:t>
+            </a:r>
+            <a:endParaRPr lang="en-US" sz="1450" dirty="0"/>
+          </a:p>
+        </p:txBody>
+      </p:sp>
+      <p:sp>
+        <p:nvSpPr>
+          <p:cNvPr id="23" name="Text 17"/>
+          <p:cNvSpPr/>
+          <p:nvPr/>
+        </p:nvSpPr>
+        <p:spPr>
+          <a:xfrm>
+            <a:off x="9025128" y="4114800"/>
+            <a:ext cx="2148840" cy="1097280"/>
+          </a:xfrm>
+          <a:prstGeom prst="rect">
+            <a:avLst/>
+          </a:prstGeom>
+          <a:noFill/>
+          <a:ln/>
+        </p:spPr>
+        <p:txBody>
+          <a:bodyPr wrap="square" rtlCol="0" anchor="ctr"/>
+          <a:lstStyle/>
+          <a:p>
+            <a:pPr algn="ctr" indent="0" marL="0">
+              <a:buNone/>
+            </a:pPr>
+            <a:r>
+              <a:rPr lang="en-US" sz="1150" dirty="0">
+                <a:solidFill>
+                  <a:srgbClr val="6B7280"/>
+                </a:solidFill>
+                <a:latin typeface="Calibri" pitchFamily="34" charset="0"/>
+                <a:ea typeface="Calibri" pitchFamily="34" charset="-122"/>
+                <a:cs typeface="Calibri" pitchFamily="34" charset="-120"/>
+              </a:rPr>
+              <a:t>مهيأة لأداء أفضل على كل منصة</a:t>
+            </a:r>
+            <a:endParaRPr lang="en-US" sz="1150" dirty="0"/>
+          </a:p>
+        </p:txBody>
+      </p:sp>
+      <p:sp>
+        <p:nvSpPr>
+          <p:cNvPr id="24" name="Text 18"/>
+          <p:cNvSpPr/>
+          <p:nvPr/>
+        </p:nvSpPr>
+        <p:spPr>
+          <a:xfrm>
+            <a:off x="640080" y="5623560"/>
+            <a:ext cx="10908792" cy="457200"/>
+          </a:xfrm>
+          <a:prstGeom prst="rect">
+            <a:avLst/>
+          </a:prstGeom>
+          <a:noFill/>
+          <a:ln/>
+        </p:spPr>
+        <p:txBody>
+          <a:bodyPr wrap="square" rtlCol="0" anchor="ctr"/>
+          <a:lstStyle/>
+          <a:p>
+            <a:pPr algn="ctr" indent="0" marL="0">
+              <a:buNone/>
+            </a:pPr>
+            <a:r>
+              <a:rPr lang="en-US" sz="1300" i="1" dirty="0">
+                <a:solidFill>
+                  <a:srgbClr val="6B7280"/>
+                </a:solidFill>
+                <a:latin typeface="Calibri" pitchFamily="34" charset="0"/>
+                <a:ea typeface="Calibri" pitchFamily="34" charset="-122"/>
+                <a:cs typeface="Calibri" pitchFamily="34" charset="-120"/>
+              </a:rPr>
+              <a:t>3 بطاقات مقترحة تُعرض فوراً للمقارنة والاختيار قبل النشر أو الطباعة</a:t>
             </a:r>
             <a:endParaRPr lang="en-US" sz="1300" dirty="0"/>
           </a:p>
@@ -6288,110 +7394,7 @@
       </p:sp>
       <p:sp>
         <p:nvSpPr>
-          <p:cNvPr id="15" name="Text 11"/>
-          <p:cNvSpPr/>
-          <p:nvPr/>
-        </p:nvSpPr>
-        <p:spPr>
-          <a:xfrm>
-            <a:off x="1097280" y="5212080"/>
-            <a:ext cx="4343400" cy="365760"/>
-          </a:xfrm>
-          <a:prstGeom prst="rect">
-            <a:avLst/>
-          </a:prstGeom>
-          <a:noFill/>
-          <a:ln/>
-        </p:spPr>
-        <p:txBody>
-          <a:bodyPr wrap="square" rtlCol="0" anchor="ctr"/>
-          <a:lstStyle/>
-          <a:p>
-            <a:pPr algn="ctr" indent="0" marL="0">
-              <a:buNone/>
-            </a:pPr>
-            <a:r>
-              <a:rPr lang="en-US" sz="1200" b="1" dirty="0">
-                <a:solidFill>
-                  <a:srgbClr val="F9E795"/>
-                </a:solidFill>
-                <a:latin typeface="Calibri" pitchFamily="34" charset="0"/>
-                <a:ea typeface="Calibri" pitchFamily="34" charset="-122"/>
-                <a:cs typeface="Calibri" pitchFamily="34" charset="-120"/>
-              </a:rPr>
-              <a:t>مسار مادي  •  طباعة + توصيل</a:t>
-            </a:r>
-            <a:endParaRPr lang="en-US" sz="1200" dirty="0"/>
-          </a:p>
-        </p:txBody>
-      </p:sp>
-      <p:sp>
-        <p:nvSpPr>
-          <p:cNvPr id="16" name="Shape 12"/>
-          <p:cNvSpPr/>
-          <p:nvPr/>
-        </p:nvSpPr>
-        <p:spPr>
-          <a:xfrm>
-            <a:off x="5779008" y="3657600"/>
-            <a:ext cx="640080" cy="640080"/>
-          </a:xfrm>
-          <a:prstGeom prst="ellipse">
-            <a:avLst/>
-          </a:prstGeom>
-          <a:solidFill>
-            <a:srgbClr val="FFFFFF"/>
-          </a:solidFill>
-          <a:ln w="12700">
-            <a:solidFill>
-              <a:srgbClr val="E2E4EE"/>
-            </a:solidFill>
-            <a:prstDash val="solid"/>
-          </a:ln>
-        </p:spPr>
-      </p:sp>
-      <p:sp>
-        <p:nvSpPr>
-          <p:cNvPr id="17" name="Text 13"/>
-          <p:cNvSpPr/>
-          <p:nvPr/>
-        </p:nvSpPr>
-        <p:spPr>
-          <a:xfrm>
-            <a:off x="5779008" y="3657600"/>
-            <a:ext cx="640080" cy="640080"/>
-          </a:xfrm>
-          <a:prstGeom prst="rect">
-            <a:avLst/>
-          </a:prstGeom>
-          <a:noFill/>
-          <a:ln/>
-        </p:spPr>
-        <p:txBody>
-          <a:bodyPr wrap="square" rtlCol="0" anchor="ctr"/>
-          <a:lstStyle/>
-          <a:p>
-            <a:pPr algn="ctr" indent="0" marL="0">
-              <a:buNone/>
-            </a:pPr>
-            <a:r>
-              <a:rPr lang="en-US" sz="1400" b="1" dirty="0">
-                <a:solidFill>
-                  <a:srgbClr val="6B7280"/>
-                </a:solidFill>
-                <a:latin typeface="Calibri" pitchFamily="34" charset="0"/>
-                <a:ea typeface="Calibri" pitchFamily="34" charset="-122"/>
-                <a:cs typeface="Calibri" pitchFamily="34" charset="-120"/>
-              </a:rPr>
-              <a:t>أو</a:t>
-            </a:r>
-            <a:endParaRPr lang="en-US" sz="1400" dirty="0"/>
-          </a:p>
-        </p:txBody>
-      </p:sp>
-      <p:sp>
-        <p:nvSpPr>
-          <p:cNvPr id="18" name="Text 14"/>
+          <p:cNvPr id="25" name="Text 19"/>
           <p:cNvSpPr/>
           <p:nvPr/>
         </p:nvSpPr>
@@ -6493,7 +7496,7 @@
                 <a:ea typeface="Calibri" pitchFamily="34" charset="-122"/>
                 <a:cs typeface="Calibri" pitchFamily="34" charset="-120"/>
               </a:rPr>
-              <a:t>Business Model</a:t>
+              <a:t>خيارات التنفيذ</a:t>
             </a:r>
             <a:endParaRPr lang="en-US" sz="1400" dirty="0"/>
           </a:p>
@@ -6532,7 +7535,7 @@
                 <a:ea typeface="Calibri" pitchFamily="34" charset="-122"/>
                 <a:cs typeface="Calibri" pitchFamily="34" charset="-120"/>
               </a:rPr>
-              <a:t>نموذج الربح: 3 مصادر دخل متكررة</a:t>
+              <a:t>من المعاينة إلى التسليم: مساران</a:t>
             </a:r>
             <a:endParaRPr lang="en-US" sz="3400" dirty="0"/>
           </a:p>
@@ -6546,12 +7549,12 @@
         </p:nvSpPr>
         <p:spPr>
           <a:xfrm>
-            <a:off x="640080" y="1965960"/>
-            <a:ext cx="3383280" cy="4114800"/>
+            <a:off x="6263640" y="2057400"/>
+            <a:ext cx="5257800" cy="3931920"/>
           </a:xfrm>
           <a:prstGeom prst="roundRect">
             <a:avLst>
-              <a:gd name="adj" fmla="val 3243"/>
+              <a:gd name="adj" fmla="val 2791"/>
             </a:avLst>
           </a:prstGeom>
           <a:solidFill>
@@ -6575,8 +7578,8 @@
         </p:nvSpPr>
         <p:spPr>
           <a:xfrm>
-            <a:off x="1874520" y="2240280"/>
-            <a:ext cx="914400" cy="914400"/>
+            <a:off x="8343900" y="2423160"/>
+            <a:ext cx="1097280" cy="1097280"/>
           </a:xfrm>
           <a:prstGeom prst="ellipse">
             <a:avLst/>
@@ -6610,8 +7613,8 @@
         </p:blipFill>
         <p:spPr>
           <a:xfrm>
-            <a:off x="2093976" y="2459736"/>
-            <a:ext cx="475488" cy="475488"/>
+            <a:off x="8618220" y="2697480"/>
+            <a:ext cx="548640" cy="548640"/>
           </a:xfrm>
           <a:prstGeom prst="rect">
             <a:avLst/>
@@ -6626,8 +7629,8 @@
         </p:nvSpPr>
         <p:spPr>
           <a:xfrm>
-            <a:off x="777240" y="3291840"/>
-            <a:ext cx="3108960" cy="365760"/>
+            <a:off x="6537960" y="3703320"/>
+            <a:ext cx="4709160" cy="457200"/>
           </a:xfrm>
           <a:prstGeom prst="rect">
             <a:avLst/>
@@ -6643,7 +7646,7 @@
               <a:buNone/>
             </a:pPr>
             <a:r>
-              <a:rPr lang="en-US" sz="1600" b="1" dirty="0">
+              <a:rPr lang="en-US" sz="1900" b="1" dirty="0">
                 <a:solidFill>
                   <a:srgbClr val="1A1A2E"/>
                 </a:solidFill>
@@ -6651,9 +7654,9 @@
                 <a:ea typeface="Calibri" pitchFamily="34" charset="-122"/>
                 <a:cs typeface="Calibri" pitchFamily="34" charset="-120"/>
               </a:rPr>
-              <a:t>الإعلانات الرقمية</a:t>
-            </a:r>
-            <a:endParaRPr lang="en-US" sz="1600" dirty="0"/>
+              <a:t>حفظ ونشر</a:t>
+            </a:r>
+            <a:endParaRPr lang="en-US" sz="1900" dirty="0"/>
           </a:p>
         </p:txBody>
       </p:sp>
@@ -6665,8 +7668,8 @@
         </p:nvSpPr>
         <p:spPr>
           <a:xfrm>
-            <a:off x="777240" y="3657600"/>
-            <a:ext cx="3108960" cy="594360"/>
+            <a:off x="6720840" y="4251960"/>
+            <a:ext cx="4343400" cy="731520"/>
           </a:xfrm>
           <a:prstGeom prst="rect">
             <a:avLst/>
@@ -6682,17 +7685,17 @@
               <a:buNone/>
             </a:pPr>
             <a:r>
-              <a:rPr lang="en-US" sz="3000" b="1" dirty="0">
-                <a:solidFill>
-                  <a:srgbClr val="F96167"/>
-                </a:solidFill>
-                <a:latin typeface="Calibri" pitchFamily="34" charset="0"/>
-                <a:ea typeface="Calibri" pitchFamily="34" charset="-122"/>
-                <a:cs typeface="Calibri" pitchFamily="34" charset="-120"/>
-              </a:rPr>
-              <a:t>$29</a:t>
-            </a:r>
-            <a:endParaRPr lang="en-US" sz="3000" dirty="0"/>
+              <a:rPr lang="en-US" sz="1300" dirty="0">
+                <a:solidFill>
+                  <a:srgbClr val="6B7280"/>
+                </a:solidFill>
+                <a:latin typeface="Calibri" pitchFamily="34" charset="0"/>
+                <a:ea typeface="Calibri" pitchFamily="34" charset="-122"/>
+                <a:cs typeface="Calibri" pitchFamily="34" charset="-120"/>
+              </a:rPr>
+              <a:t>تحميل المواد الرقمية فوراً لاستخدامها على أي منصة تواصل اجتماعي — بلا انتظار.</a:t>
+            </a:r>
+            <a:endParaRPr lang="en-US" sz="1300" dirty="0"/>
           </a:p>
         </p:txBody>
       </p:sp>
@@ -6704,8 +7707,8 @@
         </p:nvSpPr>
         <p:spPr>
           <a:xfrm>
-            <a:off x="777240" y="4224528"/>
-            <a:ext cx="3108960" cy="320040"/>
+            <a:off x="6720840" y="5212080"/>
+            <a:ext cx="4343400" cy="365760"/>
           </a:xfrm>
           <a:prstGeom prst="rect">
             <a:avLst/>
@@ -6721,73 +7724,34 @@
               <a:buNone/>
             </a:pPr>
             <a:r>
-              <a:rPr lang="en-US" sz="1100" dirty="0">
-                <a:solidFill>
-                  <a:srgbClr val="6B7280"/>
-                </a:solidFill>
-                <a:latin typeface="Calibri" pitchFamily="34" charset="0"/>
-                <a:ea typeface="Calibri" pitchFamily="34" charset="-122"/>
-                <a:cs typeface="Calibri" pitchFamily="34" charset="-120"/>
-              </a:rPr>
-              <a:t>اشتراك شهري</a:t>
-            </a:r>
-            <a:endParaRPr lang="en-US" sz="1100" dirty="0"/>
-          </a:p>
-        </p:txBody>
-      </p:sp>
-      <p:sp>
-        <p:nvSpPr>
-          <p:cNvPr id="10" name="Text 7"/>
-          <p:cNvSpPr/>
-          <p:nvPr/>
-        </p:nvSpPr>
-        <p:spPr>
-          <a:xfrm>
-            <a:off x="896112" y="4709160"/>
-            <a:ext cx="2871216" cy="1234440"/>
-          </a:xfrm>
-          <a:prstGeom prst="rect">
-            <a:avLst/>
-          </a:prstGeom>
-          <a:noFill/>
-          <a:ln/>
-        </p:spPr>
-        <p:txBody>
-          <a:bodyPr wrap="square" rtlCol="0" anchor="ctr"/>
-          <a:lstStyle/>
-          <a:p>
-            <a:pPr algn="ctr" indent="0" marL="0">
-              <a:buNone/>
-            </a:pPr>
-            <a:r>
-              <a:rPr lang="en-US" sz="1150" dirty="0">
-                <a:solidFill>
-                  <a:srgbClr val="6B7280"/>
-                </a:solidFill>
-                <a:latin typeface="Calibri" pitchFamily="34" charset="0"/>
-                <a:ea typeface="Calibri" pitchFamily="34" charset="-122"/>
-                <a:cs typeface="Calibri" pitchFamily="34" charset="-120"/>
-              </a:rPr>
-              <a:t>خطة مجانية بعلامة مائية، واشتراكات لفتح الميزات المتقدمة، أو نظام رصيد للشركات الكبيرة.</a:t>
-            </a:r>
-            <a:endParaRPr lang="en-US" sz="1150" dirty="0"/>
-          </a:p>
-        </p:txBody>
-      </p:sp>
-      <p:sp>
-        <p:nvSpPr>
-          <p:cNvPr id="11" name="Shape 8"/>
-          <p:cNvSpPr/>
-          <p:nvPr/>
-        </p:nvSpPr>
-        <p:spPr>
-          <a:xfrm>
-            <a:off x="4352544" y="1965960"/>
-            <a:ext cx="3383280" cy="4114800"/>
+              <a:rPr lang="en-US" sz="1200" b="1" dirty="0">
+                <a:solidFill>
+                  <a:srgbClr val="1F2A5E"/>
+                </a:solidFill>
+                <a:latin typeface="Calibri" pitchFamily="34" charset="0"/>
+                <a:ea typeface="Calibri" pitchFamily="34" charset="-122"/>
+                <a:cs typeface="Calibri" pitchFamily="34" charset="-120"/>
+              </a:rPr>
+              <a:t>مسار رقمي بالكامل  •  فوري</a:t>
+            </a:r>
+            <a:endParaRPr lang="en-US" sz="1200" dirty="0"/>
+          </a:p>
+        </p:txBody>
+      </p:sp>
+      <p:sp>
+        <p:nvSpPr>
+          <p:cNvPr id="10" name="Shape 7"/>
+          <p:cNvSpPr/>
+          <p:nvPr/>
+        </p:nvSpPr>
+        <p:spPr>
+          <a:xfrm>
+            <a:off x="640080" y="2057400"/>
+            <a:ext cx="5257800" cy="3931920"/>
           </a:xfrm>
           <a:prstGeom prst="roundRect">
             <a:avLst>
-              <a:gd name="adj" fmla="val 3243"/>
+              <a:gd name="adj" fmla="val 2791"/>
             </a:avLst>
           </a:prstGeom>
           <a:solidFill>
@@ -6805,14 +7769,14 @@
       </p:sp>
       <p:sp>
         <p:nvSpPr>
-          <p:cNvPr id="12" name="Shape 9"/>
-          <p:cNvSpPr/>
-          <p:nvPr/>
-        </p:nvSpPr>
-        <p:spPr>
-          <a:xfrm>
-            <a:off x="5586984" y="2240280"/>
-            <a:ext cx="914400" cy="914400"/>
+          <p:cNvPr id="11" name="Shape 8"/>
+          <p:cNvSpPr/>
+          <p:nvPr/>
+        </p:nvSpPr>
+        <p:spPr>
+          <a:xfrm>
+            <a:off x="2720340" y="2423160"/>
+            <a:ext cx="1097280" cy="1097280"/>
           </a:xfrm>
           <a:prstGeom prst="ellipse">
             <a:avLst/>
@@ -6832,7 +7796,7 @@
       </p:sp>
       <p:pic>
         <p:nvPicPr>
-          <p:cNvPr id="13" name="Image 1" descr="preencoded.png">    </p:cNvPr>
+          <p:cNvPr id="12" name="Image 1" descr="preencoded.png">    </p:cNvPr>
           <p:cNvPicPr>
             <a:picLocks noChangeAspect="1"/>
           </p:cNvPicPr>
@@ -6846,8 +7810,8 @@
         </p:blipFill>
         <p:spPr>
           <a:xfrm>
-            <a:off x="5806440" y="2459736"/>
-            <a:ext cx="475488" cy="475488"/>
+            <a:off x="2994660" y="2697480"/>
+            <a:ext cx="548640" cy="548640"/>
           </a:xfrm>
           <a:prstGeom prst="rect">
             <a:avLst/>
@@ -6856,14 +7820,53 @@
       </p:pic>
       <p:sp>
         <p:nvSpPr>
+          <p:cNvPr id="13" name="Text 9"/>
+          <p:cNvSpPr/>
+          <p:nvPr/>
+        </p:nvSpPr>
+        <p:spPr>
+          <a:xfrm>
+            <a:off x="914400" y="3703320"/>
+            <a:ext cx="4709160" cy="457200"/>
+          </a:xfrm>
+          <a:prstGeom prst="rect">
+            <a:avLst/>
+          </a:prstGeom>
+          <a:noFill/>
+          <a:ln/>
+        </p:spPr>
+        <p:txBody>
+          <a:bodyPr wrap="square" rtlCol="0" anchor="ctr"/>
+          <a:lstStyle/>
+          <a:p>
+            <a:pPr algn="ctr" indent="0" marL="0">
+              <a:buNone/>
+            </a:pPr>
+            <a:r>
+              <a:rPr lang="en-US" sz="1900" b="1" dirty="0">
+                <a:solidFill>
+                  <a:srgbClr val="FFFFFF"/>
+                </a:solidFill>
+                <a:latin typeface="Calibri" pitchFamily="34" charset="0"/>
+                <a:ea typeface="Calibri" pitchFamily="34" charset="-122"/>
+                <a:cs typeface="Calibri" pitchFamily="34" charset="-120"/>
+              </a:rPr>
+              <a:t>اطبعه وصلّه</a:t>
+            </a:r>
+            <a:endParaRPr lang="en-US" sz="1900" dirty="0"/>
+          </a:p>
+        </p:txBody>
+      </p:sp>
+      <p:sp>
+        <p:nvSpPr>
           <p:cNvPr id="14" name="Text 10"/>
           <p:cNvSpPr/>
           <p:nvPr/>
         </p:nvSpPr>
         <p:spPr>
           <a:xfrm>
-            <a:off x="4489704" y="3291840"/>
-            <a:ext cx="3108960" cy="365760"/>
+            <a:off x="1097280" y="4251960"/>
+            <a:ext cx="4343400" cy="731520"/>
           </a:xfrm>
           <a:prstGeom prst="rect">
             <a:avLst/>
@@ -6879,17 +7882,17 @@
               <a:buNone/>
             </a:pPr>
             <a:r>
-              <a:rPr lang="en-US" sz="1600" b="1" dirty="0">
-                <a:solidFill>
-                  <a:srgbClr val="FFFFFF"/>
-                </a:solidFill>
-                <a:latin typeface="Calibri" pitchFamily="34" charset="0"/>
-                <a:ea typeface="Calibri" pitchFamily="34" charset="-122"/>
-                <a:cs typeface="Calibri" pitchFamily="34" charset="-120"/>
-              </a:rPr>
-              <a:t>الطباعة</a:t>
-            </a:r>
-            <a:endParaRPr lang="en-US" sz="1600" dirty="0"/>
+              <a:rPr lang="en-US" sz="1300" dirty="0">
+                <a:solidFill>
+                  <a:srgbClr val="CADCFC"/>
+                </a:solidFill>
+                <a:latin typeface="Calibri" pitchFamily="34" charset="0"/>
+                <a:ea typeface="Calibri" pitchFamily="34" charset="-122"/>
+                <a:cs typeface="Calibri" pitchFamily="34" charset="-120"/>
+              </a:rPr>
+              <a:t>طلب طباعة (بنرات، استيكرات، كروت) عبر شبكة المطابع الشريكة، مع توصيل مباشر لباب العميل.</a:t>
+            </a:r>
+            <a:endParaRPr lang="en-US" sz="1300" dirty="0"/>
           </a:p>
         </p:txBody>
       </p:sp>
@@ -6901,8 +7904,8 @@
         </p:nvSpPr>
         <p:spPr>
           <a:xfrm>
-            <a:off x="4489704" y="3657600"/>
-            <a:ext cx="3108960" cy="594360"/>
+            <a:off x="1097280" y="5212080"/>
+            <a:ext cx="4343400" cy="365760"/>
           </a:xfrm>
           <a:prstGeom prst="rect">
             <a:avLst/>
@@ -6918,7 +7921,7 @@
               <a:buNone/>
             </a:pPr>
             <a:r>
-              <a:rPr lang="en-US" sz="3000" b="1" dirty="0">
+              <a:rPr lang="en-US" sz="1200" b="1" dirty="0">
                 <a:solidFill>
                   <a:srgbClr val="F9E795"/>
                 </a:solidFill>
@@ -6926,22 +7929,47 @@
                 <a:ea typeface="Calibri" pitchFamily="34" charset="-122"/>
                 <a:cs typeface="Calibri" pitchFamily="34" charset="-120"/>
               </a:rPr>
-              <a:t>15%–20%</a:t>
-            </a:r>
-            <a:endParaRPr lang="en-US" sz="3000" dirty="0"/>
-          </a:p>
-        </p:txBody>
-      </p:sp>
-      <p:sp>
-        <p:nvSpPr>
-          <p:cNvPr id="16" name="Text 12"/>
-          <p:cNvSpPr/>
-          <p:nvPr/>
-        </p:nvSpPr>
-        <p:spPr>
-          <a:xfrm>
-            <a:off x="4489704" y="4224528"/>
-            <a:ext cx="3108960" cy="320040"/>
+              <a:t>مسار مادي  •  طباعة + توصيل</a:t>
+            </a:r>
+            <a:endParaRPr lang="en-US" sz="1200" dirty="0"/>
+          </a:p>
+        </p:txBody>
+      </p:sp>
+      <p:sp>
+        <p:nvSpPr>
+          <p:cNvPr id="16" name="Shape 12"/>
+          <p:cNvSpPr/>
+          <p:nvPr/>
+        </p:nvSpPr>
+        <p:spPr>
+          <a:xfrm>
+            <a:off x="5779008" y="3657600"/>
+            <a:ext cx="640080" cy="640080"/>
+          </a:xfrm>
+          <a:prstGeom prst="ellipse">
+            <a:avLst/>
+          </a:prstGeom>
+          <a:solidFill>
+            <a:srgbClr val="FFFFFF"/>
+          </a:solidFill>
+          <a:ln w="12700">
+            <a:solidFill>
+              <a:srgbClr val="E2E4EE"/>
+            </a:solidFill>
+            <a:prstDash val="solid"/>
+          </a:ln>
+        </p:spPr>
+      </p:sp>
+      <p:sp>
+        <p:nvSpPr>
+          <p:cNvPr id="17" name="Text 13"/>
+          <p:cNvSpPr/>
+          <p:nvPr/>
+        </p:nvSpPr>
+        <p:spPr>
+          <a:xfrm>
+            <a:off x="5779008" y="3657600"/>
+            <a:ext cx="640080" cy="640080"/>
           </a:xfrm>
           <a:prstGeom prst="rect">
             <a:avLst/>
@@ -6957,243 +7985,7 @@
               <a:buNone/>
             </a:pPr>
             <a:r>
-              <a:rPr lang="en-US" sz="1100" dirty="0">
-                <a:solidFill>
-                  <a:srgbClr val="AEB9E0"/>
-                </a:solidFill>
-                <a:latin typeface="Calibri" pitchFamily="34" charset="0"/>
-                <a:ea typeface="Calibri" pitchFamily="34" charset="-122"/>
-                <a:cs typeface="Calibri" pitchFamily="34" charset="-120"/>
-              </a:rPr>
-              <a:t>هامش وساطة</a:t>
-            </a:r>
-            <a:endParaRPr lang="en-US" sz="1100" dirty="0"/>
-          </a:p>
-        </p:txBody>
-      </p:sp>
-      <p:sp>
-        <p:nvSpPr>
-          <p:cNvPr id="17" name="Text 13"/>
-          <p:cNvSpPr/>
-          <p:nvPr/>
-        </p:nvSpPr>
-        <p:spPr>
-          <a:xfrm>
-            <a:off x="4608576" y="4709160"/>
-            <a:ext cx="2871216" cy="1234440"/>
-          </a:xfrm>
-          <a:prstGeom prst="rect">
-            <a:avLst/>
-          </a:prstGeom>
-          <a:noFill/>
-          <a:ln/>
-        </p:spPr>
-        <p:txBody>
-          <a:bodyPr wrap="square" rtlCol="0" anchor="ctr"/>
-          <a:lstStyle/>
-          <a:p>
-            <a:pPr algn="ctr" indent="0" marL="0">
-              <a:buNone/>
-            </a:pPr>
-            <a:r>
-              <a:rPr lang="en-US" sz="1150" dirty="0">
-                <a:solidFill>
-                  <a:srgbClr val="CADCFC"/>
-                </a:solidFill>
-                <a:latin typeface="Calibri" pitchFamily="34" charset="0"/>
-                <a:ea typeface="Calibri" pitchFamily="34" charset="-122"/>
-                <a:cs typeface="Calibri" pitchFamily="34" charset="-120"/>
-              </a:rPr>
-              <a:t>تعاقد مع المطابع بأسعار الجملة، وبيع الخدمة للعميل النهائي بهامش ربح واضح.</a:t>
-            </a:r>
-            <a:endParaRPr lang="en-US" sz="1150" dirty="0"/>
-          </a:p>
-        </p:txBody>
-      </p:sp>
-      <p:sp>
-        <p:nvSpPr>
-          <p:cNvPr id="18" name="Shape 14"/>
-          <p:cNvSpPr/>
-          <p:nvPr/>
-        </p:nvSpPr>
-        <p:spPr>
-          <a:xfrm>
-            <a:off x="8065008" y="1965960"/>
-            <a:ext cx="3383280" cy="4114800"/>
-          </a:xfrm>
-          <a:prstGeom prst="roundRect">
-            <a:avLst>
-              <a:gd name="adj" fmla="val 3243"/>
-            </a:avLst>
-          </a:prstGeom>
-          <a:solidFill>
-            <a:srgbClr val="F5F6FA"/>
-          </a:solidFill>
-          <a:ln/>
-          <a:effectLst>
-            <a:outerShdw sx="100000" sy="100000" kx="0" ky="0" algn="bl" rotWithShape="0" blurRad="101600" dist="25400" dir="5400000">
-              <a:srgbClr val="000000">
-                <a:alpha val="12000"/>
-              </a:srgbClr>
-            </a:outerShdw>
-          </a:effectLst>
-        </p:spPr>
-      </p:sp>
-      <p:sp>
-        <p:nvSpPr>
-          <p:cNvPr id="19" name="Shape 15"/>
-          <p:cNvSpPr/>
-          <p:nvPr/>
-        </p:nvSpPr>
-        <p:spPr>
-          <a:xfrm>
-            <a:off x="9299448" y="2240280"/>
-            <a:ext cx="914400" cy="914400"/>
-          </a:xfrm>
-          <a:prstGeom prst="ellipse">
-            <a:avLst/>
-          </a:prstGeom>
-          <a:solidFill>
-            <a:srgbClr val="1F2A5E"/>
-          </a:solidFill>
-          <a:ln/>
-          <a:effectLst>
-            <a:outerShdw sx="100000" sy="100000" kx="0" ky="0" algn="bl" rotWithShape="0" blurRad="76200" dist="25400" dir="5400000">
-              <a:srgbClr val="000000">
-                <a:alpha val="25000"/>
-              </a:srgbClr>
-            </a:outerShdw>
-          </a:effectLst>
-        </p:spPr>
-      </p:sp>
-      <p:pic>
-        <p:nvPicPr>
-          <p:cNvPr id="20" name="Image 2" descr="preencoded.png">    </p:cNvPr>
-          <p:cNvPicPr>
-            <a:picLocks noChangeAspect="1"/>
-          </p:cNvPicPr>
-          <p:nvPr/>
-        </p:nvPicPr>
-        <p:blipFill>
-          <a:blip r:embed="rId3"/>
-          <a:stretch>
-            <a:fillRect/>
-          </a:stretch>
-        </p:blipFill>
-        <p:spPr>
-          <a:xfrm>
-            <a:off x="9518904" y="2459736"/>
-            <a:ext cx="475488" cy="475488"/>
-          </a:xfrm>
-          <a:prstGeom prst="rect">
-            <a:avLst/>
-          </a:prstGeom>
-        </p:spPr>
-      </p:pic>
-      <p:sp>
-        <p:nvSpPr>
-          <p:cNvPr id="21" name="Text 16"/>
-          <p:cNvSpPr/>
-          <p:nvPr/>
-        </p:nvSpPr>
-        <p:spPr>
-          <a:xfrm>
-            <a:off x="8202168" y="3291840"/>
-            <a:ext cx="3108960" cy="365760"/>
-          </a:xfrm>
-          <a:prstGeom prst="rect">
-            <a:avLst/>
-          </a:prstGeom>
-          <a:noFill/>
-          <a:ln/>
-        </p:spPr>
-        <p:txBody>
-          <a:bodyPr wrap="square" rtlCol="0" anchor="ctr"/>
-          <a:lstStyle/>
-          <a:p>
-            <a:pPr algn="ctr" indent="0" marL="0">
-              <a:buNone/>
-            </a:pPr>
-            <a:r>
-              <a:rPr lang="en-US" sz="1600" b="1" dirty="0">
-                <a:solidFill>
-                  <a:srgbClr val="1A1A2E"/>
-                </a:solidFill>
-                <a:latin typeface="Calibri" pitchFamily="34" charset="0"/>
-                <a:ea typeface="Calibri" pitchFamily="34" charset="-122"/>
-                <a:cs typeface="Calibri" pitchFamily="34" charset="-120"/>
-              </a:rPr>
-              <a:t>التوصيل</a:t>
-            </a:r>
-            <a:endParaRPr lang="en-US" sz="1600" dirty="0"/>
-          </a:p>
-        </p:txBody>
-      </p:sp>
-      <p:sp>
-        <p:nvSpPr>
-          <p:cNvPr id="22" name="Text 17"/>
-          <p:cNvSpPr/>
-          <p:nvPr/>
-        </p:nvSpPr>
-        <p:spPr>
-          <a:xfrm>
-            <a:off x="8202168" y="3657600"/>
-            <a:ext cx="3108960" cy="594360"/>
-          </a:xfrm>
-          <a:prstGeom prst="rect">
-            <a:avLst/>
-          </a:prstGeom>
-          <a:noFill/>
-          <a:ln/>
-        </p:spPr>
-        <p:txBody>
-          <a:bodyPr wrap="square" rtlCol="0" anchor="ctr"/>
-          <a:lstStyle/>
-          <a:p>
-            <a:pPr algn="ctr" indent="0" marL="0">
-              <a:buNone/>
-            </a:pPr>
-            <a:r>
-              <a:rPr lang="en-US" sz="3000" b="1" dirty="0">
-                <a:solidFill>
-                  <a:srgbClr val="F96167"/>
-                </a:solidFill>
-                <a:latin typeface="Calibri" pitchFamily="34" charset="0"/>
-                <a:ea typeface="Calibri" pitchFamily="34" charset="-122"/>
-                <a:cs typeface="Calibri" pitchFamily="34" charset="-120"/>
-              </a:rPr>
-              <a:t>رسوم ثابتة</a:t>
-            </a:r>
-            <a:endParaRPr lang="en-US" sz="3000" dirty="0"/>
-          </a:p>
-        </p:txBody>
-      </p:sp>
-      <p:sp>
-        <p:nvSpPr>
-          <p:cNvPr id="23" name="Text 18"/>
-          <p:cNvSpPr/>
-          <p:nvPr/>
-        </p:nvSpPr>
-        <p:spPr>
-          <a:xfrm>
-            <a:off x="8202168" y="4224528"/>
-            <a:ext cx="3108960" cy="320040"/>
-          </a:xfrm>
-          <a:prstGeom prst="rect">
-            <a:avLst/>
-          </a:prstGeom>
-          <a:noFill/>
-          <a:ln/>
-        </p:spPr>
-        <p:txBody>
-          <a:bodyPr wrap="square" rtlCol="0" anchor="ctr"/>
-          <a:lstStyle/>
-          <a:p>
-            <a:pPr algn="ctr" indent="0" marL="0">
-              <a:buNone/>
-            </a:pPr>
-            <a:r>
-              <a:rPr lang="en-US" sz="1100" dirty="0">
+              <a:rPr lang="en-US" sz="1400" b="1" dirty="0">
                 <a:solidFill>
                   <a:srgbClr val="6B7280"/>
                 </a:solidFill>
@@ -7201,54 +7993,15 @@
                 <a:ea typeface="Calibri" pitchFamily="34" charset="-122"/>
                 <a:cs typeface="Calibri" pitchFamily="34" charset="-120"/>
               </a:rPr>
-              <a:t>أو مدمجة بالسعر</a:t>
-            </a:r>
-            <a:endParaRPr lang="en-US" sz="1100" dirty="0"/>
-          </a:p>
-        </p:txBody>
-      </p:sp>
-      <p:sp>
-        <p:nvSpPr>
-          <p:cNvPr id="24" name="Text 19"/>
-          <p:cNvSpPr/>
-          <p:nvPr/>
-        </p:nvSpPr>
-        <p:spPr>
-          <a:xfrm>
-            <a:off x="8321040" y="4709160"/>
-            <a:ext cx="2871216" cy="1234440"/>
-          </a:xfrm>
-          <a:prstGeom prst="rect">
-            <a:avLst/>
-          </a:prstGeom>
-          <a:noFill/>
-          <a:ln/>
-        </p:spPr>
-        <p:txBody>
-          <a:bodyPr wrap="square" rtlCol="0" anchor="ctr"/>
-          <a:lstStyle/>
-          <a:p>
-            <a:pPr algn="ctr" indent="0" marL="0">
-              <a:buNone/>
-            </a:pPr>
-            <a:r>
-              <a:rPr lang="en-US" sz="1150" dirty="0">
-                <a:solidFill>
-                  <a:srgbClr val="6B7280"/>
-                </a:solidFill>
-                <a:latin typeface="Calibri" pitchFamily="34" charset="0"/>
-                <a:ea typeface="Calibri" pitchFamily="34" charset="-122"/>
-                <a:cs typeface="Calibri" pitchFamily="34" charset="-120"/>
-              </a:rPr>
-              <a:t>خصم تفاوضي مع شركات الشحن، أو دمج تكلفة التوصيل داخل سعر المنتج.</a:t>
-            </a:r>
-            <a:endParaRPr lang="en-US" sz="1150" dirty="0"/>
-          </a:p>
-        </p:txBody>
-      </p:sp>
-      <p:sp>
-        <p:nvSpPr>
-          <p:cNvPr id="25" name="Text 20"/>
+              <a:t>أو</a:t>
+            </a:r>
+            <a:endParaRPr lang="en-US" sz="1400" dirty="0"/>
+          </a:p>
+        </p:txBody>
+      </p:sp>
+      <p:sp>
+        <p:nvSpPr>
+          <p:cNvPr id="18" name="Text 14"/>
           <p:cNvSpPr/>
           <p:nvPr/>
         </p:nvSpPr>
@@ -7350,7 +8103,7 @@
                 <a:ea typeface="Calibri" pitchFamily="34" charset="-122"/>
                 <a:cs typeface="Calibri" pitchFamily="34" charset="-120"/>
               </a:rPr>
-              <a:t>Roadmap</a:t>
+              <a:t>Business Model</a:t>
             </a:r>
             <a:endParaRPr lang="en-US" sz="1400" dirty="0"/>
           </a:p>
@@ -7389,7 +8142,7 @@
                 <a:ea typeface="Calibri" pitchFamily="34" charset="-122"/>
                 <a:cs typeface="Calibri" pitchFamily="34" charset="-120"/>
               </a:rPr>
-              <a:t>خطة التنفيذ التدريجي</a:t>
+              <a:t>نموذج الربح: 3 مصادر دخل متكررة</a:t>
             </a:r>
             <a:endParaRPr lang="en-US" sz="3400" dirty="0"/>
           </a:p>
@@ -7403,8 +8156,8 @@
         </p:nvSpPr>
         <p:spPr>
           <a:xfrm>
-            <a:off x="8065008" y="2057400"/>
-            <a:ext cx="3383280" cy="3657600"/>
+            <a:off x="640080" y="1965960"/>
+            <a:ext cx="3383280" cy="4114800"/>
           </a:xfrm>
           <a:prstGeom prst="roundRect">
             <a:avLst>
@@ -7432,8 +8185,8 @@
         </p:nvSpPr>
         <p:spPr>
           <a:xfrm>
-            <a:off x="8385048" y="2331720"/>
-            <a:ext cx="777240" cy="777240"/>
+            <a:off x="1874520" y="2240280"/>
+            <a:ext cx="914400" cy="914400"/>
           </a:xfrm>
           <a:prstGeom prst="ellipse">
             <a:avLst/>
@@ -7467,8 +8220,8 @@
         </p:blipFill>
         <p:spPr>
           <a:xfrm>
-            <a:off x="8579358" y="2526030"/>
-            <a:ext cx="388620" cy="388620"/>
+            <a:off x="2093976" y="2459736"/>
+            <a:ext cx="475488" cy="475488"/>
           </a:xfrm>
           <a:prstGeom prst="rect">
             <a:avLst/>
@@ -7483,8 +8236,8 @@
         </p:nvSpPr>
         <p:spPr>
           <a:xfrm>
-            <a:off x="10625328" y="2286000"/>
-            <a:ext cx="548640" cy="548640"/>
+            <a:off x="777240" y="3291840"/>
+            <a:ext cx="3108960" cy="365760"/>
           </a:xfrm>
           <a:prstGeom prst="rect">
             <a:avLst/>
@@ -7500,17 +8253,17 @@
               <a:buNone/>
             </a:pPr>
             <a:r>
-              <a:rPr lang="en-US" sz="2800" b="1" dirty="0">
-                <a:solidFill>
-                  <a:srgbClr val="E2E4EE"/>
-                </a:solidFill>
-                <a:latin typeface="Calibri" pitchFamily="34" charset="0"/>
-                <a:ea typeface="Calibri" pitchFamily="34" charset="-122"/>
-                <a:cs typeface="Calibri" pitchFamily="34" charset="-120"/>
-              </a:rPr>
-              <a:t>1</a:t>
-            </a:r>
-            <a:endParaRPr lang="en-US" sz="2800" dirty="0"/>
+              <a:rPr lang="en-US" sz="1600" b="1" dirty="0">
+                <a:solidFill>
+                  <a:srgbClr val="1A1A2E"/>
+                </a:solidFill>
+                <a:latin typeface="Calibri" pitchFamily="34" charset="0"/>
+                <a:ea typeface="Calibri" pitchFamily="34" charset="-122"/>
+                <a:cs typeface="Calibri" pitchFamily="34" charset="-120"/>
+              </a:rPr>
+              <a:t>الإعلانات الرقمية</a:t>
+            </a:r>
+            <a:endParaRPr lang="en-US" sz="1600" dirty="0"/>
           </a:p>
         </p:txBody>
       </p:sp>
@@ -7522,34 +8275,34 @@
         </p:nvSpPr>
         <p:spPr>
           <a:xfrm>
-            <a:off x="8339328" y="3246120"/>
-            <a:ext cx="2834640" cy="365760"/>
-          </a:xfrm>
-          <a:prstGeom prst="rect">
-            <a:avLst/>
-          </a:prstGeom>
-          <a:noFill/>
-          <a:ln/>
-        </p:spPr>
-        <p:txBody>
-          <a:bodyPr wrap="square" rtlCol="0" anchor="ctr"/>
-          <a:lstStyle/>
-          <a:p>
-            <a:pPr algn="r" indent="0" marL="0">
-              <a:buNone/>
-            </a:pPr>
-            <a:r>
-              <a:rPr lang="en-US" sz="1550" b="1" dirty="0">
-                <a:solidFill>
-                  <a:srgbClr val="1A1A2E"/>
-                </a:solidFill>
-                <a:latin typeface="Calibri" pitchFamily="34" charset="0"/>
-                <a:ea typeface="Calibri" pitchFamily="34" charset="-122"/>
-                <a:cs typeface="Calibri" pitchFamily="34" charset="-120"/>
-              </a:rPr>
-              <a:t>المرحلة الأولى</a:t>
-            </a:r>
-            <a:endParaRPr lang="en-US" sz="1550" dirty="0"/>
+            <a:off x="777240" y="3657600"/>
+            <a:ext cx="3108960" cy="594360"/>
+          </a:xfrm>
+          <a:prstGeom prst="rect">
+            <a:avLst/>
+          </a:prstGeom>
+          <a:noFill/>
+          <a:ln/>
+        </p:spPr>
+        <p:txBody>
+          <a:bodyPr wrap="square" rtlCol="0" anchor="ctr"/>
+          <a:lstStyle/>
+          <a:p>
+            <a:pPr algn="ctr" indent="0" marL="0">
+              <a:buNone/>
+            </a:pPr>
+            <a:r>
+              <a:rPr lang="en-US" sz="3000" b="1" dirty="0">
+                <a:solidFill>
+                  <a:srgbClr val="F96167"/>
+                </a:solidFill>
+                <a:latin typeface="Calibri" pitchFamily="34" charset="0"/>
+                <a:ea typeface="Calibri" pitchFamily="34" charset="-122"/>
+                <a:cs typeface="Calibri" pitchFamily="34" charset="-120"/>
+              </a:rPr>
+              <a:t>$29</a:t>
+            </a:r>
+            <a:endParaRPr lang="en-US" sz="3000" dirty="0"/>
           </a:p>
         </p:txBody>
       </p:sp>
@@ -7561,34 +8314,34 @@
         </p:nvSpPr>
         <p:spPr>
           <a:xfrm>
-            <a:off x="8339328" y="3611880"/>
-            <a:ext cx="2834640" cy="320040"/>
-          </a:xfrm>
-          <a:prstGeom prst="rect">
-            <a:avLst/>
-          </a:prstGeom>
-          <a:noFill/>
-          <a:ln/>
-        </p:spPr>
-        <p:txBody>
-          <a:bodyPr wrap="square" rtlCol="0" anchor="ctr"/>
-          <a:lstStyle/>
-          <a:p>
-            <a:pPr algn="r" indent="0" marL="0">
-              <a:buNone/>
-            </a:pPr>
-            <a:r>
-              <a:rPr lang="en-US" sz="1200" b="1" dirty="0">
-                <a:solidFill>
-                  <a:srgbClr val="F96167"/>
-                </a:solidFill>
-                <a:latin typeface="Calibri" pitchFamily="34" charset="0"/>
-                <a:ea typeface="Calibri" pitchFamily="34" charset="-122"/>
-                <a:cs typeface="Calibri" pitchFamily="34" charset="-120"/>
-              </a:rPr>
-              <a:t>اختبار التشغيل</a:t>
-            </a:r>
-            <a:endParaRPr lang="en-US" sz="1200" dirty="0"/>
+            <a:off x="777240" y="4224528"/>
+            <a:ext cx="3108960" cy="320040"/>
+          </a:xfrm>
+          <a:prstGeom prst="rect">
+            <a:avLst/>
+          </a:prstGeom>
+          <a:noFill/>
+          <a:ln/>
+        </p:spPr>
+        <p:txBody>
+          <a:bodyPr wrap="square" rtlCol="0" anchor="ctr"/>
+          <a:lstStyle/>
+          <a:p>
+            <a:pPr algn="ctr" indent="0" marL="0">
+              <a:buNone/>
+            </a:pPr>
+            <a:r>
+              <a:rPr lang="en-US" sz="1100" dirty="0">
+                <a:solidFill>
+                  <a:srgbClr val="6B7280"/>
+                </a:solidFill>
+                <a:latin typeface="Calibri" pitchFamily="34" charset="0"/>
+                <a:ea typeface="Calibri" pitchFamily="34" charset="-122"/>
+                <a:cs typeface="Calibri" pitchFamily="34" charset="-120"/>
+              </a:rPr>
+              <a:t>اشتراك شهري</a:t>
+            </a:r>
+            <a:endParaRPr lang="en-US" sz="1100" dirty="0"/>
           </a:p>
         </p:txBody>
       </p:sp>
@@ -7600,24 +8353,24 @@
         </p:nvSpPr>
         <p:spPr>
           <a:xfrm>
-            <a:off x="8339328" y="3977640"/>
-            <a:ext cx="2834640" cy="1600200"/>
-          </a:xfrm>
-          <a:prstGeom prst="rect">
-            <a:avLst/>
-          </a:prstGeom>
-          <a:noFill/>
-          <a:ln/>
-        </p:spPr>
-        <p:txBody>
-          <a:bodyPr wrap="square" rtlCol="0" anchor="t"/>
-          <a:lstStyle/>
-          <a:p>
-            <a:pPr algn="r" indent="0" marL="0">
-              <a:buNone/>
-            </a:pPr>
-            <a:r>
-              <a:rPr lang="en-US" sz="1200" dirty="0">
+            <a:off x="896112" y="4709160"/>
+            <a:ext cx="2871216" cy="1234440"/>
+          </a:xfrm>
+          <a:prstGeom prst="rect">
+            <a:avLst/>
+          </a:prstGeom>
+          <a:noFill/>
+          <a:ln/>
+        </p:spPr>
+        <p:txBody>
+          <a:bodyPr wrap="square" rtlCol="0" anchor="ctr"/>
+          <a:lstStyle/>
+          <a:p>
+            <a:pPr algn="ctr" indent="0" marL="0">
+              <a:buNone/>
+            </a:pPr>
+            <a:r>
+              <a:rPr lang="en-US" sz="1150" dirty="0">
                 <a:solidFill>
                   <a:srgbClr val="6B7280"/>
                 </a:solidFill>
@@ -7625,61 +8378,22 @@
                 <a:ea typeface="Calibri" pitchFamily="34" charset="-122"/>
                 <a:cs typeface="Calibri" pitchFamily="34" charset="-120"/>
               </a:rPr>
-              <a:t>التعاقد مع 3 مطابع ووكالة إعلانية واحدة، وتجربة رحلة العميل كاملة (توليد + طباعة + توصيل) لقياس الجودة والسرعة.</a:t>
-            </a:r>
-            <a:endParaRPr lang="en-US" sz="1200" dirty="0"/>
-          </a:p>
-        </p:txBody>
-      </p:sp>
-      <p:sp>
-        <p:nvSpPr>
-          <p:cNvPr id="11" name="Text 8"/>
-          <p:cNvSpPr/>
-          <p:nvPr/>
-        </p:nvSpPr>
-        <p:spPr>
-          <a:xfrm>
-            <a:off x="7754112" y="3566160"/>
-            <a:ext cx="274320" cy="457200"/>
-          </a:xfrm>
-          <a:prstGeom prst="rect">
-            <a:avLst/>
-          </a:prstGeom>
-          <a:noFill/>
-          <a:ln/>
-        </p:spPr>
-        <p:txBody>
-          <a:bodyPr wrap="square" rtlCol="0" anchor="ctr"/>
-          <a:lstStyle/>
-          <a:p>
-            <a:pPr algn="ctr" indent="0" marL="0">
-              <a:buNone/>
-            </a:pPr>
-            <a:r>
-              <a:rPr lang="en-US" sz="2200" b="1" dirty="0">
-                <a:solidFill>
-                  <a:srgbClr val="C7CCE0"/>
-                </a:solidFill>
-                <a:latin typeface="Calibri" pitchFamily="34" charset="0"/>
-                <a:ea typeface="Calibri" pitchFamily="34" charset="-122"/>
-                <a:cs typeface="Calibri" pitchFamily="34" charset="-120"/>
-              </a:rPr>
-              <a:t>‹</a:t>
-            </a:r>
-            <a:endParaRPr lang="en-US" sz="2200" dirty="0"/>
-          </a:p>
-        </p:txBody>
-      </p:sp>
-      <p:sp>
-        <p:nvSpPr>
-          <p:cNvPr id="12" name="Shape 9"/>
-          <p:cNvSpPr/>
-          <p:nvPr/>
-        </p:nvSpPr>
-        <p:spPr>
-          <a:xfrm>
-            <a:off x="4352544" y="2057400"/>
-            <a:ext cx="3383280" cy="3657600"/>
+              <a:t>خطة مجانية بعلامة مائية، واشتراكات لفتح الميزات المتقدمة، أو نظام رصيد للشركات الكبيرة.</a:t>
+            </a:r>
+            <a:endParaRPr lang="en-US" sz="1150" dirty="0"/>
+          </a:p>
+        </p:txBody>
+      </p:sp>
+      <p:sp>
+        <p:nvSpPr>
+          <p:cNvPr id="11" name="Shape 8"/>
+          <p:cNvSpPr/>
+          <p:nvPr/>
+        </p:nvSpPr>
+        <p:spPr>
+          <a:xfrm>
+            <a:off x="4352544" y="1965960"/>
+            <a:ext cx="3383280" cy="4114800"/>
           </a:xfrm>
           <a:prstGeom prst="roundRect">
             <a:avLst>
@@ -7687,7 +8401,7 @@
             </a:avLst>
           </a:prstGeom>
           <a:solidFill>
-            <a:srgbClr val="F5F6FA"/>
+            <a:srgbClr val="1F2A5E"/>
           </a:solidFill>
           <a:ln/>
           <a:effectLst>
@@ -7701,20 +8415,20 @@
       </p:sp>
       <p:sp>
         <p:nvSpPr>
-          <p:cNvPr id="13" name="Shape 10"/>
-          <p:cNvSpPr/>
-          <p:nvPr/>
-        </p:nvSpPr>
-        <p:spPr>
-          <a:xfrm>
-            <a:off x="4672584" y="2331720"/>
-            <a:ext cx="777240" cy="777240"/>
+          <p:cNvPr id="12" name="Shape 9"/>
+          <p:cNvSpPr/>
+          <p:nvPr/>
+        </p:nvSpPr>
+        <p:spPr>
+          <a:xfrm>
+            <a:off x="5586984" y="2240280"/>
+            <a:ext cx="914400" cy="914400"/>
           </a:xfrm>
           <a:prstGeom prst="ellipse">
             <a:avLst/>
           </a:prstGeom>
           <a:solidFill>
-            <a:srgbClr val="1F2A5E"/>
+            <a:srgbClr val="F96167"/>
           </a:solidFill>
           <a:ln/>
           <a:effectLst>
@@ -7728,7 +8442,7 @@
       </p:sp>
       <p:pic>
         <p:nvPicPr>
-          <p:cNvPr id="14" name="Image 1" descr="preencoded.png">    </p:cNvPr>
+          <p:cNvPr id="13" name="Image 1" descr="preencoded.png">    </p:cNvPr>
           <p:cNvPicPr>
             <a:picLocks noChangeAspect="1"/>
           </p:cNvPicPr>
@@ -7742,8 +8456,8 @@
         </p:blipFill>
         <p:spPr>
           <a:xfrm>
-            <a:off x="4866894" y="2526030"/>
-            <a:ext cx="388620" cy="388620"/>
+            <a:off x="5806440" y="2459736"/>
+            <a:ext cx="475488" cy="475488"/>
           </a:xfrm>
           <a:prstGeom prst="rect">
             <a:avLst/>
@@ -7752,14 +8466,53 @@
       </p:pic>
       <p:sp>
         <p:nvSpPr>
+          <p:cNvPr id="14" name="Text 10"/>
+          <p:cNvSpPr/>
+          <p:nvPr/>
+        </p:nvSpPr>
+        <p:spPr>
+          <a:xfrm>
+            <a:off x="4489704" y="3291840"/>
+            <a:ext cx="3108960" cy="365760"/>
+          </a:xfrm>
+          <a:prstGeom prst="rect">
+            <a:avLst/>
+          </a:prstGeom>
+          <a:noFill/>
+          <a:ln/>
+        </p:spPr>
+        <p:txBody>
+          <a:bodyPr wrap="square" rtlCol="0" anchor="ctr"/>
+          <a:lstStyle/>
+          <a:p>
+            <a:pPr algn="ctr" indent="0" marL="0">
+              <a:buNone/>
+            </a:pPr>
+            <a:r>
+              <a:rPr lang="en-US" sz="1600" b="1" dirty="0">
+                <a:solidFill>
+                  <a:srgbClr val="FFFFFF"/>
+                </a:solidFill>
+                <a:latin typeface="Calibri" pitchFamily="34" charset="0"/>
+                <a:ea typeface="Calibri" pitchFamily="34" charset="-122"/>
+                <a:cs typeface="Calibri" pitchFamily="34" charset="-120"/>
+              </a:rPr>
+              <a:t>الطباعة</a:t>
+            </a:r>
+            <a:endParaRPr lang="en-US" sz="1600" dirty="0"/>
+          </a:p>
+        </p:txBody>
+      </p:sp>
+      <p:sp>
+        <p:nvSpPr>
           <p:cNvPr id="15" name="Text 11"/>
           <p:cNvSpPr/>
           <p:nvPr/>
         </p:nvSpPr>
         <p:spPr>
           <a:xfrm>
-            <a:off x="6912864" y="2286000"/>
-            <a:ext cx="548640" cy="548640"/>
+            <a:off x="4489704" y="3657600"/>
+            <a:ext cx="3108960" cy="594360"/>
           </a:xfrm>
           <a:prstGeom prst="rect">
             <a:avLst/>
@@ -7775,17 +8528,17 @@
               <a:buNone/>
             </a:pPr>
             <a:r>
-              <a:rPr lang="en-US" sz="2800" b="1" dirty="0">
-                <a:solidFill>
-                  <a:srgbClr val="E2E4EE"/>
-                </a:solidFill>
-                <a:latin typeface="Calibri" pitchFamily="34" charset="0"/>
-                <a:ea typeface="Calibri" pitchFamily="34" charset="-122"/>
-                <a:cs typeface="Calibri" pitchFamily="34" charset="-120"/>
-              </a:rPr>
-              <a:t>2</a:t>
-            </a:r>
-            <a:endParaRPr lang="en-US" sz="2800" dirty="0"/>
+              <a:rPr lang="en-US" sz="3000" b="1" dirty="0">
+                <a:solidFill>
+                  <a:srgbClr val="F9E795"/>
+                </a:solidFill>
+                <a:latin typeface="Calibri" pitchFamily="34" charset="0"/>
+                <a:ea typeface="Calibri" pitchFamily="34" charset="-122"/>
+                <a:cs typeface="Calibri" pitchFamily="34" charset="-120"/>
+              </a:rPr>
+              <a:t>15%–20%</a:t>
+            </a:r>
+            <a:endParaRPr lang="en-US" sz="3000" dirty="0"/>
           </a:p>
         </p:txBody>
       </p:sp>
@@ -7797,34 +8550,34 @@
         </p:nvSpPr>
         <p:spPr>
           <a:xfrm>
-            <a:off x="4626864" y="3246120"/>
-            <a:ext cx="2834640" cy="365760"/>
-          </a:xfrm>
-          <a:prstGeom prst="rect">
-            <a:avLst/>
-          </a:prstGeom>
-          <a:noFill/>
-          <a:ln/>
-        </p:spPr>
-        <p:txBody>
-          <a:bodyPr wrap="square" rtlCol="0" anchor="ctr"/>
-          <a:lstStyle/>
-          <a:p>
-            <a:pPr algn="r" indent="0" marL="0">
-              <a:buNone/>
-            </a:pPr>
-            <a:r>
-              <a:rPr lang="en-US" sz="1550" b="1" dirty="0">
-                <a:solidFill>
-                  <a:srgbClr val="1A1A2E"/>
-                </a:solidFill>
-                <a:latin typeface="Calibri" pitchFamily="34" charset="0"/>
-                <a:ea typeface="Calibri" pitchFamily="34" charset="-122"/>
-                <a:cs typeface="Calibri" pitchFamily="34" charset="-120"/>
-              </a:rPr>
-              <a:t>المرحلة الثانية</a:t>
-            </a:r>
-            <a:endParaRPr lang="en-US" sz="1550" dirty="0"/>
+            <a:off x="4489704" y="4224528"/>
+            <a:ext cx="3108960" cy="320040"/>
+          </a:xfrm>
+          <a:prstGeom prst="rect">
+            <a:avLst/>
+          </a:prstGeom>
+          <a:noFill/>
+          <a:ln/>
+        </p:spPr>
+        <p:txBody>
+          <a:bodyPr wrap="square" rtlCol="0" anchor="ctr"/>
+          <a:lstStyle/>
+          <a:p>
+            <a:pPr algn="ctr" indent="0" marL="0">
+              <a:buNone/>
+            </a:pPr>
+            <a:r>
+              <a:rPr lang="en-US" sz="1100" dirty="0">
+                <a:solidFill>
+                  <a:srgbClr val="AEB9E0"/>
+                </a:solidFill>
+                <a:latin typeface="Calibri" pitchFamily="34" charset="0"/>
+                <a:ea typeface="Calibri" pitchFamily="34" charset="-122"/>
+                <a:cs typeface="Calibri" pitchFamily="34" charset="-120"/>
+              </a:rPr>
+              <a:t>هامش وساطة</a:t>
+            </a:r>
+            <a:endParaRPr lang="en-US" sz="1100" dirty="0"/>
           </a:p>
         </p:txBody>
       </p:sp>
@@ -7836,86 +8589,8 @@
         </p:nvSpPr>
         <p:spPr>
           <a:xfrm>
-            <a:off x="4626864" y="3611880"/>
-            <a:ext cx="2834640" cy="320040"/>
-          </a:xfrm>
-          <a:prstGeom prst="rect">
-            <a:avLst/>
-          </a:prstGeom>
-          <a:noFill/>
-          <a:ln/>
-        </p:spPr>
-        <p:txBody>
-          <a:bodyPr wrap="square" rtlCol="0" anchor="ctr"/>
-          <a:lstStyle/>
-          <a:p>
-            <a:pPr algn="r" indent="0" marL="0">
-              <a:buNone/>
-            </a:pPr>
-            <a:r>
-              <a:rPr lang="en-US" sz="1200" b="1" dirty="0">
-                <a:solidFill>
-                  <a:srgbClr val="F96167"/>
-                </a:solidFill>
-                <a:latin typeface="Calibri" pitchFamily="34" charset="0"/>
-                <a:ea typeface="Calibri" pitchFamily="34" charset="-122"/>
-                <a:cs typeface="Calibri" pitchFamily="34" charset="-120"/>
-              </a:rPr>
-              <a:t>تقنية التوصيل</a:t>
-            </a:r>
-            <a:endParaRPr lang="en-US" sz="1200" dirty="0"/>
-          </a:p>
-        </p:txBody>
-      </p:sp>
-      <p:sp>
-        <p:nvSpPr>
-          <p:cNvPr id="18" name="Text 14"/>
-          <p:cNvSpPr/>
-          <p:nvPr/>
-        </p:nvSpPr>
-        <p:spPr>
-          <a:xfrm>
-            <a:off x="4626864" y="3977640"/>
-            <a:ext cx="2834640" cy="1600200"/>
-          </a:xfrm>
-          <a:prstGeom prst="rect">
-            <a:avLst/>
-          </a:prstGeom>
-          <a:noFill/>
-          <a:ln/>
-        </p:spPr>
-        <p:txBody>
-          <a:bodyPr wrap="square" rtlCol="0" anchor="t"/>
-          <a:lstStyle/>
-          <a:p>
-            <a:pPr algn="r" indent="0" marL="0">
-              <a:buNone/>
-            </a:pPr>
-            <a:r>
-              <a:rPr lang="en-US" sz="1200" dirty="0">
-                <a:solidFill>
-                  <a:srgbClr val="6B7280"/>
-                </a:solidFill>
-                <a:latin typeface="Calibri" pitchFamily="34" charset="0"/>
-                <a:ea typeface="Calibri" pitchFamily="34" charset="-122"/>
-                <a:cs typeface="Calibri" pitchFamily="34" charset="-120"/>
-              </a:rPr>
-              <a:t>ربط التطبيق بنظام توصيل خارجي أو شبكة مندوبين مستقلين لتوسيع نطاق التغطية.</a:t>
-            </a:r>
-            <a:endParaRPr lang="en-US" sz="1200" dirty="0"/>
-          </a:p>
-        </p:txBody>
-      </p:sp>
-      <p:sp>
-        <p:nvSpPr>
-          <p:cNvPr id="19" name="Text 15"/>
-          <p:cNvSpPr/>
-          <p:nvPr/>
-        </p:nvSpPr>
-        <p:spPr>
-          <a:xfrm>
-            <a:off x="4041648" y="3566160"/>
-            <a:ext cx="274320" cy="457200"/>
+            <a:off x="4608576" y="4709160"/>
+            <a:ext cx="2871216" cy="1234440"/>
           </a:xfrm>
           <a:prstGeom prst="rect">
             <a:avLst/>
@@ -7931,30 +8606,30 @@
               <a:buNone/>
             </a:pPr>
             <a:r>
-              <a:rPr lang="en-US" sz="2200" b="1" dirty="0">
-                <a:solidFill>
-                  <a:srgbClr val="C7CCE0"/>
-                </a:solidFill>
-                <a:latin typeface="Calibri" pitchFamily="34" charset="0"/>
-                <a:ea typeface="Calibri" pitchFamily="34" charset="-122"/>
-                <a:cs typeface="Calibri" pitchFamily="34" charset="-120"/>
-              </a:rPr>
-              <a:t>‹</a:t>
-            </a:r>
-            <a:endParaRPr lang="en-US" sz="2200" dirty="0"/>
-          </a:p>
-        </p:txBody>
-      </p:sp>
-      <p:sp>
-        <p:nvSpPr>
-          <p:cNvPr id="20" name="Shape 16"/>
-          <p:cNvSpPr/>
-          <p:nvPr/>
-        </p:nvSpPr>
-        <p:spPr>
-          <a:xfrm>
-            <a:off x="640080" y="2057400"/>
-            <a:ext cx="3383280" cy="3657600"/>
+              <a:rPr lang="en-US" sz="1150" dirty="0">
+                <a:solidFill>
+                  <a:srgbClr val="CADCFC"/>
+                </a:solidFill>
+                <a:latin typeface="Calibri" pitchFamily="34" charset="0"/>
+                <a:ea typeface="Calibri" pitchFamily="34" charset="-122"/>
+                <a:cs typeface="Calibri" pitchFamily="34" charset="-120"/>
+              </a:rPr>
+              <a:t>تعاقد مع المطابع بأسعار الجملة، وبيع الخدمة للعميل النهائي بهامش ربح واضح.</a:t>
+            </a:r>
+            <a:endParaRPr lang="en-US" sz="1150" dirty="0"/>
+          </a:p>
+        </p:txBody>
+      </p:sp>
+      <p:sp>
+        <p:nvSpPr>
+          <p:cNvPr id="18" name="Shape 14"/>
+          <p:cNvSpPr/>
+          <p:nvPr/>
+        </p:nvSpPr>
+        <p:spPr>
+          <a:xfrm>
+            <a:off x="8065008" y="1965960"/>
+            <a:ext cx="3383280" cy="4114800"/>
           </a:xfrm>
           <a:prstGeom prst="roundRect">
             <a:avLst>
@@ -7976,14 +8651,14 @@
       </p:sp>
       <p:sp>
         <p:nvSpPr>
-          <p:cNvPr id="21" name="Shape 17"/>
-          <p:cNvSpPr/>
-          <p:nvPr/>
-        </p:nvSpPr>
-        <p:spPr>
-          <a:xfrm>
-            <a:off x="960120" y="2331720"/>
-            <a:ext cx="777240" cy="777240"/>
+          <p:cNvPr id="19" name="Shape 15"/>
+          <p:cNvSpPr/>
+          <p:nvPr/>
+        </p:nvSpPr>
+        <p:spPr>
+          <a:xfrm>
+            <a:off x="9299448" y="2240280"/>
+            <a:ext cx="914400" cy="914400"/>
           </a:xfrm>
           <a:prstGeom prst="ellipse">
             <a:avLst/>
@@ -8003,7 +8678,7 @@
       </p:sp>
       <p:pic>
         <p:nvPicPr>
-          <p:cNvPr id="22" name="Image 2" descr="preencoded.png">    </p:cNvPr>
+          <p:cNvPr id="20" name="Image 2" descr="preencoded.png">    </p:cNvPr>
           <p:cNvPicPr>
             <a:picLocks noChangeAspect="1"/>
           </p:cNvPicPr>
@@ -8017,8 +8692,8 @@
         </p:blipFill>
         <p:spPr>
           <a:xfrm>
-            <a:off x="1154430" y="2526030"/>
-            <a:ext cx="388620" cy="388620"/>
+            <a:off x="9518904" y="2459736"/>
+            <a:ext cx="475488" cy="475488"/>
           </a:xfrm>
           <a:prstGeom prst="rect">
             <a:avLst/>
@@ -8027,14 +8702,92 @@
       </p:pic>
       <p:sp>
         <p:nvSpPr>
+          <p:cNvPr id="21" name="Text 16"/>
+          <p:cNvSpPr/>
+          <p:nvPr/>
+        </p:nvSpPr>
+        <p:spPr>
+          <a:xfrm>
+            <a:off x="8202168" y="3291840"/>
+            <a:ext cx="3108960" cy="365760"/>
+          </a:xfrm>
+          <a:prstGeom prst="rect">
+            <a:avLst/>
+          </a:prstGeom>
+          <a:noFill/>
+          <a:ln/>
+        </p:spPr>
+        <p:txBody>
+          <a:bodyPr wrap="square" rtlCol="0" anchor="ctr"/>
+          <a:lstStyle/>
+          <a:p>
+            <a:pPr algn="ctr" indent="0" marL="0">
+              <a:buNone/>
+            </a:pPr>
+            <a:r>
+              <a:rPr lang="en-US" sz="1600" b="1" dirty="0">
+                <a:solidFill>
+                  <a:srgbClr val="1A1A2E"/>
+                </a:solidFill>
+                <a:latin typeface="Calibri" pitchFamily="34" charset="0"/>
+                <a:ea typeface="Calibri" pitchFamily="34" charset="-122"/>
+                <a:cs typeface="Calibri" pitchFamily="34" charset="-120"/>
+              </a:rPr>
+              <a:t>التوصيل</a:t>
+            </a:r>
+            <a:endParaRPr lang="en-US" sz="1600" dirty="0"/>
+          </a:p>
+        </p:txBody>
+      </p:sp>
+      <p:sp>
+        <p:nvSpPr>
+          <p:cNvPr id="22" name="Text 17"/>
+          <p:cNvSpPr/>
+          <p:nvPr/>
+        </p:nvSpPr>
+        <p:spPr>
+          <a:xfrm>
+            <a:off x="8202168" y="3657600"/>
+            <a:ext cx="3108960" cy="594360"/>
+          </a:xfrm>
+          <a:prstGeom prst="rect">
+            <a:avLst/>
+          </a:prstGeom>
+          <a:noFill/>
+          <a:ln/>
+        </p:spPr>
+        <p:txBody>
+          <a:bodyPr wrap="square" rtlCol="0" anchor="ctr"/>
+          <a:lstStyle/>
+          <a:p>
+            <a:pPr algn="ctr" indent="0" marL="0">
+              <a:buNone/>
+            </a:pPr>
+            <a:r>
+              <a:rPr lang="en-US" sz="3000" b="1" dirty="0">
+                <a:solidFill>
+                  <a:srgbClr val="F96167"/>
+                </a:solidFill>
+                <a:latin typeface="Calibri" pitchFamily="34" charset="0"/>
+                <a:ea typeface="Calibri" pitchFamily="34" charset="-122"/>
+                <a:cs typeface="Calibri" pitchFamily="34" charset="-120"/>
+              </a:rPr>
+              <a:t>رسوم ثابتة</a:t>
+            </a:r>
+            <a:endParaRPr lang="en-US" sz="3000" dirty="0"/>
+          </a:p>
+        </p:txBody>
+      </p:sp>
+      <p:sp>
+        <p:nvSpPr>
           <p:cNvPr id="23" name="Text 18"/>
           <p:cNvSpPr/>
           <p:nvPr/>
         </p:nvSpPr>
         <p:spPr>
           <a:xfrm>
-            <a:off x="3200400" y="2286000"/>
-            <a:ext cx="548640" cy="548640"/>
+            <a:off x="8202168" y="4224528"/>
+            <a:ext cx="3108960" cy="320040"/>
           </a:xfrm>
           <a:prstGeom prst="rect">
             <a:avLst/>
@@ -8050,17 +8803,17 @@
               <a:buNone/>
             </a:pPr>
             <a:r>
-              <a:rPr lang="en-US" sz="2800" b="1" dirty="0">
-                <a:solidFill>
-                  <a:srgbClr val="E2E4EE"/>
-                </a:solidFill>
-                <a:latin typeface="Calibri" pitchFamily="34" charset="0"/>
-                <a:ea typeface="Calibri" pitchFamily="34" charset="-122"/>
-                <a:cs typeface="Calibri" pitchFamily="34" charset="-120"/>
-              </a:rPr>
-              <a:t>3</a:t>
-            </a:r>
-            <a:endParaRPr lang="en-US" sz="2800" dirty="0"/>
+              <a:rPr lang="en-US" sz="1100" dirty="0">
+                <a:solidFill>
+                  <a:srgbClr val="6B7280"/>
+                </a:solidFill>
+                <a:latin typeface="Calibri" pitchFamily="34" charset="0"/>
+                <a:ea typeface="Calibri" pitchFamily="34" charset="-122"/>
+                <a:cs typeface="Calibri" pitchFamily="34" charset="-120"/>
+              </a:rPr>
+              <a:t>أو مدمجة بالسعر</a:t>
+            </a:r>
+            <a:endParaRPr lang="en-US" sz="1100" dirty="0"/>
           </a:p>
         </p:txBody>
       </p:sp>
@@ -8072,118 +8825,40 @@
         </p:nvSpPr>
         <p:spPr>
           <a:xfrm>
-            <a:off x="914400" y="3246120"/>
-            <a:ext cx="2834640" cy="365760"/>
-          </a:xfrm>
-          <a:prstGeom prst="rect">
-            <a:avLst/>
-          </a:prstGeom>
-          <a:noFill/>
-          <a:ln/>
-        </p:spPr>
-        <p:txBody>
-          <a:bodyPr wrap="square" rtlCol="0" anchor="ctr"/>
-          <a:lstStyle/>
-          <a:p>
-            <a:pPr algn="r" indent="0" marL="0">
-              <a:buNone/>
-            </a:pPr>
-            <a:r>
-              <a:rPr lang="en-US" sz="1550" b="1" dirty="0">
-                <a:solidFill>
-                  <a:srgbClr val="1A1A2E"/>
-                </a:solidFill>
-                <a:latin typeface="Calibri" pitchFamily="34" charset="0"/>
-                <a:ea typeface="Calibri" pitchFamily="34" charset="-122"/>
-                <a:cs typeface="Calibri" pitchFamily="34" charset="-120"/>
-              </a:rPr>
-              <a:t>المرحلة الثالثة</a:t>
-            </a:r>
-            <a:endParaRPr lang="en-US" sz="1550" dirty="0"/>
+            <a:off x="8321040" y="4709160"/>
+            <a:ext cx="2871216" cy="1234440"/>
+          </a:xfrm>
+          <a:prstGeom prst="rect">
+            <a:avLst/>
+          </a:prstGeom>
+          <a:noFill/>
+          <a:ln/>
+        </p:spPr>
+        <p:txBody>
+          <a:bodyPr wrap="square" rtlCol="0" anchor="ctr"/>
+          <a:lstStyle/>
+          <a:p>
+            <a:pPr algn="ctr" indent="0" marL="0">
+              <a:buNone/>
+            </a:pPr>
+            <a:r>
+              <a:rPr lang="en-US" sz="1150" dirty="0">
+                <a:solidFill>
+                  <a:srgbClr val="6B7280"/>
+                </a:solidFill>
+                <a:latin typeface="Calibri" pitchFamily="34" charset="0"/>
+                <a:ea typeface="Calibri" pitchFamily="34" charset="-122"/>
+                <a:cs typeface="Calibri" pitchFamily="34" charset="-120"/>
+              </a:rPr>
+              <a:t>خصم تفاوضي مع شركات الشحن، أو دمج تكلفة التوصيل داخل سعر المنتج.</a:t>
+            </a:r>
+            <a:endParaRPr lang="en-US" sz="1150" dirty="0"/>
           </a:p>
         </p:txBody>
       </p:sp>
       <p:sp>
         <p:nvSpPr>
           <p:cNvPr id="25" name="Text 20"/>
-          <p:cNvSpPr/>
-          <p:nvPr/>
-        </p:nvSpPr>
-        <p:spPr>
-          <a:xfrm>
-            <a:off x="914400" y="3611880"/>
-            <a:ext cx="2834640" cy="320040"/>
-          </a:xfrm>
-          <a:prstGeom prst="rect">
-            <a:avLst/>
-          </a:prstGeom>
-          <a:noFill/>
-          <a:ln/>
-        </p:spPr>
-        <p:txBody>
-          <a:bodyPr wrap="square" rtlCol="0" anchor="ctr"/>
-          <a:lstStyle/>
-          <a:p>
-            <a:pPr algn="r" indent="0" marL="0">
-              <a:buNone/>
-            </a:pPr>
-            <a:r>
-              <a:rPr lang="en-US" sz="1200" b="1" dirty="0">
-                <a:solidFill>
-                  <a:srgbClr val="F96167"/>
-                </a:solidFill>
-                <a:latin typeface="Calibri" pitchFamily="34" charset="0"/>
-                <a:ea typeface="Calibri" pitchFamily="34" charset="-122"/>
-                <a:cs typeface="Calibri" pitchFamily="34" charset="-120"/>
-              </a:rPr>
-              <a:t>توسيع السوق</a:t>
-            </a:r>
-            <a:endParaRPr lang="en-US" sz="1200" dirty="0"/>
-          </a:p>
-        </p:txBody>
-      </p:sp>
-      <p:sp>
-        <p:nvSpPr>
-          <p:cNvPr id="26" name="Text 21"/>
-          <p:cNvSpPr/>
-          <p:nvPr/>
-        </p:nvSpPr>
-        <p:spPr>
-          <a:xfrm>
-            <a:off x="914400" y="3977640"/>
-            <a:ext cx="2834640" cy="1600200"/>
-          </a:xfrm>
-          <a:prstGeom prst="rect">
-            <a:avLst/>
-          </a:prstGeom>
-          <a:noFill/>
-          <a:ln/>
-        </p:spPr>
-        <p:txBody>
-          <a:bodyPr wrap="square" rtlCol="0" anchor="t"/>
-          <a:lstStyle/>
-          <a:p>
-            <a:pPr algn="r" indent="0" marL="0">
-              <a:buNone/>
-            </a:pPr>
-            <a:r>
-              <a:rPr lang="en-US" sz="1200" dirty="0">
-                <a:solidFill>
-                  <a:srgbClr val="6B7280"/>
-                </a:solidFill>
-                <a:latin typeface="Calibri" pitchFamily="34" charset="0"/>
-                <a:ea typeface="Calibri" pitchFamily="34" charset="-122"/>
-                <a:cs typeface="Calibri" pitchFamily="34" charset="-120"/>
-              </a:rPr>
-              <a:t>فتح باب التسجيل لما لا يقل عن 100 مطبعة ووكالة، وتفعيل نظام المنافسات بين مقدمي الخدمة.</a:t>
-            </a:r>
-            <a:endParaRPr lang="en-US" sz="1200" dirty="0"/>
-          </a:p>
-        </p:txBody>
-      </p:sp>
-      <p:sp>
-        <p:nvSpPr>
-          <p:cNvPr id="27" name="Text 22"/>
           <p:cNvSpPr/>
           <p:nvPr/>
         </p:nvSpPr>
@@ -8234,7 +8909,7 @@
     <p:bg>
       <p:bgPr>
         <a:solidFill>
-          <a:srgbClr val="1F2A5E"/>
+          <a:srgbClr val="FFFFFF"/>
         </a:solidFill>
       </p:bgPr>
     </p:bg>
@@ -8279,13 +8954,13 @@
             <a:r>
               <a:rPr lang="en-US" sz="1400" b="1" spc="100" kern="0" dirty="0">
                 <a:solidFill>
-                  <a:srgbClr val="F9E795"/>
-                </a:solidFill>
-                <a:latin typeface="Calibri" pitchFamily="34" charset="0"/>
-                <a:ea typeface="Calibri" pitchFamily="34" charset="-122"/>
-                <a:cs typeface="Calibri" pitchFamily="34" charset="-120"/>
-              </a:rPr>
-              <a:t>لماذا ننجح</a:t>
+                  <a:srgbClr val="F96167"/>
+                </a:solidFill>
+                <a:latin typeface="Calibri" pitchFamily="34" charset="0"/>
+                <a:ea typeface="Calibri" pitchFamily="34" charset="-122"/>
+                <a:cs typeface="Calibri" pitchFamily="34" charset="-120"/>
+              </a:rPr>
+              <a:t>Roadmap</a:t>
             </a:r>
             <a:endParaRPr lang="en-US" sz="1400" dirty="0"/>
           </a:p>
@@ -8316,17 +8991,17 @@
               <a:buNone/>
             </a:pPr>
             <a:r>
-              <a:rPr lang="en-US" sz="3200" b="1" dirty="0">
-                <a:solidFill>
-                  <a:srgbClr val="FFFFFF"/>
-                </a:solidFill>
-                <a:latin typeface="Calibri" pitchFamily="34" charset="0"/>
-                <a:ea typeface="Calibri" pitchFamily="34" charset="-122"/>
-                <a:cs typeface="Calibri" pitchFamily="34" charset="-120"/>
-              </a:rPr>
-              <a:t>القيمة الاستثمارية</a:t>
-            </a:r>
-            <a:endParaRPr lang="en-US" sz="3200" dirty="0"/>
+              <a:rPr lang="en-US" sz="3400" b="1" dirty="0">
+                <a:solidFill>
+                  <a:srgbClr val="1A1A2E"/>
+                </a:solidFill>
+                <a:latin typeface="Calibri" pitchFamily="34" charset="0"/>
+                <a:ea typeface="Calibri" pitchFamily="34" charset="-122"/>
+                <a:cs typeface="Calibri" pitchFamily="34" charset="-120"/>
+              </a:rPr>
+              <a:t>خطة التنفيذ التدريجي</a:t>
+            </a:r>
+            <a:endParaRPr lang="en-US" sz="3400" dirty="0"/>
           </a:p>
         </p:txBody>
       </p:sp>
@@ -8338,8 +9013,8 @@
         </p:nvSpPr>
         <p:spPr>
           <a:xfrm>
-            <a:off x="640080" y="2286000"/>
-            <a:ext cx="3383280" cy="3383280"/>
+            <a:off x="8065008" y="2057400"/>
+            <a:ext cx="3383280" cy="3657600"/>
           </a:xfrm>
           <a:prstGeom prst="roundRect">
             <a:avLst>
@@ -8347,7 +9022,7 @@
             </a:avLst>
           </a:prstGeom>
           <a:solidFill>
-            <a:srgbClr val="161E48"/>
+            <a:srgbClr val="F5F6FA"/>
           </a:solidFill>
           <a:ln/>
           <a:effectLst>
@@ -8367,14 +9042,14 @@
         </p:nvSpPr>
         <p:spPr>
           <a:xfrm>
-            <a:off x="1851660" y="2606040"/>
-            <a:ext cx="960120" cy="960120"/>
+            <a:off x="8385048" y="2331720"/>
+            <a:ext cx="777240" cy="777240"/>
           </a:xfrm>
           <a:prstGeom prst="ellipse">
             <a:avLst/>
           </a:prstGeom>
           <a:solidFill>
-            <a:srgbClr val="F96167"/>
+            <a:srgbClr val="1F2A5E"/>
           </a:solidFill>
           <a:ln/>
           <a:effectLst>
@@ -8402,8 +9077,8 @@
         </p:blipFill>
         <p:spPr>
           <a:xfrm>
-            <a:off x="2091690" y="2846070"/>
-            <a:ext cx="480060" cy="480060"/>
+            <a:off x="8579358" y="2526030"/>
+            <a:ext cx="388620" cy="388620"/>
           </a:xfrm>
           <a:prstGeom prst="rect">
             <a:avLst/>
@@ -8418,8 +9093,8 @@
         </p:nvSpPr>
         <p:spPr>
           <a:xfrm>
-            <a:off x="822960" y="3794760"/>
-            <a:ext cx="3017520" cy="457200"/>
+            <a:off x="10625328" y="2286000"/>
+            <a:ext cx="548640" cy="548640"/>
           </a:xfrm>
           <a:prstGeom prst="rect">
             <a:avLst/>
@@ -8435,17 +9110,17 @@
               <a:buNone/>
             </a:pPr>
             <a:r>
-              <a:rPr lang="en-US" sz="1650" b="1" dirty="0">
-                <a:solidFill>
-                  <a:srgbClr val="FFFFFF"/>
-                </a:solidFill>
-                <a:latin typeface="Calibri" pitchFamily="34" charset="0"/>
-                <a:ea typeface="Calibri" pitchFamily="34" charset="-122"/>
-                <a:cs typeface="Calibri" pitchFamily="34" charset="-120"/>
-              </a:rPr>
-              <a:t>3 مصادر دخل</a:t>
-            </a:r>
-            <a:endParaRPr lang="en-US" sz="1650" dirty="0"/>
+              <a:rPr lang="en-US" sz="2800" b="1" dirty="0">
+                <a:solidFill>
+                  <a:srgbClr val="E2E4EE"/>
+                </a:solidFill>
+                <a:latin typeface="Calibri" pitchFamily="34" charset="0"/>
+                <a:ea typeface="Calibri" pitchFamily="34" charset="-122"/>
+                <a:cs typeface="Calibri" pitchFamily="34" charset="-120"/>
+              </a:rPr>
+              <a:t>1</a:t>
+            </a:r>
+            <a:endParaRPr lang="en-US" sz="2800" dirty="0"/>
           </a:p>
         </p:txBody>
       </p:sp>
@@ -8457,8 +9132,125 @@
         </p:nvSpPr>
         <p:spPr>
           <a:xfrm>
-            <a:off x="914400" y="4315968"/>
-            <a:ext cx="2834640" cy="1188720"/>
+            <a:off x="8339328" y="3246120"/>
+            <a:ext cx="2834640" cy="365760"/>
+          </a:xfrm>
+          <a:prstGeom prst="rect">
+            <a:avLst/>
+          </a:prstGeom>
+          <a:noFill/>
+          <a:ln/>
+        </p:spPr>
+        <p:txBody>
+          <a:bodyPr wrap="square" rtlCol="0" anchor="ctr"/>
+          <a:lstStyle/>
+          <a:p>
+            <a:pPr algn="r" indent="0" marL="0">
+              <a:buNone/>
+            </a:pPr>
+            <a:r>
+              <a:rPr lang="en-US" sz="1550" b="1" dirty="0">
+                <a:solidFill>
+                  <a:srgbClr val="1A1A2E"/>
+                </a:solidFill>
+                <a:latin typeface="Calibri" pitchFamily="34" charset="0"/>
+                <a:ea typeface="Calibri" pitchFamily="34" charset="-122"/>
+                <a:cs typeface="Calibri" pitchFamily="34" charset="-120"/>
+              </a:rPr>
+              <a:t>المرحلة الأولى</a:t>
+            </a:r>
+            <a:endParaRPr lang="en-US" sz="1550" dirty="0"/>
+          </a:p>
+        </p:txBody>
+      </p:sp>
+      <p:sp>
+        <p:nvSpPr>
+          <p:cNvPr id="9" name="Text 6"/>
+          <p:cNvSpPr/>
+          <p:nvPr/>
+        </p:nvSpPr>
+        <p:spPr>
+          <a:xfrm>
+            <a:off x="8339328" y="3611880"/>
+            <a:ext cx="2834640" cy="320040"/>
+          </a:xfrm>
+          <a:prstGeom prst="rect">
+            <a:avLst/>
+          </a:prstGeom>
+          <a:noFill/>
+          <a:ln/>
+        </p:spPr>
+        <p:txBody>
+          <a:bodyPr wrap="square" rtlCol="0" anchor="ctr"/>
+          <a:lstStyle/>
+          <a:p>
+            <a:pPr algn="r" indent="0" marL="0">
+              <a:buNone/>
+            </a:pPr>
+            <a:r>
+              <a:rPr lang="en-US" sz="1200" b="1" dirty="0">
+                <a:solidFill>
+                  <a:srgbClr val="F96167"/>
+                </a:solidFill>
+                <a:latin typeface="Calibri" pitchFamily="34" charset="0"/>
+                <a:ea typeface="Calibri" pitchFamily="34" charset="-122"/>
+                <a:cs typeface="Calibri" pitchFamily="34" charset="-120"/>
+              </a:rPr>
+              <a:t>اختبار التشغيل</a:t>
+            </a:r>
+            <a:endParaRPr lang="en-US" sz="1200" dirty="0"/>
+          </a:p>
+        </p:txBody>
+      </p:sp>
+      <p:sp>
+        <p:nvSpPr>
+          <p:cNvPr id="10" name="Text 7"/>
+          <p:cNvSpPr/>
+          <p:nvPr/>
+        </p:nvSpPr>
+        <p:spPr>
+          <a:xfrm>
+            <a:off x="8339328" y="3977640"/>
+            <a:ext cx="2834640" cy="1600200"/>
+          </a:xfrm>
+          <a:prstGeom prst="rect">
+            <a:avLst/>
+          </a:prstGeom>
+          <a:noFill/>
+          <a:ln/>
+        </p:spPr>
+        <p:txBody>
+          <a:bodyPr wrap="square" rtlCol="0" anchor="t"/>
+          <a:lstStyle/>
+          <a:p>
+            <a:pPr algn="r" indent="0" marL="0">
+              <a:buNone/>
+            </a:pPr>
+            <a:r>
+              <a:rPr lang="en-US" sz="1200" dirty="0">
+                <a:solidFill>
+                  <a:srgbClr val="6B7280"/>
+                </a:solidFill>
+                <a:latin typeface="Calibri" pitchFamily="34" charset="0"/>
+                <a:ea typeface="Calibri" pitchFamily="34" charset="-122"/>
+                <a:cs typeface="Calibri" pitchFamily="34" charset="-120"/>
+              </a:rPr>
+              <a:t>التعاقد مع 3 مطابع ووكالة إعلانية واحدة، وتجربة رحلة العميل كاملة (توليد + طباعة + توصيل) لقياس الجودة والسرعة.</a:t>
+            </a:r>
+            <a:endParaRPr lang="en-US" sz="1200" dirty="0"/>
+          </a:p>
+        </p:txBody>
+      </p:sp>
+      <p:sp>
+        <p:nvSpPr>
+          <p:cNvPr id="11" name="Text 8"/>
+          <p:cNvSpPr/>
+          <p:nvPr/>
+        </p:nvSpPr>
+        <p:spPr>
+          <a:xfrm>
+            <a:off x="7754112" y="3566160"/>
+            <a:ext cx="274320" cy="457200"/>
           </a:xfrm>
           <a:prstGeom prst="rect">
             <a:avLst/>
@@ -8474,30 +9266,30 @@
               <a:buNone/>
             </a:pPr>
             <a:r>
-              <a:rPr lang="en-US" sz="1200" dirty="0">
-                <a:solidFill>
-                  <a:srgbClr val="CADCFC"/>
-                </a:solidFill>
-                <a:latin typeface="Calibri" pitchFamily="34" charset="0"/>
-                <a:ea typeface="Calibri" pitchFamily="34" charset="-122"/>
-                <a:cs typeface="Calibri" pitchFamily="34" charset="-120"/>
-              </a:rPr>
-              <a:t>متكررة من عملية واحدة: توليد الإعلان، عمولة الطباعة، وخدمة التوصيل</a:t>
-            </a:r>
-            <a:endParaRPr lang="en-US" sz="1200" dirty="0"/>
-          </a:p>
-        </p:txBody>
-      </p:sp>
-      <p:sp>
-        <p:nvSpPr>
-          <p:cNvPr id="9" name="Shape 6"/>
-          <p:cNvSpPr/>
-          <p:nvPr/>
-        </p:nvSpPr>
-        <p:spPr>
-          <a:xfrm>
-            <a:off x="4352544" y="2286000"/>
-            <a:ext cx="3383280" cy="3383280"/>
+              <a:rPr lang="en-US" sz="2200" b="1" dirty="0">
+                <a:solidFill>
+                  <a:srgbClr val="C7CCE0"/>
+                </a:solidFill>
+                <a:latin typeface="Calibri" pitchFamily="34" charset="0"/>
+                <a:ea typeface="Calibri" pitchFamily="34" charset="-122"/>
+                <a:cs typeface="Calibri" pitchFamily="34" charset="-120"/>
+              </a:rPr>
+              <a:t>‹</a:t>
+            </a:r>
+            <a:endParaRPr lang="en-US" sz="2200" dirty="0"/>
+          </a:p>
+        </p:txBody>
+      </p:sp>
+      <p:sp>
+        <p:nvSpPr>
+          <p:cNvPr id="12" name="Shape 9"/>
+          <p:cNvSpPr/>
+          <p:nvPr/>
+        </p:nvSpPr>
+        <p:spPr>
+          <a:xfrm>
+            <a:off x="4352544" y="2057400"/>
+            <a:ext cx="3383280" cy="3657600"/>
           </a:xfrm>
           <a:prstGeom prst="roundRect">
             <a:avLst>
@@ -8505,7 +9297,7 @@
             </a:avLst>
           </a:prstGeom>
           <a:solidFill>
-            <a:srgbClr val="161E48"/>
+            <a:srgbClr val="F5F6FA"/>
           </a:solidFill>
           <a:ln/>
           <a:effectLst>
@@ -8519,20 +9311,20 @@
       </p:sp>
       <p:sp>
         <p:nvSpPr>
-          <p:cNvPr id="10" name="Shape 7"/>
-          <p:cNvSpPr/>
-          <p:nvPr/>
-        </p:nvSpPr>
-        <p:spPr>
-          <a:xfrm>
-            <a:off x="5564124" y="2606040"/>
-            <a:ext cx="960120" cy="960120"/>
+          <p:cNvPr id="13" name="Shape 10"/>
+          <p:cNvSpPr/>
+          <p:nvPr/>
+        </p:nvSpPr>
+        <p:spPr>
+          <a:xfrm>
+            <a:off x="4672584" y="2331720"/>
+            <a:ext cx="777240" cy="777240"/>
           </a:xfrm>
           <a:prstGeom prst="ellipse">
             <a:avLst/>
           </a:prstGeom>
           <a:solidFill>
-            <a:srgbClr val="F96167"/>
+            <a:srgbClr val="1F2A5E"/>
           </a:solidFill>
           <a:ln/>
           <a:effectLst>
@@ -8546,7 +9338,7 @@
       </p:sp>
       <p:pic>
         <p:nvPicPr>
-          <p:cNvPr id="11" name="Image 1" descr="preencoded.png">    </p:cNvPr>
+          <p:cNvPr id="14" name="Image 1" descr="preencoded.png">    </p:cNvPr>
           <p:cNvPicPr>
             <a:picLocks noChangeAspect="1"/>
           </p:cNvPicPr>
@@ -8560,8 +9352,8 @@
         </p:blipFill>
         <p:spPr>
           <a:xfrm>
-            <a:off x="5804154" y="2846070"/>
-            <a:ext cx="480060" cy="480060"/>
+            <a:off x="4866894" y="2526030"/>
+            <a:ext cx="388620" cy="388620"/>
           </a:xfrm>
           <a:prstGeom prst="rect">
             <a:avLst/>
@@ -8570,14 +9362,14 @@
       </p:pic>
       <p:sp>
         <p:nvSpPr>
-          <p:cNvPr id="12" name="Text 8"/>
-          <p:cNvSpPr/>
-          <p:nvPr/>
-        </p:nvSpPr>
-        <p:spPr>
-          <a:xfrm>
-            <a:off x="4535424" y="3794760"/>
-            <a:ext cx="3017520" cy="457200"/>
+          <p:cNvPr id="15" name="Text 11"/>
+          <p:cNvSpPr/>
+          <p:nvPr/>
+        </p:nvSpPr>
+        <p:spPr>
+          <a:xfrm>
+            <a:off x="6912864" y="2286000"/>
+            <a:ext cx="548640" cy="548640"/>
           </a:xfrm>
           <a:prstGeom prst="rect">
             <a:avLst/>
@@ -8593,30 +9385,147 @@
               <a:buNone/>
             </a:pPr>
             <a:r>
-              <a:rPr lang="en-US" sz="1650" b="1" dirty="0">
-                <a:solidFill>
-                  <a:srgbClr val="FFFFFF"/>
-                </a:solidFill>
-                <a:latin typeface="Calibri" pitchFamily="34" charset="0"/>
-                <a:ea typeface="Calibri" pitchFamily="34" charset="-122"/>
-                <a:cs typeface="Calibri" pitchFamily="34" charset="-120"/>
-              </a:rPr>
-              <a:t>نموذج وسيط</a:t>
-            </a:r>
-            <a:endParaRPr lang="en-US" sz="1650" dirty="0"/>
-          </a:p>
-        </p:txBody>
-      </p:sp>
-      <p:sp>
-        <p:nvSpPr>
-          <p:cNvPr id="13" name="Text 9"/>
-          <p:cNvSpPr/>
-          <p:nvPr/>
-        </p:nvSpPr>
-        <p:spPr>
-          <a:xfrm>
-            <a:off x="4626864" y="4315968"/>
-            <a:ext cx="2834640" cy="1188720"/>
+              <a:rPr lang="en-US" sz="2800" b="1" dirty="0">
+                <a:solidFill>
+                  <a:srgbClr val="E2E4EE"/>
+                </a:solidFill>
+                <a:latin typeface="Calibri" pitchFamily="34" charset="0"/>
+                <a:ea typeface="Calibri" pitchFamily="34" charset="-122"/>
+                <a:cs typeface="Calibri" pitchFamily="34" charset="-120"/>
+              </a:rPr>
+              <a:t>2</a:t>
+            </a:r>
+            <a:endParaRPr lang="en-US" sz="2800" dirty="0"/>
+          </a:p>
+        </p:txBody>
+      </p:sp>
+      <p:sp>
+        <p:nvSpPr>
+          <p:cNvPr id="16" name="Text 12"/>
+          <p:cNvSpPr/>
+          <p:nvPr/>
+        </p:nvSpPr>
+        <p:spPr>
+          <a:xfrm>
+            <a:off x="4626864" y="3246120"/>
+            <a:ext cx="2834640" cy="365760"/>
+          </a:xfrm>
+          <a:prstGeom prst="rect">
+            <a:avLst/>
+          </a:prstGeom>
+          <a:noFill/>
+          <a:ln/>
+        </p:spPr>
+        <p:txBody>
+          <a:bodyPr wrap="square" rtlCol="0" anchor="ctr"/>
+          <a:lstStyle/>
+          <a:p>
+            <a:pPr algn="r" indent="0" marL="0">
+              <a:buNone/>
+            </a:pPr>
+            <a:r>
+              <a:rPr lang="en-US" sz="1550" b="1" dirty="0">
+                <a:solidFill>
+                  <a:srgbClr val="1A1A2E"/>
+                </a:solidFill>
+                <a:latin typeface="Calibri" pitchFamily="34" charset="0"/>
+                <a:ea typeface="Calibri" pitchFamily="34" charset="-122"/>
+                <a:cs typeface="Calibri" pitchFamily="34" charset="-120"/>
+              </a:rPr>
+              <a:t>المرحلة الثانية</a:t>
+            </a:r>
+            <a:endParaRPr lang="en-US" sz="1550" dirty="0"/>
+          </a:p>
+        </p:txBody>
+      </p:sp>
+      <p:sp>
+        <p:nvSpPr>
+          <p:cNvPr id="17" name="Text 13"/>
+          <p:cNvSpPr/>
+          <p:nvPr/>
+        </p:nvSpPr>
+        <p:spPr>
+          <a:xfrm>
+            <a:off x="4626864" y="3611880"/>
+            <a:ext cx="2834640" cy="320040"/>
+          </a:xfrm>
+          <a:prstGeom prst="rect">
+            <a:avLst/>
+          </a:prstGeom>
+          <a:noFill/>
+          <a:ln/>
+        </p:spPr>
+        <p:txBody>
+          <a:bodyPr wrap="square" rtlCol="0" anchor="ctr"/>
+          <a:lstStyle/>
+          <a:p>
+            <a:pPr algn="r" indent="0" marL="0">
+              <a:buNone/>
+            </a:pPr>
+            <a:r>
+              <a:rPr lang="en-US" sz="1200" b="1" dirty="0">
+                <a:solidFill>
+                  <a:srgbClr val="F96167"/>
+                </a:solidFill>
+                <a:latin typeface="Calibri" pitchFamily="34" charset="0"/>
+                <a:ea typeface="Calibri" pitchFamily="34" charset="-122"/>
+                <a:cs typeface="Calibri" pitchFamily="34" charset="-120"/>
+              </a:rPr>
+              <a:t>تقنية التوصيل</a:t>
+            </a:r>
+            <a:endParaRPr lang="en-US" sz="1200" dirty="0"/>
+          </a:p>
+        </p:txBody>
+      </p:sp>
+      <p:sp>
+        <p:nvSpPr>
+          <p:cNvPr id="18" name="Text 14"/>
+          <p:cNvSpPr/>
+          <p:nvPr/>
+        </p:nvSpPr>
+        <p:spPr>
+          <a:xfrm>
+            <a:off x="4626864" y="3977640"/>
+            <a:ext cx="2834640" cy="1600200"/>
+          </a:xfrm>
+          <a:prstGeom prst="rect">
+            <a:avLst/>
+          </a:prstGeom>
+          <a:noFill/>
+          <a:ln/>
+        </p:spPr>
+        <p:txBody>
+          <a:bodyPr wrap="square" rtlCol="0" anchor="t"/>
+          <a:lstStyle/>
+          <a:p>
+            <a:pPr algn="r" indent="0" marL="0">
+              <a:buNone/>
+            </a:pPr>
+            <a:r>
+              <a:rPr lang="en-US" sz="1200" dirty="0">
+                <a:solidFill>
+                  <a:srgbClr val="6B7280"/>
+                </a:solidFill>
+                <a:latin typeface="Calibri" pitchFamily="34" charset="0"/>
+                <a:ea typeface="Calibri" pitchFamily="34" charset="-122"/>
+                <a:cs typeface="Calibri" pitchFamily="34" charset="-120"/>
+              </a:rPr>
+              <a:t>ربط التطبيق بنظام توصيل خارجي أو شبكة مندوبين مستقلين لتوسيع نطاق التغطية.</a:t>
+            </a:r>
+            <a:endParaRPr lang="en-US" sz="1200" dirty="0"/>
+          </a:p>
+        </p:txBody>
+      </p:sp>
+      <p:sp>
+        <p:nvSpPr>
+          <p:cNvPr id="19" name="Text 15"/>
+          <p:cNvSpPr/>
+          <p:nvPr/>
+        </p:nvSpPr>
+        <p:spPr>
+          <a:xfrm>
+            <a:off x="4041648" y="3566160"/>
+            <a:ext cx="274320" cy="457200"/>
           </a:xfrm>
           <a:prstGeom prst="rect">
             <a:avLst/>
@@ -8632,30 +9541,30 @@
               <a:buNone/>
             </a:pPr>
             <a:r>
-              <a:rPr lang="en-US" sz="1200" dirty="0">
-                <a:solidFill>
-                  <a:srgbClr val="CADCFC"/>
-                </a:solidFill>
-                <a:latin typeface="Calibri" pitchFamily="34" charset="0"/>
-                <a:ea typeface="Calibri" pitchFamily="34" charset="-122"/>
-                <a:cs typeface="Calibri" pitchFamily="34" charset="-120"/>
-              </a:rPr>
-              <a:t>بلا مخزون ولا مصانع مملوكة — المنصة تُشغّل شبكة شركاء قائمة</a:t>
-            </a:r>
-            <a:endParaRPr lang="en-US" sz="1200" dirty="0"/>
-          </a:p>
-        </p:txBody>
-      </p:sp>
-      <p:sp>
-        <p:nvSpPr>
-          <p:cNvPr id="14" name="Shape 10"/>
-          <p:cNvSpPr/>
-          <p:nvPr/>
-        </p:nvSpPr>
-        <p:spPr>
-          <a:xfrm>
-            <a:off x="8065008" y="2286000"/>
-            <a:ext cx="3383280" cy="3383280"/>
+              <a:rPr lang="en-US" sz="2200" b="1" dirty="0">
+                <a:solidFill>
+                  <a:srgbClr val="C7CCE0"/>
+                </a:solidFill>
+                <a:latin typeface="Calibri" pitchFamily="34" charset="0"/>
+                <a:ea typeface="Calibri" pitchFamily="34" charset="-122"/>
+                <a:cs typeface="Calibri" pitchFamily="34" charset="-120"/>
+              </a:rPr>
+              <a:t>‹</a:t>
+            </a:r>
+            <a:endParaRPr lang="en-US" sz="2200" dirty="0"/>
+          </a:p>
+        </p:txBody>
+      </p:sp>
+      <p:sp>
+        <p:nvSpPr>
+          <p:cNvPr id="20" name="Shape 16"/>
+          <p:cNvSpPr/>
+          <p:nvPr/>
+        </p:nvSpPr>
+        <p:spPr>
+          <a:xfrm>
+            <a:off x="640080" y="2057400"/>
+            <a:ext cx="3383280" cy="3657600"/>
           </a:xfrm>
           <a:prstGeom prst="roundRect">
             <a:avLst>
@@ -8663,7 +9572,7 @@
             </a:avLst>
           </a:prstGeom>
           <a:solidFill>
-            <a:srgbClr val="161E48"/>
+            <a:srgbClr val="F5F6FA"/>
           </a:solidFill>
           <a:ln/>
           <a:effectLst>
@@ -8677,20 +9586,20 @@
       </p:sp>
       <p:sp>
         <p:nvSpPr>
-          <p:cNvPr id="15" name="Shape 11"/>
-          <p:cNvSpPr/>
-          <p:nvPr/>
-        </p:nvSpPr>
-        <p:spPr>
-          <a:xfrm>
-            <a:off x="9276588" y="2606040"/>
-            <a:ext cx="960120" cy="960120"/>
+          <p:cNvPr id="21" name="Shape 17"/>
+          <p:cNvSpPr/>
+          <p:nvPr/>
+        </p:nvSpPr>
+        <p:spPr>
+          <a:xfrm>
+            <a:off x="960120" y="2331720"/>
+            <a:ext cx="777240" cy="777240"/>
           </a:xfrm>
           <a:prstGeom prst="ellipse">
             <a:avLst/>
           </a:prstGeom>
           <a:solidFill>
-            <a:srgbClr val="F96167"/>
+            <a:srgbClr val="1F2A5E"/>
           </a:solidFill>
           <a:ln/>
           <a:effectLst>
@@ -8704,7 +9613,7 @@
       </p:sp>
       <p:pic>
         <p:nvPicPr>
-          <p:cNvPr id="16" name="Image 2" descr="preencoded.png">    </p:cNvPr>
+          <p:cNvPr id="22" name="Image 2" descr="preencoded.png">    </p:cNvPr>
           <p:cNvPicPr>
             <a:picLocks noChangeAspect="1"/>
           </p:cNvPicPr>
@@ -8718,8 +9627,8 @@
         </p:blipFill>
         <p:spPr>
           <a:xfrm>
-            <a:off x="9516618" y="2846070"/>
-            <a:ext cx="480060" cy="480060"/>
+            <a:off x="1154430" y="2526030"/>
+            <a:ext cx="388620" cy="388620"/>
           </a:xfrm>
           <a:prstGeom prst="rect">
             <a:avLst/>
@@ -8728,14 +9637,14 @@
       </p:pic>
       <p:sp>
         <p:nvSpPr>
-          <p:cNvPr id="17" name="Text 12"/>
-          <p:cNvSpPr/>
-          <p:nvPr/>
-        </p:nvSpPr>
-        <p:spPr>
-          <a:xfrm>
-            <a:off x="8247888" y="3794760"/>
-            <a:ext cx="3017520" cy="457200"/>
+          <p:cNvPr id="23" name="Text 18"/>
+          <p:cNvSpPr/>
+          <p:nvPr/>
+        </p:nvSpPr>
+        <p:spPr>
+          <a:xfrm>
+            <a:off x="3200400" y="2286000"/>
+            <a:ext cx="548640" cy="548640"/>
           </a:xfrm>
           <a:prstGeom prst="rect">
             <a:avLst/>
@@ -8751,54 +9660,132 @@
               <a:buNone/>
             </a:pPr>
             <a:r>
-              <a:rPr lang="en-US" sz="1650" b="1" dirty="0">
-                <a:solidFill>
-                  <a:srgbClr val="FFFFFF"/>
-                </a:solidFill>
-                <a:latin typeface="Calibri" pitchFamily="34" charset="0"/>
-                <a:ea typeface="Calibri" pitchFamily="34" charset="-122"/>
-                <a:cs typeface="Calibri" pitchFamily="34" charset="-120"/>
-              </a:rPr>
-              <a:t>حل متكامل</a:t>
-            </a:r>
-            <a:endParaRPr lang="en-US" sz="1650" dirty="0"/>
-          </a:p>
-        </p:txBody>
-      </p:sp>
-      <p:sp>
-        <p:nvSpPr>
-          <p:cNvPr id="18" name="Text 13"/>
-          <p:cNvSpPr/>
-          <p:nvPr/>
-        </p:nvSpPr>
-        <p:spPr>
-          <a:xfrm>
-            <a:off x="8339328" y="4315968"/>
-            <a:ext cx="2834640" cy="1188720"/>
-          </a:xfrm>
-          <a:prstGeom prst="rect">
-            <a:avLst/>
-          </a:prstGeom>
-          <a:noFill/>
-          <a:ln/>
-        </p:spPr>
-        <p:txBody>
-          <a:bodyPr wrap="square" rtlCol="0" anchor="ctr"/>
-          <a:lstStyle/>
-          <a:p>
-            <a:pPr algn="ctr" indent="0" marL="0">
+              <a:rPr lang="en-US" sz="2800" b="1" dirty="0">
+                <a:solidFill>
+                  <a:srgbClr val="E2E4EE"/>
+                </a:solidFill>
+                <a:latin typeface="Calibri" pitchFamily="34" charset="0"/>
+                <a:ea typeface="Calibri" pitchFamily="34" charset="-122"/>
+                <a:cs typeface="Calibri" pitchFamily="34" charset="-120"/>
+              </a:rPr>
+              <a:t>3</a:t>
+            </a:r>
+            <a:endParaRPr lang="en-US" sz="2800" dirty="0"/>
+          </a:p>
+        </p:txBody>
+      </p:sp>
+      <p:sp>
+        <p:nvSpPr>
+          <p:cNvPr id="24" name="Text 19"/>
+          <p:cNvSpPr/>
+          <p:nvPr/>
+        </p:nvSpPr>
+        <p:spPr>
+          <a:xfrm>
+            <a:off x="914400" y="3246120"/>
+            <a:ext cx="2834640" cy="365760"/>
+          </a:xfrm>
+          <a:prstGeom prst="rect">
+            <a:avLst/>
+          </a:prstGeom>
+          <a:noFill/>
+          <a:ln/>
+        </p:spPr>
+        <p:txBody>
+          <a:bodyPr wrap="square" rtlCol="0" anchor="ctr"/>
+          <a:lstStyle/>
+          <a:p>
+            <a:pPr algn="r" indent="0" marL="0">
+              <a:buNone/>
+            </a:pPr>
+            <a:r>
+              <a:rPr lang="en-US" sz="1550" b="1" dirty="0">
+                <a:solidFill>
+                  <a:srgbClr val="1A1A2E"/>
+                </a:solidFill>
+                <a:latin typeface="Calibri" pitchFamily="34" charset="0"/>
+                <a:ea typeface="Calibri" pitchFamily="34" charset="-122"/>
+                <a:cs typeface="Calibri" pitchFamily="34" charset="-120"/>
+              </a:rPr>
+              <a:t>المرحلة الثالثة</a:t>
+            </a:r>
+            <a:endParaRPr lang="en-US" sz="1550" dirty="0"/>
+          </a:p>
+        </p:txBody>
+      </p:sp>
+      <p:sp>
+        <p:nvSpPr>
+          <p:cNvPr id="25" name="Text 20"/>
+          <p:cNvSpPr/>
+          <p:nvPr/>
+        </p:nvSpPr>
+        <p:spPr>
+          <a:xfrm>
+            <a:off x="914400" y="3611880"/>
+            <a:ext cx="2834640" cy="320040"/>
+          </a:xfrm>
+          <a:prstGeom prst="rect">
+            <a:avLst/>
+          </a:prstGeom>
+          <a:noFill/>
+          <a:ln/>
+        </p:spPr>
+        <p:txBody>
+          <a:bodyPr wrap="square" rtlCol="0" anchor="ctr"/>
+          <a:lstStyle/>
+          <a:p>
+            <a:pPr algn="r" indent="0" marL="0">
+              <a:buNone/>
+            </a:pPr>
+            <a:r>
+              <a:rPr lang="en-US" sz="1200" b="1" dirty="0">
+                <a:solidFill>
+                  <a:srgbClr val="F96167"/>
+                </a:solidFill>
+                <a:latin typeface="Calibri" pitchFamily="34" charset="0"/>
+                <a:ea typeface="Calibri" pitchFamily="34" charset="-122"/>
+                <a:cs typeface="Calibri" pitchFamily="34" charset="-120"/>
+              </a:rPr>
+              <a:t>توسيع السوق</a:t>
+            </a:r>
+            <a:endParaRPr lang="en-US" sz="1200" dirty="0"/>
+          </a:p>
+        </p:txBody>
+      </p:sp>
+      <p:sp>
+        <p:nvSpPr>
+          <p:cNvPr id="26" name="Text 21"/>
+          <p:cNvSpPr/>
+          <p:nvPr/>
+        </p:nvSpPr>
+        <p:spPr>
+          <a:xfrm>
+            <a:off x="914400" y="3977640"/>
+            <a:ext cx="2834640" cy="1600200"/>
+          </a:xfrm>
+          <a:prstGeom prst="rect">
+            <a:avLst/>
+          </a:prstGeom>
+          <a:noFill/>
+          <a:ln/>
+        </p:spPr>
+        <p:txBody>
+          <a:bodyPr wrap="square" rtlCol="0" anchor="t"/>
+          <a:lstStyle/>
+          <a:p>
+            <a:pPr algn="r" indent="0" marL="0">
               <a:buNone/>
             </a:pPr>
             <a:r>
               <a:rPr lang="en-US" sz="1200" dirty="0">
                 <a:solidFill>
-                  <a:srgbClr val="CADCFC"/>
-                </a:solidFill>
-                <a:latin typeface="Calibri" pitchFamily="34" charset="0"/>
-                <a:ea typeface="Calibri" pitchFamily="34" charset="-122"/>
-                <a:cs typeface="Calibri" pitchFamily="34" charset="-120"/>
-              </a:rPr>
-              <a:t>لأصحاب الأعمال الصغيرة: من الفكرة إلى الإعلان المطبوع والمُوصَّل</a:t>
+                  <a:srgbClr val="6B7280"/>
+                </a:solidFill>
+                <a:latin typeface="Calibri" pitchFamily="34" charset="0"/>
+                <a:ea typeface="Calibri" pitchFamily="34" charset="-122"/>
+                <a:cs typeface="Calibri" pitchFamily="34" charset="-120"/>
+              </a:rPr>
+              <a:t>فتح باب التسجيل لما لا يقل عن 100 مطبعة ووكالة، وتفعيل نظام المنافسات بين مقدمي الخدمة.</a:t>
             </a:r>
             <a:endParaRPr lang="en-US" sz="1200" dirty="0"/>
           </a:p>
@@ -8806,7 +9793,7 @@
       </p:sp>
       <p:sp>
         <p:nvSpPr>
-          <p:cNvPr id="19" name="Text 14"/>
+          <p:cNvPr id="27" name="Text 22"/>
           <p:cNvSpPr/>
           <p:nvPr/>
         </p:nvSpPr>
